--- a/CloudFormationWindows/LANSA-AWS-Scalable-Stack-Architecture-Diagram.pptx
+++ b/CloudFormationWindows/LANSA-AWS-Scalable-Stack-Architecture-Diagram.pptx
@@ -272,7 +272,7 @@
           <a:p>
             <a:fld id="{833AAB56-1DA1-455B-B93A-07372B48EE12}" type="datetimeFigureOut">
               <a:rPr lang="en-AU" smtClean="0"/>
-              <a:t>10/12/2020</a:t>
+              <a:t>27/04/2026</a:t>
             </a:fld>
             <a:endParaRPr lang="en-AU"/>
           </a:p>
@@ -472,7 +472,7 @@
           <a:p>
             <a:fld id="{833AAB56-1DA1-455B-B93A-07372B48EE12}" type="datetimeFigureOut">
               <a:rPr lang="en-AU" smtClean="0"/>
-              <a:t>10/12/2020</a:t>
+              <a:t>27/04/2026</a:t>
             </a:fld>
             <a:endParaRPr lang="en-AU"/>
           </a:p>
@@ -682,7 +682,7 @@
           <a:p>
             <a:fld id="{833AAB56-1DA1-455B-B93A-07372B48EE12}" type="datetimeFigureOut">
               <a:rPr lang="en-AU" smtClean="0"/>
-              <a:t>10/12/2020</a:t>
+              <a:t>27/04/2026</a:t>
             </a:fld>
             <a:endParaRPr lang="en-AU"/>
           </a:p>
@@ -882,7 +882,7 @@
           <a:p>
             <a:fld id="{833AAB56-1DA1-455B-B93A-07372B48EE12}" type="datetimeFigureOut">
               <a:rPr lang="en-AU" smtClean="0"/>
-              <a:t>10/12/2020</a:t>
+              <a:t>27/04/2026</a:t>
             </a:fld>
             <a:endParaRPr lang="en-AU"/>
           </a:p>
@@ -1158,7 +1158,7 @@
           <a:p>
             <a:fld id="{833AAB56-1DA1-455B-B93A-07372B48EE12}" type="datetimeFigureOut">
               <a:rPr lang="en-AU" smtClean="0"/>
-              <a:t>10/12/2020</a:t>
+              <a:t>27/04/2026</a:t>
             </a:fld>
             <a:endParaRPr lang="en-AU"/>
           </a:p>
@@ -1426,7 +1426,7 @@
           <a:p>
             <a:fld id="{833AAB56-1DA1-455B-B93A-07372B48EE12}" type="datetimeFigureOut">
               <a:rPr lang="en-AU" smtClean="0"/>
-              <a:t>10/12/2020</a:t>
+              <a:t>27/04/2026</a:t>
             </a:fld>
             <a:endParaRPr lang="en-AU"/>
           </a:p>
@@ -1841,7 +1841,7 @@
           <a:p>
             <a:fld id="{833AAB56-1DA1-455B-B93A-07372B48EE12}" type="datetimeFigureOut">
               <a:rPr lang="en-AU" smtClean="0"/>
-              <a:t>10/12/2020</a:t>
+              <a:t>27/04/2026</a:t>
             </a:fld>
             <a:endParaRPr lang="en-AU"/>
           </a:p>
@@ -1983,7 +1983,7 @@
           <a:p>
             <a:fld id="{833AAB56-1DA1-455B-B93A-07372B48EE12}" type="datetimeFigureOut">
               <a:rPr lang="en-AU" smtClean="0"/>
-              <a:t>10/12/2020</a:t>
+              <a:t>27/04/2026</a:t>
             </a:fld>
             <a:endParaRPr lang="en-AU"/>
           </a:p>
@@ -2096,7 +2096,7 @@
           <a:p>
             <a:fld id="{833AAB56-1DA1-455B-B93A-07372B48EE12}" type="datetimeFigureOut">
               <a:rPr lang="en-AU" smtClean="0"/>
-              <a:t>10/12/2020</a:t>
+              <a:t>27/04/2026</a:t>
             </a:fld>
             <a:endParaRPr lang="en-AU"/>
           </a:p>
@@ -2409,7 +2409,7 @@
           <a:p>
             <a:fld id="{833AAB56-1DA1-455B-B93A-07372B48EE12}" type="datetimeFigureOut">
               <a:rPr lang="en-AU" smtClean="0"/>
-              <a:t>10/12/2020</a:t>
+              <a:t>27/04/2026</a:t>
             </a:fld>
             <a:endParaRPr lang="en-AU"/>
           </a:p>
@@ -2698,7 +2698,7 @@
           <a:p>
             <a:fld id="{833AAB56-1DA1-455B-B93A-07372B48EE12}" type="datetimeFigureOut">
               <a:rPr lang="en-AU" smtClean="0"/>
-              <a:t>10/12/2020</a:t>
+              <a:t>27/04/2026</a:t>
             </a:fld>
             <a:endParaRPr lang="en-AU"/>
           </a:p>
@@ -2941,7 +2941,7 @@
           <a:p>
             <a:fld id="{833AAB56-1DA1-455B-B93A-07372B48EE12}" type="datetimeFigureOut">
               <a:rPr lang="en-AU" smtClean="0"/>
-              <a:t>10/12/2020</a:t>
+              <a:t>27/04/2026</a:t>
             </a:fld>
             <a:endParaRPr lang="en-AU"/>
           </a:p>
@@ -3360,6 +3360,76 @@
       </p:grpSpPr>
       <p:sp>
         <p:nvSpPr>
+          <p:cNvPr id="75" name="Rectangle 74" descr="VPC group border">
+            <a:extLst>
+              <a:ext uri="{FF2B5EF4-FFF2-40B4-BE49-F238E27FC236}">
+                <a16:creationId xmlns:a16="http://schemas.microsoft.com/office/drawing/2014/main" id="{8ABF7C73-2B8F-4D89-8D5B-7008FFE3264C}"/>
+              </a:ext>
+            </a:extLst>
+          </p:cNvPr>
+          <p:cNvSpPr/>
+          <p:nvPr/>
+        </p:nvSpPr>
+        <p:spPr>
+          <a:xfrm>
+            <a:off x="652411" y="1279962"/>
+            <a:ext cx="6769397" cy="5020170"/>
+          </a:xfrm>
+          <a:prstGeom prst="rect">
+            <a:avLst/>
+          </a:prstGeom>
+          <a:noFill/>
+          <a:ln w="15875">
+            <a:solidFill>
+              <a:srgbClr val="8C4FFF"/>
+            </a:solidFill>
+          </a:ln>
+        </p:spPr>
+        <p:style>
+          <a:lnRef idx="2">
+            <a:schemeClr val="accent1">
+              <a:shade val="50000"/>
+            </a:schemeClr>
+          </a:lnRef>
+          <a:fillRef idx="1">
+            <a:schemeClr val="accent1"/>
+          </a:fillRef>
+          <a:effectRef idx="0">
+            <a:schemeClr val="accent1"/>
+          </a:effectRef>
+          <a:fontRef idx="minor">
+            <a:schemeClr val="lt1"/>
+          </a:fontRef>
+        </p:style>
+        <p:txBody>
+          <a:bodyPr lIns="502920" tIns="91440"/>
+          <a:lstStyle/>
+          <a:p>
+            <a:pPr eaLnBrk="1" fontAlgn="auto" hangingPunct="1">
+              <a:spcBef>
+                <a:spcPts val="0"/>
+              </a:spcBef>
+              <a:spcAft>
+                <a:spcPts val="0"/>
+              </a:spcAft>
+              <a:defRPr/>
+            </a:pPr>
+            <a:r>
+              <a:rPr lang="en-US" sz="1200" dirty="0">
+                <a:ln w="0"/>
+                <a:solidFill>
+                  <a:schemeClr val="tx1"/>
+                </a:solidFill>
+                <a:latin typeface="Arial" panose="020B0604020202020204" pitchFamily="34" charset="0"/>
+                <a:cs typeface="Arial" panose="020B0604020202020204" pitchFamily="34" charset="0"/>
+              </a:rPr>
+              <a:t>Virtual private cloud (VPC)</a:t>
+            </a:r>
+          </a:p>
+        </p:txBody>
+      </p:sp>
+      <p:sp>
+        <p:nvSpPr>
           <p:cNvPr id="2" name="Rectangle 1">
             <a:extLst>
               <a:ext uri="{FF2B5EF4-FFF2-40B4-BE49-F238E27FC236}">
@@ -3487,37 +3557,2142 @@
           </a:extLst>
         </p:spPr>
       </p:pic>
+      <p:grpSp>
+        <p:nvGrpSpPr>
+          <p:cNvPr id="95" name="Group 94">
+            <a:extLst>
+              <a:ext uri="{FF2B5EF4-FFF2-40B4-BE49-F238E27FC236}">
+                <a16:creationId xmlns:a16="http://schemas.microsoft.com/office/drawing/2014/main" id="{422B8254-8542-43A1-9139-2ABA46FE9E78}"/>
+              </a:ext>
+            </a:extLst>
+          </p:cNvPr>
+          <p:cNvGrpSpPr/>
+          <p:nvPr/>
+        </p:nvGrpSpPr>
+        <p:grpSpPr>
+          <a:xfrm>
+            <a:off x="2055303" y="2333190"/>
+            <a:ext cx="4286796" cy="422767"/>
+            <a:chOff x="2055303" y="2333190"/>
+            <a:chExt cx="4286796" cy="422767"/>
+          </a:xfrm>
+        </p:grpSpPr>
+        <p:sp>
+          <p:nvSpPr>
+            <p:cNvPr id="17" name="Freeform 26">
+              <a:extLst>
+                <a:ext uri="{FF2B5EF4-FFF2-40B4-BE49-F238E27FC236}">
+                  <a16:creationId xmlns:a16="http://schemas.microsoft.com/office/drawing/2014/main" id="{71B2B649-DB09-46C0-A584-B4DC97B2A6B0}"/>
+                </a:ext>
+              </a:extLst>
+            </p:cNvPr>
+            <p:cNvSpPr/>
+            <p:nvPr/>
+          </p:nvSpPr>
+          <p:spPr bwMode="auto">
+            <a:xfrm rot="16200000">
+              <a:off x="4054473" y="468332"/>
+              <a:ext cx="288455" cy="4286796"/>
+            </a:xfrm>
+            <a:custGeom>
+              <a:avLst/>
+              <a:gdLst>
+                <a:gd name="connsiteX0" fmla="*/ 0 w 622300"/>
+                <a:gd name="connsiteY0" fmla="*/ 0 h 1574800"/>
+                <a:gd name="connsiteX1" fmla="*/ 622300 w 622300"/>
+                <a:gd name="connsiteY1" fmla="*/ 0 h 1574800"/>
+                <a:gd name="connsiteX2" fmla="*/ 622300 w 622300"/>
+                <a:gd name="connsiteY2" fmla="*/ 1574800 h 1574800"/>
+                <a:gd name="connsiteX3" fmla="*/ 482600 w 622300"/>
+                <a:gd name="connsiteY3" fmla="*/ 1574800 h 1574800"/>
+                <a:gd name="connsiteX4" fmla="*/ 0 w 622300"/>
+                <a:gd name="connsiteY4" fmla="*/ 1574800 h 1574800"/>
+              </a:gdLst>
+              <a:ahLst/>
+              <a:cxnLst>
+                <a:cxn ang="0">
+                  <a:pos x="connsiteX0" y="connsiteY0"/>
+                </a:cxn>
+                <a:cxn ang="0">
+                  <a:pos x="connsiteX1" y="connsiteY1"/>
+                </a:cxn>
+                <a:cxn ang="0">
+                  <a:pos x="connsiteX2" y="connsiteY2"/>
+                </a:cxn>
+                <a:cxn ang="0">
+                  <a:pos x="connsiteX3" y="connsiteY3"/>
+                </a:cxn>
+                <a:cxn ang="0">
+                  <a:pos x="connsiteX4" y="connsiteY4"/>
+                </a:cxn>
+              </a:cxnLst>
+              <a:rect l="l" t="t" r="r" b="b"/>
+              <a:pathLst>
+                <a:path w="622300" h="1574800">
+                  <a:moveTo>
+                    <a:pt x="0" y="0"/>
+                  </a:moveTo>
+                  <a:lnTo>
+                    <a:pt x="622300" y="0"/>
+                  </a:lnTo>
+                  <a:lnTo>
+                    <a:pt x="622300" y="1574800"/>
+                  </a:lnTo>
+                  <a:lnTo>
+                    <a:pt x="482600" y="1574800"/>
+                  </a:lnTo>
+                  <a:lnTo>
+                    <a:pt x="0" y="1574800"/>
+                  </a:lnTo>
+                </a:path>
+              </a:pathLst>
+            </a:custGeom>
+            <a:noFill/>
+            <a:ln w="15875">
+              <a:solidFill>
+                <a:schemeClr val="tx2"/>
+              </a:solidFill>
+              <a:headEnd type="arrow" w="med" len="sm"/>
+              <a:tailEnd type="arrow" w="med" len="sm"/>
+            </a:ln>
+          </p:spPr>
+          <p:style>
+            <a:lnRef idx="2">
+              <a:schemeClr val="accent1">
+                <a:shade val="50000"/>
+              </a:schemeClr>
+            </a:lnRef>
+            <a:fillRef idx="1">
+              <a:schemeClr val="accent1"/>
+            </a:fillRef>
+            <a:effectRef idx="0">
+              <a:schemeClr val="accent1"/>
+            </a:effectRef>
+            <a:fontRef idx="minor">
+              <a:schemeClr val="lt1"/>
+            </a:fontRef>
+          </p:style>
+          <p:txBody>
+            <a:bodyPr anchor="ctr"/>
+            <a:lstStyle/>
+            <a:p>
+              <a:pPr algn="ctr" eaLnBrk="1" fontAlgn="auto" hangingPunct="1">
+                <a:spcBef>
+                  <a:spcPts val="0"/>
+                </a:spcBef>
+                <a:spcAft>
+                  <a:spcPts val="0"/>
+                </a:spcAft>
+                <a:defRPr/>
+              </a:pPr>
+              <a:endParaRPr lang="en-US" dirty="0"/>
+            </a:p>
+          </p:txBody>
+        </p:sp>
+        <p:cxnSp>
+          <p:nvCxnSpPr>
+            <p:cNvPr id="18" name="Straight Arrow Connector 17">
+              <a:extLst>
+                <a:ext uri="{FF2B5EF4-FFF2-40B4-BE49-F238E27FC236}">
+                  <a16:creationId xmlns:a16="http://schemas.microsoft.com/office/drawing/2014/main" id="{2752E979-E675-4831-841E-C0892124DA55}"/>
+                </a:ext>
+              </a:extLst>
+            </p:cNvPr>
+            <p:cNvCxnSpPr>
+              <a:cxnSpLocks/>
+            </p:cNvCxnSpPr>
+            <p:nvPr/>
+          </p:nvCxnSpPr>
+          <p:spPr bwMode="auto">
+            <a:xfrm>
+              <a:off x="4195357" y="2333190"/>
+              <a:ext cx="0" cy="134103"/>
+            </a:xfrm>
+            <a:prstGeom prst="straightConnector1">
+              <a:avLst/>
+            </a:prstGeom>
+            <a:ln w="15875">
+              <a:solidFill>
+                <a:srgbClr val="545B64"/>
+              </a:solidFill>
+              <a:headEnd type="none" w="med" len="sm"/>
+              <a:tailEnd type="none" w="med" len="sm"/>
+            </a:ln>
+          </p:spPr>
+          <p:style>
+            <a:lnRef idx="1">
+              <a:schemeClr val="accent1"/>
+            </a:lnRef>
+            <a:fillRef idx="0">
+              <a:schemeClr val="accent1"/>
+            </a:fillRef>
+            <a:effectRef idx="0">
+              <a:schemeClr val="accent1"/>
+            </a:effectRef>
+            <a:fontRef idx="minor">
+              <a:schemeClr val="tx1"/>
+            </a:fontRef>
+          </p:style>
+        </p:cxnSp>
+      </p:grpSp>
+      <p:cxnSp>
+        <p:nvCxnSpPr>
+          <p:cNvPr id="35" name="Straight Arrow Connector 34">
+            <a:extLst>
+              <a:ext uri="{FF2B5EF4-FFF2-40B4-BE49-F238E27FC236}">
+                <a16:creationId xmlns:a16="http://schemas.microsoft.com/office/drawing/2014/main" id="{396789A5-F63B-4857-8011-58F7B018E810}"/>
+              </a:ext>
+            </a:extLst>
+          </p:cNvPr>
+          <p:cNvCxnSpPr>
+            <a:cxnSpLocks/>
+          </p:cNvCxnSpPr>
+          <p:nvPr/>
+        </p:nvCxnSpPr>
+        <p:spPr>
+          <a:xfrm>
+            <a:off x="1457479" y="4939145"/>
+            <a:ext cx="250023" cy="0"/>
+          </a:xfrm>
+          <a:prstGeom prst="straightConnector1">
+            <a:avLst/>
+          </a:prstGeom>
+          <a:ln w="15875">
+            <a:solidFill>
+              <a:srgbClr val="545B64"/>
+            </a:solidFill>
+            <a:headEnd type="none" w="med" len="sm"/>
+            <a:tailEnd type="arrow" w="med" len="sm"/>
+          </a:ln>
+        </p:spPr>
+        <p:style>
+          <a:lnRef idx="1">
+            <a:schemeClr val="accent1"/>
+          </a:lnRef>
+          <a:fillRef idx="0">
+            <a:schemeClr val="accent1"/>
+          </a:fillRef>
+          <a:effectRef idx="0">
+            <a:schemeClr val="accent1"/>
+          </a:effectRef>
+          <a:fontRef idx="minor">
+            <a:schemeClr val="tx1"/>
+          </a:fontRef>
+        </p:style>
+      </p:cxnSp>
+      <p:sp>
+        <p:nvSpPr>
+          <p:cNvPr id="39" name="Freeform 35">
+            <a:extLst>
+              <a:ext uri="{FF2B5EF4-FFF2-40B4-BE49-F238E27FC236}">
+                <a16:creationId xmlns:a16="http://schemas.microsoft.com/office/drawing/2014/main" id="{6A03670A-48AF-44B8-9EF1-CE488C1E5A6C}"/>
+              </a:ext>
+            </a:extLst>
+          </p:cNvPr>
+          <p:cNvSpPr/>
+          <p:nvPr/>
+        </p:nvSpPr>
+        <p:spPr>
+          <a:xfrm rot="16200000" flipH="1" flipV="1">
+            <a:off x="2287593" y="4536839"/>
+            <a:ext cx="457200" cy="347411"/>
+          </a:xfrm>
+          <a:custGeom>
+            <a:avLst/>
+            <a:gdLst>
+              <a:gd name="connsiteX0" fmla="*/ 1371600 w 1371600"/>
+              <a:gd name="connsiteY0" fmla="*/ 711200 h 711200"/>
+              <a:gd name="connsiteX1" fmla="*/ 1371600 w 1371600"/>
+              <a:gd name="connsiteY1" fmla="*/ 0 h 711200"/>
+              <a:gd name="connsiteX2" fmla="*/ 0 w 1371600"/>
+              <a:gd name="connsiteY2" fmla="*/ 0 h 711200"/>
+            </a:gdLst>
+            <a:ahLst/>
+            <a:cxnLst>
+              <a:cxn ang="0">
+                <a:pos x="connsiteX0" y="connsiteY0"/>
+              </a:cxn>
+              <a:cxn ang="0">
+                <a:pos x="connsiteX1" y="connsiteY1"/>
+              </a:cxn>
+              <a:cxn ang="0">
+                <a:pos x="connsiteX2" y="connsiteY2"/>
+              </a:cxn>
+            </a:cxnLst>
+            <a:rect l="l" t="t" r="r" b="b"/>
+            <a:pathLst>
+              <a:path w="1371600" h="711200">
+                <a:moveTo>
+                  <a:pt x="1371600" y="711200"/>
+                </a:moveTo>
+                <a:lnTo>
+                  <a:pt x="1371600" y="0"/>
+                </a:lnTo>
+                <a:lnTo>
+                  <a:pt x="0" y="0"/>
+                </a:lnTo>
+              </a:path>
+            </a:pathLst>
+          </a:custGeom>
+          <a:noFill/>
+          <a:ln w="15875">
+            <a:solidFill>
+              <a:schemeClr val="tx2"/>
+            </a:solidFill>
+            <a:headEnd type="none" w="med" len="sm"/>
+            <a:tailEnd type="arrow" w="med" len="sm"/>
+          </a:ln>
+        </p:spPr>
+        <p:style>
+          <a:lnRef idx="2">
+            <a:schemeClr val="accent1">
+              <a:shade val="50000"/>
+            </a:schemeClr>
+          </a:lnRef>
+          <a:fillRef idx="1">
+            <a:schemeClr val="accent1"/>
+          </a:fillRef>
+          <a:effectRef idx="0">
+            <a:schemeClr val="accent1"/>
+          </a:effectRef>
+          <a:fontRef idx="minor">
+            <a:schemeClr val="lt1"/>
+          </a:fontRef>
+        </p:style>
+        <p:txBody>
+          <a:bodyPr anchor="ctr"/>
+          <a:lstStyle/>
+          <a:p>
+            <a:pPr algn="ctr" eaLnBrk="1" fontAlgn="auto" hangingPunct="1">
+              <a:spcBef>
+                <a:spcPts val="0"/>
+              </a:spcBef>
+              <a:spcAft>
+                <a:spcPts val="0"/>
+              </a:spcAft>
+              <a:defRPr/>
+            </a:pPr>
+            <a:endParaRPr lang="en-US"/>
+          </a:p>
+        </p:txBody>
+      </p:sp>
+      <p:sp>
+        <p:nvSpPr>
+          <p:cNvPr id="40" name="Freeform 35">
+            <a:extLst>
+              <a:ext uri="{FF2B5EF4-FFF2-40B4-BE49-F238E27FC236}">
+                <a16:creationId xmlns:a16="http://schemas.microsoft.com/office/drawing/2014/main" id="{578A6E0E-888E-4B25-97A5-D242F3943664}"/>
+              </a:ext>
+            </a:extLst>
+          </p:cNvPr>
+          <p:cNvSpPr/>
+          <p:nvPr/>
+        </p:nvSpPr>
+        <p:spPr>
+          <a:xfrm rot="5400000" flipH="1" flipV="1">
+            <a:off x="541402" y="3390796"/>
+            <a:ext cx="2477932" cy="630924"/>
+          </a:xfrm>
+          <a:custGeom>
+            <a:avLst/>
+            <a:gdLst>
+              <a:gd name="connsiteX0" fmla="*/ 1371600 w 1371600"/>
+              <a:gd name="connsiteY0" fmla="*/ 711200 h 711200"/>
+              <a:gd name="connsiteX1" fmla="*/ 1371600 w 1371600"/>
+              <a:gd name="connsiteY1" fmla="*/ 0 h 711200"/>
+              <a:gd name="connsiteX2" fmla="*/ 0 w 1371600"/>
+              <a:gd name="connsiteY2" fmla="*/ 0 h 711200"/>
+            </a:gdLst>
+            <a:ahLst/>
+            <a:cxnLst>
+              <a:cxn ang="0">
+                <a:pos x="connsiteX0" y="connsiteY0"/>
+              </a:cxn>
+              <a:cxn ang="0">
+                <a:pos x="connsiteX1" y="connsiteY1"/>
+              </a:cxn>
+              <a:cxn ang="0">
+                <a:pos x="connsiteX2" y="connsiteY2"/>
+              </a:cxn>
+            </a:cxnLst>
+            <a:rect l="l" t="t" r="r" b="b"/>
+            <a:pathLst>
+              <a:path w="1371600" h="711200">
+                <a:moveTo>
+                  <a:pt x="1371600" y="711200"/>
+                </a:moveTo>
+                <a:lnTo>
+                  <a:pt x="1371600" y="0"/>
+                </a:lnTo>
+                <a:lnTo>
+                  <a:pt x="0" y="0"/>
+                </a:lnTo>
+              </a:path>
+            </a:pathLst>
+          </a:custGeom>
+          <a:noFill/>
+          <a:ln w="15875">
+            <a:solidFill>
+              <a:schemeClr val="tx2"/>
+            </a:solidFill>
+            <a:headEnd type="none" w="med" len="sm"/>
+            <a:tailEnd type="none" w="med" len="sm"/>
+          </a:ln>
+        </p:spPr>
+        <p:style>
+          <a:lnRef idx="2">
+            <a:schemeClr val="accent1">
+              <a:shade val="50000"/>
+            </a:schemeClr>
+          </a:lnRef>
+          <a:fillRef idx="1">
+            <a:schemeClr val="accent1"/>
+          </a:fillRef>
+          <a:effectRef idx="0">
+            <a:schemeClr val="accent1"/>
+          </a:effectRef>
+          <a:fontRef idx="minor">
+            <a:schemeClr val="lt1"/>
+          </a:fontRef>
+        </p:style>
+        <p:txBody>
+          <a:bodyPr anchor="ctr"/>
+          <a:lstStyle/>
+          <a:p>
+            <a:pPr algn="ctr" eaLnBrk="1" fontAlgn="auto" hangingPunct="1">
+              <a:spcBef>
+                <a:spcPts val="0"/>
+              </a:spcBef>
+              <a:spcAft>
+                <a:spcPts val="0"/>
+              </a:spcAft>
+              <a:defRPr/>
+            </a:pPr>
+            <a:endParaRPr lang="en-US"/>
+          </a:p>
+        </p:txBody>
+      </p:sp>
+      <p:sp>
+        <p:nvSpPr>
+          <p:cNvPr id="45" name="Rectangle 44">
+            <a:extLst>
+              <a:ext uri="{FF2B5EF4-FFF2-40B4-BE49-F238E27FC236}">
+                <a16:creationId xmlns:a16="http://schemas.microsoft.com/office/drawing/2014/main" id="{6AD733C9-7131-4B05-B1A7-22A1618AAD8B}"/>
+              </a:ext>
+            </a:extLst>
+          </p:cNvPr>
+          <p:cNvSpPr/>
+          <p:nvPr/>
+        </p:nvSpPr>
+        <p:spPr>
+          <a:xfrm>
+            <a:off x="8031531" y="376534"/>
+            <a:ext cx="3681627" cy="4324261"/>
+          </a:xfrm>
+          <a:prstGeom prst="rect">
+            <a:avLst/>
+          </a:prstGeom>
+        </p:spPr>
+        <p:txBody>
+          <a:bodyPr wrap="square">
+            <a:spAutoFit/>
+          </a:bodyPr>
+          <a:lstStyle/>
+          <a:p>
+            <a:pPr marL="228600" indent="-228600">
+              <a:buFont typeface="+mj-lt"/>
+              <a:buAutoNum type="arabicPeriod"/>
+            </a:pPr>
+            <a:r>
+              <a:rPr lang="en-AU" sz="1100" dirty="0"/>
+              <a:t>The Internet Gateway provides access into the application.</a:t>
+            </a:r>
+          </a:p>
+          <a:p>
+            <a:pPr marL="228600" indent="-228600">
+              <a:buFont typeface="+mj-lt"/>
+              <a:buAutoNum type="arabicPeriod"/>
+            </a:pPr>
+            <a:r>
+              <a:rPr lang="en-AU" sz="1100" dirty="0"/>
+              <a:t>The</a:t>
+            </a:r>
+            <a:r>
+              <a:rPr lang="en-AU" sz="1100" baseline="0" dirty="0"/>
+              <a:t> Elastic IP is a permanent public ip address which is connected to the load balancer using an internal ip address that may vary at will</a:t>
+            </a:r>
+          </a:p>
+          <a:p>
+            <a:pPr marL="228600" indent="-228600">
+              <a:buFont typeface="+mj-lt"/>
+              <a:buAutoNum type="arabicPeriod"/>
+            </a:pPr>
+            <a:r>
+              <a:rPr lang="en-AU" sz="1100" baseline="0" dirty="0"/>
+              <a:t>The Classic Load Balancer automatically scales up to handle the volume of traffic </a:t>
+            </a:r>
+          </a:p>
+          <a:p>
+            <a:pPr marL="228600" indent="-228600">
+              <a:buFont typeface="+mj-lt"/>
+              <a:buAutoNum type="arabicPeriod"/>
+            </a:pPr>
+            <a:r>
+              <a:rPr lang="en-AU" sz="1100" baseline="0" dirty="0"/>
+              <a:t>The application is spread across 2 availability zones</a:t>
+            </a:r>
+          </a:p>
+          <a:p>
+            <a:pPr marL="228600" indent="-228600">
+              <a:buFont typeface="+mj-lt"/>
+              <a:buAutoNum type="arabicPeriod"/>
+            </a:pPr>
+            <a:r>
+              <a:rPr lang="en-AU" sz="1100" baseline="0" dirty="0"/>
+              <a:t>The Webserver Auto-Scaling Group manages the Web Server instances. The ASG Scales Out increasing the number of web servers as traffic rises and Scales In as traffic decreases.</a:t>
+            </a:r>
+          </a:p>
+          <a:p>
+            <a:pPr marL="228600" indent="-228600">
+              <a:buFont typeface="+mj-lt"/>
+              <a:buAutoNum type="arabicPeriod"/>
+            </a:pPr>
+            <a:r>
+              <a:rPr lang="en-AU" sz="1100" baseline="0" dirty="0"/>
+              <a:t>The webservers connect to a SQL Server instance</a:t>
+            </a:r>
+          </a:p>
+          <a:p>
+            <a:pPr marL="228600" indent="-228600">
+              <a:buFont typeface="+mj-lt"/>
+              <a:buAutoNum type="arabicPeriod"/>
+            </a:pPr>
+            <a:r>
+              <a:rPr lang="en-AU" sz="1100" dirty="0"/>
+              <a:t>When a webserver is created by the ASG it i</a:t>
+            </a:r>
+            <a:r>
+              <a:rPr lang="en-AU" sz="1100" baseline="0" dirty="0"/>
+              <a:t>nstalls the LANSA MSI which has been uploaded to S3 by the customer</a:t>
+            </a:r>
+          </a:p>
+          <a:p>
+            <a:pPr marL="228600" indent="-228600">
+              <a:buFont typeface="+mj-lt"/>
+              <a:buAutoNum type="arabicPeriod"/>
+            </a:pPr>
+            <a:r>
+              <a:rPr lang="en-AU" sz="1100" dirty="0"/>
+              <a:t>The Database Auto Scaling Group web server is identical to the other web servers, except that it is the one instance that is responsible for maintaining the database structure in the database server. It is the instance which creates the tables when the application is installed. And upgrades the tables when the application is upgraded. The Database ASG is set to only have 1 instance running at a time. It is important that only 1 instance modifies the database structure.</a:t>
+            </a:r>
+            <a:endParaRPr lang="en-AU" sz="1100" baseline="0" dirty="0"/>
+          </a:p>
+        </p:txBody>
+      </p:sp>
+      <p:sp>
+        <p:nvSpPr>
+          <p:cNvPr id="36" name="Rectangle 35" descr="Availability Zone 1 represented by availability zone resource group.">
+            <a:extLst>
+              <a:ext uri="{FF2B5EF4-FFF2-40B4-BE49-F238E27FC236}">
+                <a16:creationId xmlns:a16="http://schemas.microsoft.com/office/drawing/2014/main" id="{13DEE933-EE80-4BDF-B422-428A6F832EF4}"/>
+              </a:ext>
+            </a:extLst>
+          </p:cNvPr>
+          <p:cNvSpPr/>
+          <p:nvPr/>
+        </p:nvSpPr>
+        <p:spPr bwMode="auto">
+          <a:xfrm>
+            <a:off x="1034806" y="941189"/>
+            <a:ext cx="2031628" cy="5484776"/>
+          </a:xfrm>
+          <a:prstGeom prst="rect">
+            <a:avLst/>
+          </a:prstGeom>
+          <a:noFill/>
+          <a:ln w="15875">
+            <a:solidFill>
+              <a:srgbClr val="00A4A6"/>
+            </a:solidFill>
+            <a:prstDash val="dash"/>
+          </a:ln>
+        </p:spPr>
+        <p:style>
+          <a:lnRef idx="2">
+            <a:schemeClr val="accent1">
+              <a:shade val="50000"/>
+            </a:schemeClr>
+          </a:lnRef>
+          <a:fillRef idx="1">
+            <a:schemeClr val="accent1"/>
+          </a:fillRef>
+          <a:effectRef idx="0">
+            <a:schemeClr val="accent1"/>
+          </a:effectRef>
+          <a:fontRef idx="minor">
+            <a:schemeClr val="lt1"/>
+          </a:fontRef>
+        </p:style>
+        <p:txBody>
+          <a:bodyPr tIns="91440"/>
+          <a:lstStyle/>
+          <a:p>
+            <a:pPr algn="ctr" eaLnBrk="1" fontAlgn="auto" hangingPunct="1">
+              <a:spcBef>
+                <a:spcPts val="0"/>
+              </a:spcBef>
+              <a:spcAft>
+                <a:spcPts val="0"/>
+              </a:spcAft>
+              <a:defRPr/>
+            </a:pPr>
+            <a:r>
+              <a:rPr lang="en-US" sz="1200" dirty="0">
+                <a:solidFill>
+                  <a:schemeClr val="tx1"/>
+                </a:solidFill>
+                <a:latin typeface="Arial" panose="020B0604020202020204" pitchFamily="34" charset="0"/>
+                <a:cs typeface="Arial" panose="020B0604020202020204" pitchFamily="34" charset="0"/>
+              </a:rPr>
+              <a:t>Availability Zone 1</a:t>
+            </a:r>
+          </a:p>
+        </p:txBody>
+      </p:sp>
+      <p:grpSp>
+        <p:nvGrpSpPr>
+          <p:cNvPr id="90" name="Group 89">
+            <a:extLst>
+              <a:ext uri="{FF2B5EF4-FFF2-40B4-BE49-F238E27FC236}">
+                <a16:creationId xmlns:a16="http://schemas.microsoft.com/office/drawing/2014/main" id="{C0FAE142-3A14-444A-AE9C-874E46C1FB24}"/>
+              </a:ext>
+            </a:extLst>
+          </p:cNvPr>
+          <p:cNvGrpSpPr/>
+          <p:nvPr/>
+        </p:nvGrpSpPr>
+        <p:grpSpPr>
+          <a:xfrm>
+            <a:off x="1151473" y="2611187"/>
+            <a:ext cx="6065241" cy="1001721"/>
+            <a:chOff x="1157680" y="2249257"/>
+            <a:chExt cx="6065241" cy="1001721"/>
+          </a:xfrm>
+        </p:grpSpPr>
+        <p:grpSp>
+          <p:nvGrpSpPr>
+            <p:cNvPr id="82" name="Group 81">
+              <a:extLst>
+                <a:ext uri="{FF2B5EF4-FFF2-40B4-BE49-F238E27FC236}">
+                  <a16:creationId xmlns:a16="http://schemas.microsoft.com/office/drawing/2014/main" id="{BEC396B9-9C92-4798-9410-0CBACF942988}"/>
+                </a:ext>
+              </a:extLst>
+            </p:cNvPr>
+            <p:cNvGrpSpPr/>
+            <p:nvPr/>
+          </p:nvGrpSpPr>
+          <p:grpSpPr>
+            <a:xfrm>
+              <a:off x="5527940" y="2394028"/>
+              <a:ext cx="1511300" cy="756158"/>
+              <a:chOff x="3675847" y="1722398"/>
+              <a:chExt cx="1511300" cy="756158"/>
+            </a:xfrm>
+          </p:grpSpPr>
+          <p:sp>
+            <p:nvSpPr>
+              <p:cNvPr id="29" name="TextBox 53">
+                <a:extLst>
+                  <a:ext uri="{FF2B5EF4-FFF2-40B4-BE49-F238E27FC236}">
+                    <a16:creationId xmlns:a16="http://schemas.microsoft.com/office/drawing/2014/main" id="{50527979-3B22-4EA3-8D2A-D6574B2E84A7}"/>
+                  </a:ext>
+                </a:extLst>
+              </p:cNvPr>
+              <p:cNvSpPr txBox="1">
+                <a:spLocks noChangeArrowheads="1"/>
+              </p:cNvSpPr>
+              <p:nvPr/>
+            </p:nvSpPr>
+            <p:spPr bwMode="auto">
+              <a:xfrm>
+                <a:off x="3675847" y="2216619"/>
+                <a:ext cx="1511300" cy="261937"/>
+              </a:xfrm>
+              <a:prstGeom prst="rect">
+                <a:avLst/>
+              </a:prstGeom>
+              <a:noFill/>
+              <a:ln>
+                <a:noFill/>
+              </a:ln>
+              <a:extLst>
+                <a:ext uri="{909E8E84-426E-40DD-AFC4-6F175D3DCCD1}">
+                  <a14:hiddenFill xmlns:a14="http://schemas.microsoft.com/office/drawing/2010/main">
+                    <a:solidFill>
+                      <a:srgbClr val="FFFFFF"/>
+                    </a:solidFill>
+                  </a14:hiddenFill>
+                </a:ext>
+                <a:ext uri="{91240B29-F687-4F45-9708-019B960494DF}">
+                  <a14:hiddenLine xmlns:a14="http://schemas.microsoft.com/office/drawing/2010/main" w="9525">
+                    <a:solidFill>
+                      <a:srgbClr val="000000"/>
+                    </a:solidFill>
+                    <a:miter lim="800000"/>
+                    <a:headEnd/>
+                    <a:tailEnd/>
+                  </a14:hiddenLine>
+                </a:ext>
+              </a:extLst>
+            </p:spPr>
+            <p:txBody>
+              <a:bodyPr>
+                <a:spAutoFit/>
+              </a:bodyPr>
+              <a:lstStyle>
+                <a:lvl1pPr>
+                  <a:defRPr>
+                    <a:solidFill>
+                      <a:schemeClr val="tx1"/>
+                    </a:solidFill>
+                    <a:latin typeface="Calibri" panose="020F0502020204030204" pitchFamily="34" charset="0"/>
+                  </a:defRPr>
+                </a:lvl1pPr>
+                <a:lvl2pPr marL="742950" indent="-285750">
+                  <a:defRPr>
+                    <a:solidFill>
+                      <a:schemeClr val="tx1"/>
+                    </a:solidFill>
+                    <a:latin typeface="Calibri" panose="020F0502020204030204" pitchFamily="34" charset="0"/>
+                  </a:defRPr>
+                </a:lvl2pPr>
+                <a:lvl3pPr marL="1143000" indent="-228600">
+                  <a:defRPr>
+                    <a:solidFill>
+                      <a:schemeClr val="tx1"/>
+                    </a:solidFill>
+                    <a:latin typeface="Calibri" panose="020F0502020204030204" pitchFamily="34" charset="0"/>
+                  </a:defRPr>
+                </a:lvl3pPr>
+                <a:lvl4pPr marL="1600200" indent="-228600">
+                  <a:defRPr>
+                    <a:solidFill>
+                      <a:schemeClr val="tx1"/>
+                    </a:solidFill>
+                    <a:latin typeface="Calibri" panose="020F0502020204030204" pitchFamily="34" charset="0"/>
+                  </a:defRPr>
+                </a:lvl4pPr>
+                <a:lvl5pPr marL="2057400" indent="-228600">
+                  <a:defRPr>
+                    <a:solidFill>
+                      <a:schemeClr val="tx1"/>
+                    </a:solidFill>
+                    <a:latin typeface="Calibri" panose="020F0502020204030204" pitchFamily="34" charset="0"/>
+                  </a:defRPr>
+                </a:lvl5pPr>
+                <a:lvl6pPr marL="2514600" indent="-228600" eaLnBrk="0" fontAlgn="base" hangingPunct="0">
+                  <a:spcBef>
+                    <a:spcPct val="0"/>
+                  </a:spcBef>
+                  <a:spcAft>
+                    <a:spcPct val="0"/>
+                  </a:spcAft>
+                  <a:defRPr>
+                    <a:solidFill>
+                      <a:schemeClr val="tx1"/>
+                    </a:solidFill>
+                    <a:latin typeface="Calibri" panose="020F0502020204030204" pitchFamily="34" charset="0"/>
+                  </a:defRPr>
+                </a:lvl6pPr>
+                <a:lvl7pPr marL="2971800" indent="-228600" eaLnBrk="0" fontAlgn="base" hangingPunct="0">
+                  <a:spcBef>
+                    <a:spcPct val="0"/>
+                  </a:spcBef>
+                  <a:spcAft>
+                    <a:spcPct val="0"/>
+                  </a:spcAft>
+                  <a:defRPr>
+                    <a:solidFill>
+                      <a:schemeClr val="tx1"/>
+                    </a:solidFill>
+                    <a:latin typeface="Calibri" panose="020F0502020204030204" pitchFamily="34" charset="0"/>
+                  </a:defRPr>
+                </a:lvl7pPr>
+                <a:lvl8pPr marL="3429000" indent="-228600" eaLnBrk="0" fontAlgn="base" hangingPunct="0">
+                  <a:spcBef>
+                    <a:spcPct val="0"/>
+                  </a:spcBef>
+                  <a:spcAft>
+                    <a:spcPct val="0"/>
+                  </a:spcAft>
+                  <a:defRPr>
+                    <a:solidFill>
+                      <a:schemeClr val="tx1"/>
+                    </a:solidFill>
+                    <a:latin typeface="Calibri" panose="020F0502020204030204" pitchFamily="34" charset="0"/>
+                  </a:defRPr>
+                </a:lvl8pPr>
+                <a:lvl9pPr marL="3886200" indent="-228600" eaLnBrk="0" fontAlgn="base" hangingPunct="0">
+                  <a:spcBef>
+                    <a:spcPct val="0"/>
+                  </a:spcBef>
+                  <a:spcAft>
+                    <a:spcPct val="0"/>
+                  </a:spcAft>
+                  <a:defRPr>
+                    <a:solidFill>
+                      <a:schemeClr val="tx1"/>
+                    </a:solidFill>
+                    <a:latin typeface="Calibri" panose="020F0502020204030204" pitchFamily="34" charset="0"/>
+                  </a:defRPr>
+                </a:lvl9pPr>
+              </a:lstStyle>
+              <a:p>
+                <a:pPr algn="ctr" eaLnBrk="1" hangingPunct="1"/>
+                <a:r>
+                  <a:rPr lang="en-US" altLang="en-US" sz="1100" dirty="0">
+                    <a:latin typeface="Arial" panose="020B0604020202020204" pitchFamily="34" charset="0"/>
+                    <a:ea typeface="Amazon Ember" panose="020B0603020204020204" pitchFamily="34" charset="0"/>
+                    <a:cs typeface="Arial" panose="020B0604020202020204" pitchFamily="34" charset="0"/>
+                  </a:rPr>
+                  <a:t>Web Servers</a:t>
+                </a:r>
+              </a:p>
+            </p:txBody>
+          </p:sp>
+          <p:pic>
+            <p:nvPicPr>
+              <p:cNvPr id="38" name="Graphic 37">
+                <a:extLst>
+                  <a:ext uri="{FF2B5EF4-FFF2-40B4-BE49-F238E27FC236}">
+                    <a16:creationId xmlns:a16="http://schemas.microsoft.com/office/drawing/2014/main" id="{FE66292F-9187-45A7-B848-1F443172B83B}"/>
+                  </a:ext>
+                </a:extLst>
+              </p:cNvPr>
+              <p:cNvPicPr>
+                <a:picLocks noChangeAspect="1"/>
+              </p:cNvPicPr>
+              <p:nvPr/>
+            </p:nvPicPr>
+            <p:blipFill>
+              <a:blip r:embed="rId3">
+                <a:extLst>
+                  <a:ext uri="{28A0092B-C50C-407E-A947-70E740481C1C}">
+                    <a14:useLocalDpi xmlns:a14="http://schemas.microsoft.com/office/drawing/2010/main" val="0"/>
+                  </a:ext>
+                  <a:ext uri="{96DAC541-7B7A-43D3-8B79-37D633B846F1}">
+                    <asvg:svgBlip xmlns:asvg="http://schemas.microsoft.com/office/drawing/2016/SVG/main" r:embed="rId4"/>
+                  </a:ext>
+                </a:extLst>
+              </a:blip>
+              <a:stretch>
+                <a:fillRect/>
+              </a:stretch>
+            </p:blipFill>
+            <p:spPr>
+              <a:xfrm>
+                <a:off x="4220955" y="1722398"/>
+                <a:ext cx="457200" cy="457200"/>
+              </a:xfrm>
+              <a:prstGeom prst="rect">
+                <a:avLst/>
+              </a:prstGeom>
+            </p:spPr>
+          </p:pic>
+        </p:grpSp>
+        <p:grpSp>
+          <p:nvGrpSpPr>
+            <p:cNvPr id="84" name="Group 83">
+              <a:extLst>
+                <a:ext uri="{FF2B5EF4-FFF2-40B4-BE49-F238E27FC236}">
+                  <a16:creationId xmlns:a16="http://schemas.microsoft.com/office/drawing/2014/main" id="{AD395B8D-7F8D-43F1-859F-99CEAE5EAE08}"/>
+                </a:ext>
+              </a:extLst>
+            </p:cNvPr>
+            <p:cNvGrpSpPr/>
+            <p:nvPr/>
+          </p:nvGrpSpPr>
+          <p:grpSpPr>
+            <a:xfrm>
+              <a:off x="1343784" y="2394028"/>
+              <a:ext cx="1511300" cy="735183"/>
+              <a:chOff x="3725506" y="3051330"/>
+              <a:chExt cx="1511300" cy="735183"/>
+            </a:xfrm>
+          </p:grpSpPr>
+          <p:sp>
+            <p:nvSpPr>
+              <p:cNvPr id="31" name="TextBox 53">
+                <a:extLst>
+                  <a:ext uri="{FF2B5EF4-FFF2-40B4-BE49-F238E27FC236}">
+                    <a16:creationId xmlns:a16="http://schemas.microsoft.com/office/drawing/2014/main" id="{00FA343B-4A1D-4BA8-94C1-4EB2083235AC}"/>
+                  </a:ext>
+                </a:extLst>
+              </p:cNvPr>
+              <p:cNvSpPr txBox="1">
+                <a:spLocks noChangeArrowheads="1"/>
+              </p:cNvSpPr>
+              <p:nvPr/>
+            </p:nvSpPr>
+            <p:spPr bwMode="auto">
+              <a:xfrm>
+                <a:off x="3725506" y="3524576"/>
+                <a:ext cx="1511300" cy="261937"/>
+              </a:xfrm>
+              <a:prstGeom prst="rect">
+                <a:avLst/>
+              </a:prstGeom>
+              <a:noFill/>
+              <a:ln>
+                <a:noFill/>
+              </a:ln>
+              <a:extLst>
+                <a:ext uri="{909E8E84-426E-40DD-AFC4-6F175D3DCCD1}">
+                  <a14:hiddenFill xmlns:a14="http://schemas.microsoft.com/office/drawing/2010/main">
+                    <a:solidFill>
+                      <a:srgbClr val="FFFFFF"/>
+                    </a:solidFill>
+                  </a14:hiddenFill>
+                </a:ext>
+                <a:ext uri="{91240B29-F687-4F45-9708-019B960494DF}">
+                  <a14:hiddenLine xmlns:a14="http://schemas.microsoft.com/office/drawing/2010/main" w="9525">
+                    <a:solidFill>
+                      <a:srgbClr val="000000"/>
+                    </a:solidFill>
+                    <a:miter lim="800000"/>
+                    <a:headEnd/>
+                    <a:tailEnd/>
+                  </a14:hiddenLine>
+                </a:ext>
+              </a:extLst>
+            </p:spPr>
+            <p:txBody>
+              <a:bodyPr>
+                <a:spAutoFit/>
+              </a:bodyPr>
+              <a:lstStyle>
+                <a:lvl1pPr>
+                  <a:defRPr>
+                    <a:solidFill>
+                      <a:schemeClr val="tx1"/>
+                    </a:solidFill>
+                    <a:latin typeface="Calibri" panose="020F0502020204030204" pitchFamily="34" charset="0"/>
+                  </a:defRPr>
+                </a:lvl1pPr>
+                <a:lvl2pPr marL="742950" indent="-285750">
+                  <a:defRPr>
+                    <a:solidFill>
+                      <a:schemeClr val="tx1"/>
+                    </a:solidFill>
+                    <a:latin typeface="Calibri" panose="020F0502020204030204" pitchFamily="34" charset="0"/>
+                  </a:defRPr>
+                </a:lvl2pPr>
+                <a:lvl3pPr marL="1143000" indent="-228600">
+                  <a:defRPr>
+                    <a:solidFill>
+                      <a:schemeClr val="tx1"/>
+                    </a:solidFill>
+                    <a:latin typeface="Calibri" panose="020F0502020204030204" pitchFamily="34" charset="0"/>
+                  </a:defRPr>
+                </a:lvl3pPr>
+                <a:lvl4pPr marL="1600200" indent="-228600">
+                  <a:defRPr>
+                    <a:solidFill>
+                      <a:schemeClr val="tx1"/>
+                    </a:solidFill>
+                    <a:latin typeface="Calibri" panose="020F0502020204030204" pitchFamily="34" charset="0"/>
+                  </a:defRPr>
+                </a:lvl4pPr>
+                <a:lvl5pPr marL="2057400" indent="-228600">
+                  <a:defRPr>
+                    <a:solidFill>
+                      <a:schemeClr val="tx1"/>
+                    </a:solidFill>
+                    <a:latin typeface="Calibri" panose="020F0502020204030204" pitchFamily="34" charset="0"/>
+                  </a:defRPr>
+                </a:lvl5pPr>
+                <a:lvl6pPr marL="2514600" indent="-228600" eaLnBrk="0" fontAlgn="base" hangingPunct="0">
+                  <a:spcBef>
+                    <a:spcPct val="0"/>
+                  </a:spcBef>
+                  <a:spcAft>
+                    <a:spcPct val="0"/>
+                  </a:spcAft>
+                  <a:defRPr>
+                    <a:solidFill>
+                      <a:schemeClr val="tx1"/>
+                    </a:solidFill>
+                    <a:latin typeface="Calibri" panose="020F0502020204030204" pitchFamily="34" charset="0"/>
+                  </a:defRPr>
+                </a:lvl6pPr>
+                <a:lvl7pPr marL="2971800" indent="-228600" eaLnBrk="0" fontAlgn="base" hangingPunct="0">
+                  <a:spcBef>
+                    <a:spcPct val="0"/>
+                  </a:spcBef>
+                  <a:spcAft>
+                    <a:spcPct val="0"/>
+                  </a:spcAft>
+                  <a:defRPr>
+                    <a:solidFill>
+                      <a:schemeClr val="tx1"/>
+                    </a:solidFill>
+                    <a:latin typeface="Calibri" panose="020F0502020204030204" pitchFamily="34" charset="0"/>
+                  </a:defRPr>
+                </a:lvl7pPr>
+                <a:lvl8pPr marL="3429000" indent="-228600" eaLnBrk="0" fontAlgn="base" hangingPunct="0">
+                  <a:spcBef>
+                    <a:spcPct val="0"/>
+                  </a:spcBef>
+                  <a:spcAft>
+                    <a:spcPct val="0"/>
+                  </a:spcAft>
+                  <a:defRPr>
+                    <a:solidFill>
+                      <a:schemeClr val="tx1"/>
+                    </a:solidFill>
+                    <a:latin typeface="Calibri" panose="020F0502020204030204" pitchFamily="34" charset="0"/>
+                  </a:defRPr>
+                </a:lvl8pPr>
+                <a:lvl9pPr marL="3886200" indent="-228600" eaLnBrk="0" fontAlgn="base" hangingPunct="0">
+                  <a:spcBef>
+                    <a:spcPct val="0"/>
+                  </a:spcBef>
+                  <a:spcAft>
+                    <a:spcPct val="0"/>
+                  </a:spcAft>
+                  <a:defRPr>
+                    <a:solidFill>
+                      <a:schemeClr val="tx1"/>
+                    </a:solidFill>
+                    <a:latin typeface="Calibri" panose="020F0502020204030204" pitchFamily="34" charset="0"/>
+                  </a:defRPr>
+                </a:lvl9pPr>
+              </a:lstStyle>
+              <a:p>
+                <a:pPr algn="ctr" eaLnBrk="1" hangingPunct="1"/>
+                <a:r>
+                  <a:rPr lang="en-US" altLang="en-US" sz="1100" dirty="0">
+                    <a:latin typeface="Arial" panose="020B0604020202020204" pitchFamily="34" charset="0"/>
+                    <a:ea typeface="Amazon Ember" panose="020B0603020204020204" pitchFamily="34" charset="0"/>
+                    <a:cs typeface="Arial" panose="020B0604020202020204" pitchFamily="34" charset="0"/>
+                  </a:rPr>
+                  <a:t>Web Servers</a:t>
+                </a:r>
+              </a:p>
+            </p:txBody>
+          </p:sp>
+          <p:pic>
+            <p:nvPicPr>
+              <p:cNvPr id="42" name="Graphic 41">
+                <a:extLst>
+                  <a:ext uri="{FF2B5EF4-FFF2-40B4-BE49-F238E27FC236}">
+                    <a16:creationId xmlns:a16="http://schemas.microsoft.com/office/drawing/2014/main" id="{9D83F81B-8C4B-4A55-BB19-5A2DCD17F858}"/>
+                  </a:ext>
+                </a:extLst>
+              </p:cNvPr>
+              <p:cNvPicPr>
+                <a:picLocks noChangeAspect="1"/>
+              </p:cNvPicPr>
+              <p:nvPr/>
+            </p:nvPicPr>
+            <p:blipFill>
+              <a:blip r:embed="rId3">
+                <a:extLst>
+                  <a:ext uri="{28A0092B-C50C-407E-A947-70E740481C1C}">
+                    <a14:useLocalDpi xmlns:a14="http://schemas.microsoft.com/office/drawing/2010/main" val="0"/>
+                  </a:ext>
+                  <a:ext uri="{96DAC541-7B7A-43D3-8B79-37D633B846F1}">
+                    <asvg:svgBlip xmlns:asvg="http://schemas.microsoft.com/office/drawing/2016/SVG/main" r:embed="rId4"/>
+                  </a:ext>
+                </a:extLst>
+              </a:blip>
+              <a:stretch>
+                <a:fillRect/>
+              </a:stretch>
+            </p:blipFill>
+            <p:spPr>
+              <a:xfrm>
+                <a:off x="4207600" y="3051330"/>
+                <a:ext cx="457200" cy="457200"/>
+              </a:xfrm>
+              <a:prstGeom prst="rect">
+                <a:avLst/>
+              </a:prstGeom>
+            </p:spPr>
+          </p:pic>
+        </p:grpSp>
+        <p:sp>
+          <p:nvSpPr>
+            <p:cNvPr id="47" name="Rectangle 46">
+              <a:extLst>
+                <a:ext uri="{FF2B5EF4-FFF2-40B4-BE49-F238E27FC236}">
+                  <a16:creationId xmlns:a16="http://schemas.microsoft.com/office/drawing/2014/main" id="{3EFFB2F6-74AD-438B-82BA-8511D0DB2AC2}"/>
+                </a:ext>
+                <a:ext uri="{C183D7F6-B498-43B3-948B-1728B52AA6E4}">
+                  <adec:decorative xmlns:adec="http://schemas.microsoft.com/office/drawing/2017/decorative" val="1"/>
+                </a:ext>
+              </a:extLst>
+            </p:cNvPr>
+            <p:cNvSpPr/>
+            <p:nvPr/>
+          </p:nvSpPr>
+          <p:spPr>
+            <a:xfrm>
+              <a:off x="1157680" y="2257814"/>
+              <a:ext cx="6065241" cy="993164"/>
+            </a:xfrm>
+            <a:prstGeom prst="rect">
+              <a:avLst/>
+            </a:prstGeom>
+            <a:noFill/>
+            <a:ln w="15875">
+              <a:solidFill>
+                <a:srgbClr val="ED7100"/>
+              </a:solidFill>
+              <a:prstDash val="dash"/>
+            </a:ln>
+          </p:spPr>
+          <p:style>
+            <a:lnRef idx="2">
+              <a:schemeClr val="accent1">
+                <a:shade val="50000"/>
+              </a:schemeClr>
+            </a:lnRef>
+            <a:fillRef idx="1">
+              <a:schemeClr val="accent1"/>
+            </a:fillRef>
+            <a:effectRef idx="0">
+              <a:schemeClr val="accent1"/>
+            </a:effectRef>
+            <a:fontRef idx="minor">
+              <a:schemeClr val="lt1"/>
+            </a:fontRef>
+          </p:style>
+          <p:txBody>
+            <a:bodyPr tIns="91440"/>
+            <a:lstStyle/>
+            <a:p>
+              <a:pPr algn="ctr" eaLnBrk="1" fontAlgn="auto" hangingPunct="1">
+                <a:spcBef>
+                  <a:spcPts val="0"/>
+                </a:spcBef>
+                <a:spcAft>
+                  <a:spcPts val="0"/>
+                </a:spcAft>
+                <a:defRPr/>
+              </a:pPr>
+              <a:endParaRPr lang="en-US" sz="1200" dirty="0">
+                <a:solidFill>
+                  <a:schemeClr val="tx1"/>
+                </a:solidFill>
+                <a:latin typeface="Arial" panose="020B0604020202020204" pitchFamily="34" charset="0"/>
+                <a:cs typeface="Arial" panose="020B0604020202020204" pitchFamily="34" charset="0"/>
+              </a:endParaRPr>
+            </a:p>
+            <a:p>
+              <a:pPr algn="ctr" eaLnBrk="1" fontAlgn="auto" hangingPunct="1">
+                <a:spcBef>
+                  <a:spcPts val="0"/>
+                </a:spcBef>
+                <a:spcAft>
+                  <a:spcPts val="0"/>
+                </a:spcAft>
+                <a:defRPr/>
+              </a:pPr>
+              <a:endParaRPr lang="en-US" sz="1200" dirty="0">
+                <a:solidFill>
+                  <a:schemeClr val="tx1"/>
+                </a:solidFill>
+                <a:latin typeface="Arial" panose="020B0604020202020204" pitchFamily="34" charset="0"/>
+                <a:cs typeface="Arial" panose="020B0604020202020204" pitchFamily="34" charset="0"/>
+              </a:endParaRPr>
+            </a:p>
+            <a:p>
+              <a:pPr algn="ctr" eaLnBrk="1" fontAlgn="auto" hangingPunct="1">
+                <a:spcBef>
+                  <a:spcPts val="0"/>
+                </a:spcBef>
+                <a:spcAft>
+                  <a:spcPts val="0"/>
+                </a:spcAft>
+                <a:defRPr/>
+              </a:pPr>
+              <a:r>
+                <a:rPr lang="en-US" sz="1200" dirty="0">
+                  <a:solidFill>
+                    <a:schemeClr val="tx1"/>
+                  </a:solidFill>
+                  <a:latin typeface="Arial" panose="020B0604020202020204" pitchFamily="34" charset="0"/>
+                  <a:cs typeface="Arial" panose="020B0604020202020204" pitchFamily="34" charset="0"/>
+                </a:rPr>
+                <a:t>Web Server</a:t>
+              </a:r>
+            </a:p>
+            <a:p>
+              <a:pPr algn="ctr" eaLnBrk="1" fontAlgn="auto" hangingPunct="1">
+                <a:spcBef>
+                  <a:spcPts val="0"/>
+                </a:spcBef>
+                <a:spcAft>
+                  <a:spcPts val="0"/>
+                </a:spcAft>
+                <a:defRPr/>
+              </a:pPr>
+              <a:r>
+                <a:rPr lang="en-US" sz="1200" dirty="0">
+                  <a:solidFill>
+                    <a:schemeClr val="tx1"/>
+                  </a:solidFill>
+                  <a:latin typeface="Arial" panose="020B0604020202020204" pitchFamily="34" charset="0"/>
+                  <a:cs typeface="Arial" panose="020B0604020202020204" pitchFamily="34" charset="0"/>
+                </a:rPr>
+                <a:t>Auto Scaling group</a:t>
+              </a:r>
+            </a:p>
+          </p:txBody>
+        </p:sp>
+        <p:pic>
+          <p:nvPicPr>
+            <p:cNvPr id="49" name="Graphic 48">
+              <a:extLst>
+                <a:ext uri="{FF2B5EF4-FFF2-40B4-BE49-F238E27FC236}">
+                  <a16:creationId xmlns:a16="http://schemas.microsoft.com/office/drawing/2014/main" id="{CDD673DF-3571-4BE5-9C6E-FDF9C52ECDBF}"/>
+                </a:ext>
+                <a:ext uri="{C183D7F6-B498-43B3-948B-1728B52AA6E4}">
+                  <adec:decorative xmlns:adec="http://schemas.microsoft.com/office/drawing/2017/decorative" val="1"/>
+                </a:ext>
+              </a:extLst>
+            </p:cNvPr>
+            <p:cNvPicPr>
+              <a:picLocks noChangeAspect="1"/>
+            </p:cNvPicPr>
+            <p:nvPr/>
+          </p:nvPicPr>
+          <p:blipFill>
+            <a:blip r:embed="rId5">
+              <a:extLst>
+                <a:ext uri="{96DAC541-7B7A-43D3-8B79-37D633B846F1}">
+                  <asvg:svgBlip xmlns:asvg="http://schemas.microsoft.com/office/drawing/2016/SVG/main" r:embed="rId6"/>
+                </a:ext>
+              </a:extLst>
+            </a:blip>
+            <a:srcRect/>
+            <a:stretch/>
+          </p:blipFill>
+          <p:spPr>
+            <a:xfrm>
+              <a:off x="3998247" y="2249257"/>
+              <a:ext cx="381000" cy="381000"/>
+            </a:xfrm>
+            <a:prstGeom prst="rect">
+              <a:avLst/>
+            </a:prstGeom>
+          </p:spPr>
+        </p:pic>
+      </p:grpSp>
+      <p:grpSp>
+        <p:nvGrpSpPr>
+          <p:cNvPr id="81" name="Group 80">
+            <a:extLst>
+              <a:ext uri="{FF2B5EF4-FFF2-40B4-BE49-F238E27FC236}">
+                <a16:creationId xmlns:a16="http://schemas.microsoft.com/office/drawing/2014/main" id="{DAD8AF69-0E94-4C00-91F9-B5CD1FA13C35}"/>
+              </a:ext>
+            </a:extLst>
+          </p:cNvPr>
+          <p:cNvGrpSpPr/>
+          <p:nvPr/>
+        </p:nvGrpSpPr>
+        <p:grpSpPr>
+          <a:xfrm>
+            <a:off x="1911416" y="3711226"/>
+            <a:ext cx="1511300" cy="820930"/>
+            <a:chOff x="5248087" y="1756531"/>
+            <a:chExt cx="1511300" cy="820930"/>
+          </a:xfrm>
+        </p:grpSpPr>
+        <p:sp>
+          <p:nvSpPr>
+            <p:cNvPr id="25" name="TextBox 16">
+              <a:extLst>
+                <a:ext uri="{FF2B5EF4-FFF2-40B4-BE49-F238E27FC236}">
+                  <a16:creationId xmlns:a16="http://schemas.microsoft.com/office/drawing/2014/main" id="{CDA22A1A-B211-4DB0-86BE-93AF1BD884CB}"/>
+                </a:ext>
+              </a:extLst>
+            </p:cNvPr>
+            <p:cNvSpPr txBox="1">
+              <a:spLocks noChangeArrowheads="1"/>
+            </p:cNvSpPr>
+            <p:nvPr/>
+          </p:nvSpPr>
+          <p:spPr bwMode="auto">
+            <a:xfrm>
+              <a:off x="5248087" y="2147249"/>
+              <a:ext cx="1511300" cy="430212"/>
+            </a:xfrm>
+            <a:prstGeom prst="rect">
+              <a:avLst/>
+            </a:prstGeom>
+            <a:noFill/>
+            <a:ln>
+              <a:noFill/>
+            </a:ln>
+            <a:extLst>
+              <a:ext uri="{909E8E84-426E-40DD-AFC4-6F175D3DCCD1}">
+                <a14:hiddenFill xmlns:a14="http://schemas.microsoft.com/office/drawing/2010/main">
+                  <a:solidFill>
+                    <a:srgbClr val="FFFFFF"/>
+                  </a:solidFill>
+                </a14:hiddenFill>
+              </a:ext>
+              <a:ext uri="{91240B29-F687-4F45-9708-019B960494DF}">
+                <a14:hiddenLine xmlns:a14="http://schemas.microsoft.com/office/drawing/2010/main" w="9525">
+                  <a:solidFill>
+                    <a:srgbClr val="000000"/>
+                  </a:solidFill>
+                  <a:miter lim="800000"/>
+                  <a:headEnd/>
+                  <a:tailEnd/>
+                </a14:hiddenLine>
+              </a:ext>
+            </a:extLst>
+          </p:spPr>
+          <p:txBody>
+            <a:bodyPr>
+              <a:spAutoFit/>
+            </a:bodyPr>
+            <a:lstStyle>
+              <a:lvl1pPr>
+                <a:defRPr>
+                  <a:solidFill>
+                    <a:schemeClr val="tx1"/>
+                  </a:solidFill>
+                  <a:latin typeface="Calibri" panose="020F0502020204030204" pitchFamily="34" charset="0"/>
+                </a:defRPr>
+              </a:lvl1pPr>
+              <a:lvl2pPr marL="742950" indent="-285750">
+                <a:defRPr>
+                  <a:solidFill>
+                    <a:schemeClr val="tx1"/>
+                  </a:solidFill>
+                  <a:latin typeface="Calibri" panose="020F0502020204030204" pitchFamily="34" charset="0"/>
+                </a:defRPr>
+              </a:lvl2pPr>
+              <a:lvl3pPr marL="1143000" indent="-228600">
+                <a:defRPr>
+                  <a:solidFill>
+                    <a:schemeClr val="tx1"/>
+                  </a:solidFill>
+                  <a:latin typeface="Calibri" panose="020F0502020204030204" pitchFamily="34" charset="0"/>
+                </a:defRPr>
+              </a:lvl3pPr>
+              <a:lvl4pPr marL="1600200" indent="-228600">
+                <a:defRPr>
+                  <a:solidFill>
+                    <a:schemeClr val="tx1"/>
+                  </a:solidFill>
+                  <a:latin typeface="Calibri" panose="020F0502020204030204" pitchFamily="34" charset="0"/>
+                </a:defRPr>
+              </a:lvl4pPr>
+              <a:lvl5pPr marL="2057400" indent="-228600">
+                <a:defRPr>
+                  <a:solidFill>
+                    <a:schemeClr val="tx1"/>
+                  </a:solidFill>
+                  <a:latin typeface="Calibri" panose="020F0502020204030204" pitchFamily="34" charset="0"/>
+                </a:defRPr>
+              </a:lvl5pPr>
+              <a:lvl6pPr marL="2514600" indent="-228600" eaLnBrk="0" fontAlgn="base" hangingPunct="0">
+                <a:spcBef>
+                  <a:spcPct val="0"/>
+                </a:spcBef>
+                <a:spcAft>
+                  <a:spcPct val="0"/>
+                </a:spcAft>
+                <a:defRPr>
+                  <a:solidFill>
+                    <a:schemeClr val="tx1"/>
+                  </a:solidFill>
+                  <a:latin typeface="Calibri" panose="020F0502020204030204" pitchFamily="34" charset="0"/>
+                </a:defRPr>
+              </a:lvl6pPr>
+              <a:lvl7pPr marL="2971800" indent="-228600" eaLnBrk="0" fontAlgn="base" hangingPunct="0">
+                <a:spcBef>
+                  <a:spcPct val="0"/>
+                </a:spcBef>
+                <a:spcAft>
+                  <a:spcPct val="0"/>
+                </a:spcAft>
+                <a:defRPr>
+                  <a:solidFill>
+                    <a:schemeClr val="tx1"/>
+                  </a:solidFill>
+                  <a:latin typeface="Calibri" panose="020F0502020204030204" pitchFamily="34" charset="0"/>
+                </a:defRPr>
+              </a:lvl7pPr>
+              <a:lvl8pPr marL="3429000" indent="-228600" eaLnBrk="0" fontAlgn="base" hangingPunct="0">
+                <a:spcBef>
+                  <a:spcPct val="0"/>
+                </a:spcBef>
+                <a:spcAft>
+                  <a:spcPct val="0"/>
+                </a:spcAft>
+                <a:defRPr>
+                  <a:solidFill>
+                    <a:schemeClr val="tx1"/>
+                  </a:solidFill>
+                  <a:latin typeface="Calibri" panose="020F0502020204030204" pitchFamily="34" charset="0"/>
+                </a:defRPr>
+              </a:lvl8pPr>
+              <a:lvl9pPr marL="3886200" indent="-228600" eaLnBrk="0" fontAlgn="base" hangingPunct="0">
+                <a:spcBef>
+                  <a:spcPct val="0"/>
+                </a:spcBef>
+                <a:spcAft>
+                  <a:spcPct val="0"/>
+                </a:spcAft>
+                <a:defRPr>
+                  <a:solidFill>
+                    <a:schemeClr val="tx1"/>
+                  </a:solidFill>
+                  <a:latin typeface="Calibri" panose="020F0502020204030204" pitchFamily="34" charset="0"/>
+                </a:defRPr>
+              </a:lvl9pPr>
+            </a:lstStyle>
+            <a:p>
+              <a:pPr algn="ctr" eaLnBrk="1" hangingPunct="1"/>
+              <a:r>
+                <a:rPr lang="en-US" altLang="en-US" sz="1100">
+                  <a:latin typeface="Arial" panose="020B0604020202020204" pitchFamily="34" charset="0"/>
+                  <a:ea typeface="Amazon Ember" panose="020B0603020204020204" pitchFamily="34" charset="0"/>
+                  <a:cs typeface="Arial" panose="020B0604020202020204" pitchFamily="34" charset="0"/>
+                </a:rPr>
+                <a:t>SQL server </a:t>
+              </a:r>
+            </a:p>
+            <a:p>
+              <a:pPr algn="ctr" eaLnBrk="1" hangingPunct="1"/>
+              <a:r>
+                <a:rPr lang="en-US" altLang="en-US" sz="1100">
+                  <a:latin typeface="Arial" panose="020B0604020202020204" pitchFamily="34" charset="0"/>
+                  <a:ea typeface="Amazon Ember" panose="020B0603020204020204" pitchFamily="34" charset="0"/>
+                  <a:cs typeface="Arial" panose="020B0604020202020204" pitchFamily="34" charset="0"/>
+                </a:rPr>
+                <a:t>instance</a:t>
+              </a:r>
+            </a:p>
+          </p:txBody>
+        </p:sp>
+        <p:pic>
+          <p:nvPicPr>
+            <p:cNvPr id="19" name="Graphic 18">
+              <a:extLst>
+                <a:ext uri="{FF2B5EF4-FFF2-40B4-BE49-F238E27FC236}">
+                  <a16:creationId xmlns:a16="http://schemas.microsoft.com/office/drawing/2014/main" id="{1EF678AE-29A5-4820-AA6C-718695ECE1FC}"/>
+                </a:ext>
+              </a:extLst>
+            </p:cNvPr>
+            <p:cNvPicPr>
+              <a:picLocks noChangeAspect="1"/>
+            </p:cNvPicPr>
+            <p:nvPr/>
+          </p:nvPicPr>
+          <p:blipFill>
+            <a:blip r:embed="rId7">
+              <a:extLst>
+                <a:ext uri="{28A0092B-C50C-407E-A947-70E740481C1C}">
+                  <a14:useLocalDpi xmlns:a14="http://schemas.microsoft.com/office/drawing/2010/main" val="0"/>
+                </a:ext>
+                <a:ext uri="{96DAC541-7B7A-43D3-8B79-37D633B846F1}">
+                  <asvg:svgBlip xmlns:asvg="http://schemas.microsoft.com/office/drawing/2016/SVG/main" r:embed="rId8"/>
+                </a:ext>
+              </a:extLst>
+            </a:blip>
+            <a:stretch>
+              <a:fillRect/>
+            </a:stretch>
+          </p:blipFill>
+          <p:spPr>
+            <a:xfrm>
+              <a:off x="5805205" y="1756531"/>
+              <a:ext cx="381000" cy="381000"/>
+            </a:xfrm>
+            <a:prstGeom prst="rect">
+              <a:avLst/>
+            </a:prstGeom>
+          </p:spPr>
+        </p:pic>
+      </p:grpSp>
+      <p:grpSp>
+        <p:nvGrpSpPr>
+          <p:cNvPr id="86" name="Group 85">
+            <a:extLst>
+              <a:ext uri="{FF2B5EF4-FFF2-40B4-BE49-F238E27FC236}">
+                <a16:creationId xmlns:a16="http://schemas.microsoft.com/office/drawing/2014/main" id="{2FD11FBE-FDB9-4C71-BD6F-CD8B2B97B3D7}"/>
+              </a:ext>
+            </a:extLst>
+          </p:cNvPr>
+          <p:cNvGrpSpPr/>
+          <p:nvPr/>
+        </p:nvGrpSpPr>
+        <p:grpSpPr>
+          <a:xfrm>
+            <a:off x="3472440" y="5658915"/>
+            <a:ext cx="1382713" cy="641006"/>
+            <a:chOff x="6130014" y="4260843"/>
+            <a:chExt cx="1382713" cy="641006"/>
+          </a:xfrm>
+        </p:grpSpPr>
+        <p:sp>
+          <p:nvSpPr>
+            <p:cNvPr id="27" name="TextBox 62">
+              <a:extLst>
+                <a:ext uri="{FF2B5EF4-FFF2-40B4-BE49-F238E27FC236}">
+                  <a16:creationId xmlns:a16="http://schemas.microsoft.com/office/drawing/2014/main" id="{F756ADFA-F9B3-4271-813F-10A2728FAE1C}"/>
+                </a:ext>
+              </a:extLst>
+            </p:cNvPr>
+            <p:cNvSpPr txBox="1">
+              <a:spLocks noChangeArrowheads="1"/>
+            </p:cNvSpPr>
+            <p:nvPr/>
+          </p:nvSpPr>
+          <p:spPr bwMode="auto">
+            <a:xfrm>
+              <a:off x="6130014" y="4639911"/>
+              <a:ext cx="1382713" cy="261938"/>
+            </a:xfrm>
+            <a:prstGeom prst="rect">
+              <a:avLst/>
+            </a:prstGeom>
+            <a:noFill/>
+            <a:ln>
+              <a:noFill/>
+            </a:ln>
+            <a:extLst>
+              <a:ext uri="{909E8E84-426E-40DD-AFC4-6F175D3DCCD1}">
+                <a14:hiddenFill xmlns:a14="http://schemas.microsoft.com/office/drawing/2010/main">
+                  <a:solidFill>
+                    <a:srgbClr val="FFFFFF"/>
+                  </a:solidFill>
+                </a14:hiddenFill>
+              </a:ext>
+              <a:ext uri="{91240B29-F687-4F45-9708-019B960494DF}">
+                <a14:hiddenLine xmlns:a14="http://schemas.microsoft.com/office/drawing/2010/main" w="9525">
+                  <a:solidFill>
+                    <a:srgbClr val="000000"/>
+                  </a:solidFill>
+                  <a:miter lim="800000"/>
+                  <a:headEnd/>
+                  <a:tailEnd/>
+                </a14:hiddenLine>
+              </a:ext>
+            </a:extLst>
+          </p:spPr>
+          <p:txBody>
+            <a:bodyPr>
+              <a:spAutoFit/>
+            </a:bodyPr>
+            <a:lstStyle>
+              <a:lvl1pPr>
+                <a:defRPr>
+                  <a:solidFill>
+                    <a:schemeClr val="tx1"/>
+                  </a:solidFill>
+                  <a:latin typeface="Calibri" panose="020F0502020204030204" pitchFamily="34" charset="0"/>
+                </a:defRPr>
+              </a:lvl1pPr>
+              <a:lvl2pPr marL="742950" indent="-285750">
+                <a:defRPr>
+                  <a:solidFill>
+                    <a:schemeClr val="tx1"/>
+                  </a:solidFill>
+                  <a:latin typeface="Calibri" panose="020F0502020204030204" pitchFamily="34" charset="0"/>
+                </a:defRPr>
+              </a:lvl2pPr>
+              <a:lvl3pPr marL="1143000" indent="-228600">
+                <a:defRPr>
+                  <a:solidFill>
+                    <a:schemeClr val="tx1"/>
+                  </a:solidFill>
+                  <a:latin typeface="Calibri" panose="020F0502020204030204" pitchFamily="34" charset="0"/>
+                </a:defRPr>
+              </a:lvl3pPr>
+              <a:lvl4pPr marL="1600200" indent="-228600">
+                <a:defRPr>
+                  <a:solidFill>
+                    <a:schemeClr val="tx1"/>
+                  </a:solidFill>
+                  <a:latin typeface="Calibri" panose="020F0502020204030204" pitchFamily="34" charset="0"/>
+                </a:defRPr>
+              </a:lvl4pPr>
+              <a:lvl5pPr marL="2057400" indent="-228600">
+                <a:defRPr>
+                  <a:solidFill>
+                    <a:schemeClr val="tx1"/>
+                  </a:solidFill>
+                  <a:latin typeface="Calibri" panose="020F0502020204030204" pitchFamily="34" charset="0"/>
+                </a:defRPr>
+              </a:lvl5pPr>
+              <a:lvl6pPr marL="2514600" indent="-228600" eaLnBrk="0" fontAlgn="base" hangingPunct="0">
+                <a:spcBef>
+                  <a:spcPct val="0"/>
+                </a:spcBef>
+                <a:spcAft>
+                  <a:spcPct val="0"/>
+                </a:spcAft>
+                <a:defRPr>
+                  <a:solidFill>
+                    <a:schemeClr val="tx1"/>
+                  </a:solidFill>
+                  <a:latin typeface="Calibri" panose="020F0502020204030204" pitchFamily="34" charset="0"/>
+                </a:defRPr>
+              </a:lvl6pPr>
+              <a:lvl7pPr marL="2971800" indent="-228600" eaLnBrk="0" fontAlgn="base" hangingPunct="0">
+                <a:spcBef>
+                  <a:spcPct val="0"/>
+                </a:spcBef>
+                <a:spcAft>
+                  <a:spcPct val="0"/>
+                </a:spcAft>
+                <a:defRPr>
+                  <a:solidFill>
+                    <a:schemeClr val="tx1"/>
+                  </a:solidFill>
+                  <a:latin typeface="Calibri" panose="020F0502020204030204" pitchFamily="34" charset="0"/>
+                </a:defRPr>
+              </a:lvl7pPr>
+              <a:lvl8pPr marL="3429000" indent="-228600" eaLnBrk="0" fontAlgn="base" hangingPunct="0">
+                <a:spcBef>
+                  <a:spcPct val="0"/>
+                </a:spcBef>
+                <a:spcAft>
+                  <a:spcPct val="0"/>
+                </a:spcAft>
+                <a:defRPr>
+                  <a:solidFill>
+                    <a:schemeClr val="tx1"/>
+                  </a:solidFill>
+                  <a:latin typeface="Calibri" panose="020F0502020204030204" pitchFamily="34" charset="0"/>
+                </a:defRPr>
+              </a:lvl8pPr>
+              <a:lvl9pPr marL="3886200" indent="-228600" eaLnBrk="0" fontAlgn="base" hangingPunct="0">
+                <a:spcBef>
+                  <a:spcPct val="0"/>
+                </a:spcBef>
+                <a:spcAft>
+                  <a:spcPct val="0"/>
+                </a:spcAft>
+                <a:defRPr>
+                  <a:solidFill>
+                    <a:schemeClr val="tx1"/>
+                  </a:solidFill>
+                  <a:latin typeface="Calibri" panose="020F0502020204030204" pitchFamily="34" charset="0"/>
+                </a:defRPr>
+              </a:lvl9pPr>
+            </a:lstStyle>
+            <a:p>
+              <a:pPr algn="ctr" eaLnBrk="1" hangingPunct="1"/>
+              <a:r>
+                <a:rPr lang="en-US" altLang="en-US" sz="1100" dirty="0">
+                  <a:latin typeface="Arial" panose="020B0604020202020204" pitchFamily="34" charset="0"/>
+                  <a:ea typeface="Amazon Ember" panose="020B0603020204020204" pitchFamily="34" charset="0"/>
+                  <a:cs typeface="Arial" panose="020B0604020202020204" pitchFamily="34" charset="0"/>
+                </a:rPr>
+                <a:t>S3 Standard</a:t>
+              </a:r>
+            </a:p>
+          </p:txBody>
+        </p:sp>
+        <p:pic>
+          <p:nvPicPr>
+            <p:cNvPr id="21" name="Graphic 20">
+              <a:extLst>
+                <a:ext uri="{FF2B5EF4-FFF2-40B4-BE49-F238E27FC236}">
+                  <a16:creationId xmlns:a16="http://schemas.microsoft.com/office/drawing/2014/main" id="{33337190-8E22-4745-A44B-B2D401BCF5BD}"/>
+                </a:ext>
+              </a:extLst>
+            </p:cNvPr>
+            <p:cNvPicPr>
+              <a:picLocks noChangeAspect="1"/>
+            </p:cNvPicPr>
+            <p:nvPr/>
+          </p:nvPicPr>
+          <p:blipFill>
+            <a:blip r:embed="rId9">
+              <a:extLst>
+                <a:ext uri="{28A0092B-C50C-407E-A947-70E740481C1C}">
+                  <a14:useLocalDpi xmlns:a14="http://schemas.microsoft.com/office/drawing/2010/main" val="0"/>
+                </a:ext>
+                <a:ext uri="{96DAC541-7B7A-43D3-8B79-37D633B846F1}">
+                  <asvg:svgBlip xmlns:asvg="http://schemas.microsoft.com/office/drawing/2016/SVG/main" r:embed="rId10"/>
+                </a:ext>
+              </a:extLst>
+            </a:blip>
+            <a:stretch>
+              <a:fillRect/>
+            </a:stretch>
+          </p:blipFill>
+          <p:spPr>
+            <a:xfrm>
+              <a:off x="6608560" y="4260843"/>
+              <a:ext cx="381000" cy="381000"/>
+            </a:xfrm>
+            <a:prstGeom prst="rect">
+              <a:avLst/>
+            </a:prstGeom>
+          </p:spPr>
+        </p:pic>
+      </p:grpSp>
+      <p:grpSp>
+        <p:nvGrpSpPr>
+          <p:cNvPr id="80" name="Group 79">
+            <a:extLst>
+              <a:ext uri="{FF2B5EF4-FFF2-40B4-BE49-F238E27FC236}">
+                <a16:creationId xmlns:a16="http://schemas.microsoft.com/office/drawing/2014/main" id="{B4241DDA-7794-43C5-BFF4-D7EDE1749198}"/>
+              </a:ext>
+            </a:extLst>
+          </p:cNvPr>
+          <p:cNvGrpSpPr/>
+          <p:nvPr/>
+        </p:nvGrpSpPr>
+        <p:grpSpPr>
+          <a:xfrm>
+            <a:off x="3063571" y="1641297"/>
+            <a:ext cx="2270125" cy="726386"/>
+            <a:chOff x="1301447" y="3201849"/>
+            <a:chExt cx="2270125" cy="726386"/>
+          </a:xfrm>
+        </p:grpSpPr>
+        <p:sp>
+          <p:nvSpPr>
+            <p:cNvPr id="10" name="TextBox 21">
+              <a:extLst>
+                <a:ext uri="{FF2B5EF4-FFF2-40B4-BE49-F238E27FC236}">
+                  <a16:creationId xmlns:a16="http://schemas.microsoft.com/office/drawing/2014/main" id="{2BD5F485-2B94-4F73-8B4A-81DDED2374DD}"/>
+                </a:ext>
+              </a:extLst>
+            </p:cNvPr>
+            <p:cNvSpPr txBox="1">
+              <a:spLocks noChangeArrowheads="1"/>
+            </p:cNvSpPr>
+            <p:nvPr/>
+          </p:nvSpPr>
+          <p:spPr bwMode="auto">
+            <a:xfrm>
+              <a:off x="1301447" y="3666625"/>
+              <a:ext cx="2270125" cy="261610"/>
+            </a:xfrm>
+            <a:prstGeom prst="rect">
+              <a:avLst/>
+            </a:prstGeom>
+            <a:noFill/>
+            <a:ln>
+              <a:noFill/>
+            </a:ln>
+            <a:extLst>
+              <a:ext uri="{909E8E84-426E-40DD-AFC4-6F175D3DCCD1}">
+                <a14:hiddenFill xmlns:a14="http://schemas.microsoft.com/office/drawing/2010/main">
+                  <a:solidFill>
+                    <a:srgbClr val="FFFFFF"/>
+                  </a:solidFill>
+                </a14:hiddenFill>
+              </a:ext>
+              <a:ext uri="{91240B29-F687-4F45-9708-019B960494DF}">
+                <a14:hiddenLine xmlns:a14="http://schemas.microsoft.com/office/drawing/2010/main" w="9525">
+                  <a:solidFill>
+                    <a:srgbClr val="000000"/>
+                  </a:solidFill>
+                  <a:miter lim="800000"/>
+                  <a:headEnd/>
+                  <a:tailEnd/>
+                </a14:hiddenLine>
+              </a:ext>
+            </a:extLst>
+          </p:spPr>
+          <p:txBody>
+            <a:bodyPr>
+              <a:spAutoFit/>
+            </a:bodyPr>
+            <a:lstStyle>
+              <a:lvl1pPr>
+                <a:defRPr>
+                  <a:solidFill>
+                    <a:schemeClr val="tx1"/>
+                  </a:solidFill>
+                  <a:latin typeface="Calibri" panose="020F0502020204030204" pitchFamily="34" charset="0"/>
+                </a:defRPr>
+              </a:lvl1pPr>
+              <a:lvl2pPr marL="742950" indent="-285750">
+                <a:defRPr>
+                  <a:solidFill>
+                    <a:schemeClr val="tx1"/>
+                  </a:solidFill>
+                  <a:latin typeface="Calibri" panose="020F0502020204030204" pitchFamily="34" charset="0"/>
+                </a:defRPr>
+              </a:lvl2pPr>
+              <a:lvl3pPr marL="1143000" indent="-228600">
+                <a:defRPr>
+                  <a:solidFill>
+                    <a:schemeClr val="tx1"/>
+                  </a:solidFill>
+                  <a:latin typeface="Calibri" panose="020F0502020204030204" pitchFamily="34" charset="0"/>
+                </a:defRPr>
+              </a:lvl3pPr>
+              <a:lvl4pPr marL="1600200" indent="-228600">
+                <a:defRPr>
+                  <a:solidFill>
+                    <a:schemeClr val="tx1"/>
+                  </a:solidFill>
+                  <a:latin typeface="Calibri" panose="020F0502020204030204" pitchFamily="34" charset="0"/>
+                </a:defRPr>
+              </a:lvl4pPr>
+              <a:lvl5pPr marL="2057400" indent="-228600">
+                <a:defRPr>
+                  <a:solidFill>
+                    <a:schemeClr val="tx1"/>
+                  </a:solidFill>
+                  <a:latin typeface="Calibri" panose="020F0502020204030204" pitchFamily="34" charset="0"/>
+                </a:defRPr>
+              </a:lvl5pPr>
+              <a:lvl6pPr marL="2514600" indent="-228600" eaLnBrk="0" fontAlgn="base" hangingPunct="0">
+                <a:spcBef>
+                  <a:spcPct val="0"/>
+                </a:spcBef>
+                <a:spcAft>
+                  <a:spcPct val="0"/>
+                </a:spcAft>
+                <a:defRPr>
+                  <a:solidFill>
+                    <a:schemeClr val="tx1"/>
+                  </a:solidFill>
+                  <a:latin typeface="Calibri" panose="020F0502020204030204" pitchFamily="34" charset="0"/>
+                </a:defRPr>
+              </a:lvl6pPr>
+              <a:lvl7pPr marL="2971800" indent="-228600" eaLnBrk="0" fontAlgn="base" hangingPunct="0">
+                <a:spcBef>
+                  <a:spcPct val="0"/>
+                </a:spcBef>
+                <a:spcAft>
+                  <a:spcPct val="0"/>
+                </a:spcAft>
+                <a:defRPr>
+                  <a:solidFill>
+                    <a:schemeClr val="tx1"/>
+                  </a:solidFill>
+                  <a:latin typeface="Calibri" panose="020F0502020204030204" pitchFamily="34" charset="0"/>
+                </a:defRPr>
+              </a:lvl7pPr>
+              <a:lvl8pPr marL="3429000" indent="-228600" eaLnBrk="0" fontAlgn="base" hangingPunct="0">
+                <a:spcBef>
+                  <a:spcPct val="0"/>
+                </a:spcBef>
+                <a:spcAft>
+                  <a:spcPct val="0"/>
+                </a:spcAft>
+                <a:defRPr>
+                  <a:solidFill>
+                    <a:schemeClr val="tx1"/>
+                  </a:solidFill>
+                  <a:latin typeface="Calibri" panose="020F0502020204030204" pitchFamily="34" charset="0"/>
+                </a:defRPr>
+              </a:lvl8pPr>
+              <a:lvl9pPr marL="3886200" indent="-228600" eaLnBrk="0" fontAlgn="base" hangingPunct="0">
+                <a:spcBef>
+                  <a:spcPct val="0"/>
+                </a:spcBef>
+                <a:spcAft>
+                  <a:spcPct val="0"/>
+                </a:spcAft>
+                <a:defRPr>
+                  <a:solidFill>
+                    <a:schemeClr val="tx1"/>
+                  </a:solidFill>
+                  <a:latin typeface="Calibri" panose="020F0502020204030204" pitchFamily="34" charset="0"/>
+                </a:defRPr>
+              </a:lvl9pPr>
+            </a:lstStyle>
+            <a:p>
+              <a:pPr algn="ctr" eaLnBrk="1" hangingPunct="1"/>
+              <a:r>
+                <a:rPr lang="en-US" altLang="en-US" sz="1100" dirty="0">
+                  <a:latin typeface="Arial" panose="020B0604020202020204" pitchFamily="34" charset="0"/>
+                  <a:ea typeface="Amazon Ember" panose="020B0603020204020204" pitchFamily="34" charset="0"/>
+                  <a:cs typeface="Arial" panose="020B0604020202020204" pitchFamily="34" charset="0"/>
+                </a:rPr>
+                <a:t>Load Balancer</a:t>
+              </a:r>
+            </a:p>
+          </p:txBody>
+        </p:sp>
+        <p:pic>
+          <p:nvPicPr>
+            <p:cNvPr id="56" name="Graphic 55">
+              <a:extLst>
+                <a:ext uri="{FF2B5EF4-FFF2-40B4-BE49-F238E27FC236}">
+                  <a16:creationId xmlns:a16="http://schemas.microsoft.com/office/drawing/2014/main" id="{D689DED7-16CC-4F15-A20C-D4A75EC11105}"/>
+                </a:ext>
+              </a:extLst>
+            </p:cNvPr>
+            <p:cNvPicPr>
+              <a:picLocks noChangeAspect="1"/>
+            </p:cNvPicPr>
+            <p:nvPr/>
+          </p:nvPicPr>
+          <p:blipFill>
+            <a:blip r:embed="rId11">
+              <a:extLst>
+                <a:ext uri="{28A0092B-C50C-407E-A947-70E740481C1C}">
+                  <a14:useLocalDpi xmlns:a14="http://schemas.microsoft.com/office/drawing/2010/main" val="0"/>
+                </a:ext>
+                <a:ext uri="{96DAC541-7B7A-43D3-8B79-37D633B846F1}">
+                  <asvg:svgBlip xmlns:asvg="http://schemas.microsoft.com/office/drawing/2016/SVG/main" r:embed="rId12"/>
+                </a:ext>
+              </a:extLst>
+            </a:blip>
+            <a:stretch>
+              <a:fillRect/>
+            </a:stretch>
+          </p:blipFill>
+          <p:spPr>
+            <a:xfrm>
+              <a:off x="2206976" y="3201849"/>
+              <a:ext cx="457200" cy="457200"/>
+            </a:xfrm>
+            <a:prstGeom prst="rect">
+              <a:avLst/>
+            </a:prstGeom>
+          </p:spPr>
+        </p:pic>
+      </p:grpSp>
+      <p:sp>
+        <p:nvSpPr>
+          <p:cNvPr id="72" name="Rectangle 71">
+            <a:extLst>
+              <a:ext uri="{FF2B5EF4-FFF2-40B4-BE49-F238E27FC236}">
+                <a16:creationId xmlns:a16="http://schemas.microsoft.com/office/drawing/2014/main" id="{5B995670-E73C-4D73-A69D-71A325C4869C}"/>
+              </a:ext>
+            </a:extLst>
+          </p:cNvPr>
+          <p:cNvSpPr/>
+          <p:nvPr/>
+        </p:nvSpPr>
+        <p:spPr>
+          <a:xfrm>
+            <a:off x="534878" y="557868"/>
+            <a:ext cx="6977849" cy="5956696"/>
+          </a:xfrm>
+          <a:prstGeom prst="rect">
+            <a:avLst/>
+          </a:prstGeom>
+          <a:noFill/>
+          <a:ln w="15875" cap="flat" cmpd="sng" algn="ctr">
+            <a:solidFill>
+              <a:srgbClr val="E7157B"/>
+            </a:solidFill>
+            <a:prstDash val="solid"/>
+            <a:miter lim="800000"/>
+          </a:ln>
+          <a:effectLst/>
+        </p:spPr>
+        <p:txBody>
+          <a:bodyPr lIns="502920" tIns="91440"/>
+          <a:lstStyle/>
+          <a:p>
+            <a:pPr marL="0" marR="0" lvl="0" indent="0" defTabSz="914400" eaLnBrk="1" fontAlgn="auto" latinLnBrk="0" hangingPunct="1">
+              <a:lnSpc>
+                <a:spcPct val="100000"/>
+              </a:lnSpc>
+              <a:spcBef>
+                <a:spcPts val="0"/>
+              </a:spcBef>
+              <a:spcAft>
+                <a:spcPts val="0"/>
+              </a:spcAft>
+              <a:buClrTx/>
+              <a:buSzTx/>
+              <a:buFontTx/>
+              <a:buNone/>
+              <a:tabLst/>
+              <a:defRPr/>
+            </a:pPr>
+            <a:r>
+              <a:rPr kumimoji="0" lang="en-US" sz="1200" b="0" i="0" u="none" strike="noStrike" kern="0" cap="none" spc="0" normalizeH="0" baseline="0" noProof="0" dirty="0">
+                <a:ln>
+                  <a:noFill/>
+                </a:ln>
+                <a:solidFill>
+                  <a:srgbClr val="000000"/>
+                </a:solidFill>
+                <a:effectLst/>
+                <a:uLnTx/>
+                <a:uFillTx/>
+                <a:latin typeface="Arial" panose="020B0604020202020204" pitchFamily="34" charset="0"/>
+                <a:ea typeface="+mn-ea"/>
+                <a:cs typeface="Arial" panose="020B0604020202020204" pitchFamily="34" charset="0"/>
+              </a:rPr>
+              <a:t>AWS account</a:t>
+            </a:r>
+          </a:p>
+        </p:txBody>
+      </p:sp>
       <p:pic>
         <p:nvPicPr>
-          <p:cNvPr id="6" name="Graphic 12">
-            <a:extLst>
-              <a:ext uri="{FF2B5EF4-FFF2-40B4-BE49-F238E27FC236}">
-                <a16:creationId xmlns:a16="http://schemas.microsoft.com/office/drawing/2014/main" id="{1FA8EC26-72E5-47D1-B3C3-96B0EC3D3171}"/>
+          <p:cNvPr id="73" name="Graphic 72" descr="AWS account group icon.">
+            <a:extLst>
+              <a:ext uri="{FF2B5EF4-FFF2-40B4-BE49-F238E27FC236}">
+                <a16:creationId xmlns:a16="http://schemas.microsoft.com/office/drawing/2014/main" id="{A47BBF79-2A6C-45A9-85F2-BC8E7348381E}"/>
               </a:ext>
             </a:extLst>
           </p:cNvPr>
           <p:cNvPicPr>
-            <a:picLocks noChangeAspect="1" noChangeArrowheads="1"/>
+            <a:picLocks noChangeAspect="1"/>
           </p:cNvPicPr>
           <p:nvPr/>
         </p:nvPicPr>
         <p:blipFill>
-          <a:blip r:embed="rId3">
-            <a:extLst>
-              <a:ext uri="{28A0092B-C50C-407E-A947-70E740481C1C}">
-                <a14:useLocalDpi xmlns:a14="http://schemas.microsoft.com/office/drawing/2010/main" val="0"/>
+          <a:blip r:embed="rId13">
+            <a:extLst>
+              <a:ext uri="{96DAC541-7B7A-43D3-8B79-37D633B846F1}">
+                <asvg:svgBlip xmlns:asvg="http://schemas.microsoft.com/office/drawing/2016/SVG/main" r:embed="rId14"/>
               </a:ext>
             </a:extLst>
           </a:blip>
           <a:srcRect/>
-          <a:stretch>
-            <a:fillRect/>
-          </a:stretch>
+          <a:stretch/>
         </p:blipFill>
+        <p:spPr>
+          <a:xfrm>
+            <a:off x="534877" y="560189"/>
+            <a:ext cx="381000" cy="381000"/>
+          </a:xfrm>
+          <a:prstGeom prst="rect">
+            <a:avLst/>
+          </a:prstGeom>
+        </p:spPr>
+      </p:pic>
+      <p:pic>
+        <p:nvPicPr>
+          <p:cNvPr id="77" name="Graphic 76" descr="VPC group icon.">
+            <a:extLst>
+              <a:ext uri="{FF2B5EF4-FFF2-40B4-BE49-F238E27FC236}">
+                <a16:creationId xmlns:a16="http://schemas.microsoft.com/office/drawing/2014/main" id="{FB6CBC8A-976C-4048-A279-E35B1909943F}"/>
+              </a:ext>
+            </a:extLst>
+          </p:cNvPr>
+          <p:cNvPicPr>
+            <a:picLocks noChangeAspect="1"/>
+          </p:cNvPicPr>
+          <p:nvPr/>
+        </p:nvPicPr>
+        <p:blipFill>
+          <a:blip r:embed="rId15">
+            <a:extLst>
+              <a:ext uri="{96DAC541-7B7A-43D3-8B79-37D633B846F1}">
+                <asvg:svgBlip xmlns:asvg="http://schemas.microsoft.com/office/drawing/2016/SVG/main" r:embed="rId16"/>
+              </a:ext>
+            </a:extLst>
+          </a:blip>
+          <a:srcRect/>
+          <a:stretch/>
+        </p:blipFill>
+        <p:spPr>
+          <a:xfrm>
+            <a:off x="652411" y="1276694"/>
+            <a:ext cx="381000" cy="381000"/>
+          </a:xfrm>
+          <a:prstGeom prst="rect">
+            <a:avLst/>
+          </a:prstGeom>
+        </p:spPr>
+      </p:pic>
+      <p:sp>
+        <p:nvSpPr>
+          <p:cNvPr id="88" name="Rectangle 87" descr="Availability Zone 1 represented by availability zone resource group.">
+            <a:extLst>
+              <a:ext uri="{FF2B5EF4-FFF2-40B4-BE49-F238E27FC236}">
+                <a16:creationId xmlns:a16="http://schemas.microsoft.com/office/drawing/2014/main" id="{204E71B7-896B-4496-A2CC-F81DA49B5C58}"/>
+              </a:ext>
+            </a:extLst>
+          </p:cNvPr>
+          <p:cNvSpPr/>
+          <p:nvPr/>
+        </p:nvSpPr>
         <p:spPr bwMode="auto">
           <a:xfrm>
-            <a:off x="534878" y="3140282"/>
-            <a:ext cx="469900" cy="469900"/>
+            <a:off x="5296362" y="941189"/>
+            <a:ext cx="2031628" cy="5484776"/>
+          </a:xfrm>
+          <a:prstGeom prst="rect">
+            <a:avLst/>
+          </a:prstGeom>
+          <a:noFill/>
+          <a:ln w="15875">
+            <a:solidFill>
+              <a:srgbClr val="00A4A6"/>
+            </a:solidFill>
+            <a:prstDash val="dash"/>
+          </a:ln>
+        </p:spPr>
+        <p:style>
+          <a:lnRef idx="2">
+            <a:schemeClr val="accent1">
+              <a:shade val="50000"/>
+            </a:schemeClr>
+          </a:lnRef>
+          <a:fillRef idx="1">
+            <a:schemeClr val="accent1"/>
+          </a:fillRef>
+          <a:effectRef idx="0">
+            <a:schemeClr val="accent1"/>
+          </a:effectRef>
+          <a:fontRef idx="minor">
+            <a:schemeClr val="lt1"/>
+          </a:fontRef>
+        </p:style>
+        <p:txBody>
+          <a:bodyPr tIns="91440"/>
+          <a:lstStyle/>
+          <a:p>
+            <a:pPr algn="ctr" eaLnBrk="1" fontAlgn="auto" hangingPunct="1">
+              <a:spcBef>
+                <a:spcPts val="0"/>
+              </a:spcBef>
+              <a:spcAft>
+                <a:spcPts val="0"/>
+              </a:spcAft>
+              <a:defRPr/>
+            </a:pPr>
+            <a:r>
+              <a:rPr lang="en-US" sz="1200" dirty="0">
+                <a:solidFill>
+                  <a:schemeClr val="tx1"/>
+                </a:solidFill>
+                <a:latin typeface="Arial" panose="020B0604020202020204" pitchFamily="34" charset="0"/>
+                <a:cs typeface="Arial" panose="020B0604020202020204" pitchFamily="34" charset="0"/>
+              </a:rPr>
+              <a:t>Availability Zone 2</a:t>
+            </a:r>
+          </a:p>
+        </p:txBody>
+      </p:sp>
+      <p:sp>
+        <p:nvSpPr>
+          <p:cNvPr id="7" name="TextBox 29">
+            <a:extLst>
+              <a:ext uri="{FF2B5EF4-FFF2-40B4-BE49-F238E27FC236}">
+                <a16:creationId xmlns:a16="http://schemas.microsoft.com/office/drawing/2014/main" id="{CABB08F7-34FC-426E-9E72-769F839716F0}"/>
+              </a:ext>
+            </a:extLst>
+          </p:cNvPr>
+          <p:cNvSpPr txBox="1">
+            <a:spLocks noChangeArrowheads="1"/>
+          </p:cNvSpPr>
+          <p:nvPr/>
+        </p:nvSpPr>
+        <p:spPr bwMode="auto">
+          <a:xfrm>
+            <a:off x="3486529" y="1261064"/>
+            <a:ext cx="1359248" cy="261610"/>
           </a:xfrm>
           <a:prstGeom prst="rect">
             <a:avLst/>
@@ -3546,55 +5721,8 @@
             </a:ext>
           </a:extLst>
         </p:spPr>
-      </p:pic>
-      <p:sp>
-        <p:nvSpPr>
-          <p:cNvPr id="7" name="TextBox 29">
-            <a:extLst>
-              <a:ext uri="{FF2B5EF4-FFF2-40B4-BE49-F238E27FC236}">
-                <a16:creationId xmlns:a16="http://schemas.microsoft.com/office/drawing/2014/main" id="{CABB08F7-34FC-426E-9E72-769F839716F0}"/>
-              </a:ext>
-            </a:extLst>
-          </p:cNvPr>
-          <p:cNvSpPr txBox="1">
-            <a:spLocks noChangeArrowheads="1"/>
-          </p:cNvSpPr>
-          <p:nvPr/>
-        </p:nvSpPr>
-        <p:spPr bwMode="auto">
-          <a:xfrm>
-            <a:off x="193411" y="3624908"/>
-            <a:ext cx="1073150" cy="430887"/>
-          </a:xfrm>
-          <a:prstGeom prst="rect">
-            <a:avLst/>
-          </a:prstGeom>
-          <a:noFill/>
-          <a:ln>
-            <a:noFill/>
-          </a:ln>
-          <a:extLst>
-            <a:ext uri="{909E8E84-426E-40DD-AFC4-6F175D3DCCD1}">
-              <a14:hiddenFill xmlns:a14="http://schemas.microsoft.com/office/drawing/2010/main">
-                <a:solidFill>
-                  <a:srgbClr val="FFFFFF"/>
-                </a:solidFill>
-              </a14:hiddenFill>
-            </a:ext>
-            <a:ext uri="{91240B29-F687-4F45-9708-019B960494DF}">
-              <a14:hiddenLine xmlns:a14="http://schemas.microsoft.com/office/drawing/2010/main" w="9525">
-                <a:solidFill>
-                  <a:srgbClr val="000000"/>
-                </a:solidFill>
-                <a:miter lim="800000"/>
-                <a:headEnd/>
-                <a:tailEnd/>
-              </a14:hiddenLine>
-            </a:ext>
-          </a:extLst>
-        </p:spPr>
-        <p:txBody>
-          <a:bodyPr>
+        <p:txBody>
+          <a:bodyPr wrap="square">
             <a:spAutoFit/>
           </a:bodyPr>
           <a:lstStyle>
@@ -3710,598 +5838,334 @@
           </a:p>
         </p:txBody>
       </p:sp>
-      <p:sp>
-        <p:nvSpPr>
-          <p:cNvPr id="10" name="TextBox 21">
-            <a:extLst>
-              <a:ext uri="{FF2B5EF4-FFF2-40B4-BE49-F238E27FC236}">
-                <a16:creationId xmlns:a16="http://schemas.microsoft.com/office/drawing/2014/main" id="{2BD5F485-2B94-4F73-8B4A-81DDED2374DD}"/>
-              </a:ext>
-            </a:extLst>
-          </p:cNvPr>
-          <p:cNvSpPr txBox="1">
-            <a:spLocks noChangeArrowheads="1"/>
-          </p:cNvSpPr>
-          <p:nvPr/>
-        </p:nvSpPr>
-        <p:spPr bwMode="auto">
-          <a:xfrm>
-            <a:off x="1301447" y="3666625"/>
-            <a:ext cx="2270125" cy="430887"/>
-          </a:xfrm>
-          <a:prstGeom prst="rect">
-            <a:avLst/>
-          </a:prstGeom>
-          <a:noFill/>
-          <a:ln>
-            <a:noFill/>
-          </a:ln>
-          <a:extLst>
-            <a:ext uri="{909E8E84-426E-40DD-AFC4-6F175D3DCCD1}">
-              <a14:hiddenFill xmlns:a14="http://schemas.microsoft.com/office/drawing/2010/main">
-                <a:solidFill>
-                  <a:srgbClr val="FFFFFF"/>
-                </a:solidFill>
-              </a14:hiddenFill>
-            </a:ext>
-            <a:ext uri="{91240B29-F687-4F45-9708-019B960494DF}">
-              <a14:hiddenLine xmlns:a14="http://schemas.microsoft.com/office/drawing/2010/main" w="9525">
-                <a:solidFill>
-                  <a:srgbClr val="000000"/>
-                </a:solidFill>
-                <a:miter lim="800000"/>
-                <a:headEnd/>
-                <a:tailEnd/>
-              </a14:hiddenLine>
-            </a:ext>
-          </a:extLst>
-        </p:spPr>
-        <p:txBody>
-          <a:bodyPr>
-            <a:spAutoFit/>
-          </a:bodyPr>
-          <a:lstStyle>
-            <a:lvl1pPr>
-              <a:defRPr>
-                <a:solidFill>
-                  <a:schemeClr val="tx1"/>
-                </a:solidFill>
-                <a:latin typeface="Calibri" panose="020F0502020204030204" pitchFamily="34" charset="0"/>
-              </a:defRPr>
-            </a:lvl1pPr>
-            <a:lvl2pPr marL="742950" indent="-285750">
-              <a:defRPr>
-                <a:solidFill>
-                  <a:schemeClr val="tx1"/>
-                </a:solidFill>
-                <a:latin typeface="Calibri" panose="020F0502020204030204" pitchFamily="34" charset="0"/>
-              </a:defRPr>
-            </a:lvl2pPr>
-            <a:lvl3pPr marL="1143000" indent="-228600">
-              <a:defRPr>
-                <a:solidFill>
-                  <a:schemeClr val="tx1"/>
-                </a:solidFill>
-                <a:latin typeface="Calibri" panose="020F0502020204030204" pitchFamily="34" charset="0"/>
-              </a:defRPr>
-            </a:lvl3pPr>
-            <a:lvl4pPr marL="1600200" indent="-228600">
-              <a:defRPr>
-                <a:solidFill>
-                  <a:schemeClr val="tx1"/>
-                </a:solidFill>
-                <a:latin typeface="Calibri" panose="020F0502020204030204" pitchFamily="34" charset="0"/>
-              </a:defRPr>
-            </a:lvl4pPr>
-            <a:lvl5pPr marL="2057400" indent="-228600">
-              <a:defRPr>
-                <a:solidFill>
-                  <a:schemeClr val="tx1"/>
-                </a:solidFill>
-                <a:latin typeface="Calibri" panose="020F0502020204030204" pitchFamily="34" charset="0"/>
-              </a:defRPr>
-            </a:lvl5pPr>
-            <a:lvl6pPr marL="2514600" indent="-228600" eaLnBrk="0" fontAlgn="base" hangingPunct="0">
-              <a:spcBef>
-                <a:spcPct val="0"/>
-              </a:spcBef>
-              <a:spcAft>
-                <a:spcPct val="0"/>
-              </a:spcAft>
-              <a:defRPr>
-                <a:solidFill>
-                  <a:schemeClr val="tx1"/>
-                </a:solidFill>
-                <a:latin typeface="Calibri" panose="020F0502020204030204" pitchFamily="34" charset="0"/>
-              </a:defRPr>
-            </a:lvl6pPr>
-            <a:lvl7pPr marL="2971800" indent="-228600" eaLnBrk="0" fontAlgn="base" hangingPunct="0">
-              <a:spcBef>
-                <a:spcPct val="0"/>
-              </a:spcBef>
-              <a:spcAft>
-                <a:spcPct val="0"/>
-              </a:spcAft>
-              <a:defRPr>
-                <a:solidFill>
-                  <a:schemeClr val="tx1"/>
-                </a:solidFill>
-                <a:latin typeface="Calibri" panose="020F0502020204030204" pitchFamily="34" charset="0"/>
-              </a:defRPr>
-            </a:lvl7pPr>
-            <a:lvl8pPr marL="3429000" indent="-228600" eaLnBrk="0" fontAlgn="base" hangingPunct="0">
-              <a:spcBef>
-                <a:spcPct val="0"/>
-              </a:spcBef>
-              <a:spcAft>
-                <a:spcPct val="0"/>
-              </a:spcAft>
-              <a:defRPr>
-                <a:solidFill>
-                  <a:schemeClr val="tx1"/>
-                </a:solidFill>
-                <a:latin typeface="Calibri" panose="020F0502020204030204" pitchFamily="34" charset="0"/>
-              </a:defRPr>
-            </a:lvl8pPr>
-            <a:lvl9pPr marL="3886200" indent="-228600" eaLnBrk="0" fontAlgn="base" hangingPunct="0">
-              <a:spcBef>
-                <a:spcPct val="0"/>
-              </a:spcBef>
-              <a:spcAft>
-                <a:spcPct val="0"/>
-              </a:spcAft>
-              <a:defRPr>
-                <a:solidFill>
-                  <a:schemeClr val="tx1"/>
-                </a:solidFill>
-                <a:latin typeface="Calibri" panose="020F0502020204030204" pitchFamily="34" charset="0"/>
-              </a:defRPr>
-            </a:lvl9pPr>
-          </a:lstStyle>
-          <a:p>
-            <a:pPr algn="ctr" eaLnBrk="1" hangingPunct="1"/>
-            <a:r>
-              <a:rPr lang="en-US" altLang="en-US" sz="1100" dirty="0">
-                <a:latin typeface="Arial" panose="020B0604020202020204" pitchFamily="34" charset="0"/>
-                <a:ea typeface="Amazon Ember" panose="020B0603020204020204" pitchFamily="34" charset="0"/>
-                <a:cs typeface="Arial" panose="020B0604020202020204" pitchFamily="34" charset="0"/>
-              </a:rPr>
-              <a:t>Classic load</a:t>
-            </a:r>
-          </a:p>
-          <a:p>
-            <a:pPr algn="ctr" eaLnBrk="1" hangingPunct="1"/>
-            <a:r>
-              <a:rPr lang="en-US" altLang="en-US" sz="1100" dirty="0">
-                <a:latin typeface="Arial" panose="020B0604020202020204" pitchFamily="34" charset="0"/>
-                <a:ea typeface="Amazon Ember" panose="020B0603020204020204" pitchFamily="34" charset="0"/>
-                <a:cs typeface="Arial" panose="020B0604020202020204" pitchFamily="34" charset="0"/>
-              </a:rPr>
-              <a:t>balancer</a:t>
-            </a:r>
-          </a:p>
-        </p:txBody>
-      </p:sp>
       <p:pic>
         <p:nvPicPr>
-          <p:cNvPr id="11" name="Graphic 18">
-            <a:extLst>
-              <a:ext uri="{FF2B5EF4-FFF2-40B4-BE49-F238E27FC236}">
-                <a16:creationId xmlns:a16="http://schemas.microsoft.com/office/drawing/2014/main" id="{8CA18B77-F300-4EAE-9C56-D33B396177CC}"/>
+          <p:cNvPr id="60" name="Graphic 59">
+            <a:extLst>
+              <a:ext uri="{FF2B5EF4-FFF2-40B4-BE49-F238E27FC236}">
+                <a16:creationId xmlns:a16="http://schemas.microsoft.com/office/drawing/2014/main" id="{17D37F65-C68A-47A8-83E6-F0E55C0925C6}"/>
               </a:ext>
             </a:extLst>
           </p:cNvPr>
           <p:cNvPicPr>
-            <a:picLocks noChangeAspect="1" noChangeArrowheads="1"/>
+            <a:picLocks noChangeAspect="1"/>
           </p:cNvPicPr>
           <p:nvPr/>
         </p:nvPicPr>
         <p:blipFill>
-          <a:blip r:embed="rId4">
+          <a:blip r:embed="rId17">
             <a:extLst>
               <a:ext uri="{28A0092B-C50C-407E-A947-70E740481C1C}">
                 <a14:useLocalDpi xmlns:a14="http://schemas.microsoft.com/office/drawing/2010/main" val="0"/>
               </a:ext>
+              <a:ext uri="{96DAC541-7B7A-43D3-8B79-37D633B846F1}">
+                <asvg:svgBlip xmlns:asvg="http://schemas.microsoft.com/office/drawing/2016/SVG/main" r:embed="rId18"/>
+              </a:ext>
             </a:extLst>
           </a:blip>
-          <a:srcRect/>
           <a:stretch>
             <a:fillRect/>
           </a:stretch>
         </p:blipFill>
-        <p:spPr bwMode="auto">
+        <p:spPr>
           <a:xfrm>
-            <a:off x="2238032" y="3202301"/>
+            <a:off x="3965344" y="814206"/>
             <a:ext cx="457200" cy="457200"/>
           </a:xfrm>
           <a:prstGeom prst="rect">
             <a:avLst/>
           </a:prstGeom>
-          <a:noFill/>
-          <a:ln>
-            <a:noFill/>
-          </a:ln>
-          <a:extLst>
-            <a:ext uri="{909E8E84-426E-40DD-AFC4-6F175D3DCCD1}">
-              <a14:hiddenFill xmlns:a14="http://schemas.microsoft.com/office/drawing/2010/main">
-                <a:solidFill>
-                  <a:srgbClr val="FFFFFF"/>
-                </a:solidFill>
-              </a14:hiddenFill>
-            </a:ext>
-            <a:ext uri="{91240B29-F687-4F45-9708-019B960494DF}">
-              <a14:hiddenLine xmlns:a14="http://schemas.microsoft.com/office/drawing/2010/main" w="9525">
-                <a:solidFill>
-                  <a:srgbClr val="000000"/>
-                </a:solidFill>
-                <a:miter lim="800000"/>
-                <a:headEnd/>
-                <a:tailEnd/>
-              </a14:hiddenLine>
-            </a:ext>
-          </a:extLst>
-        </p:spPr>
-      </p:pic>
-      <p:sp>
-        <p:nvSpPr>
-          <p:cNvPr id="12" name="Rectangle 11">
-            <a:extLst>
-              <a:ext uri="{FF2B5EF4-FFF2-40B4-BE49-F238E27FC236}">
-                <a16:creationId xmlns:a16="http://schemas.microsoft.com/office/drawing/2014/main" id="{ECAEA8BB-7038-4E20-A2E1-9597BE18D6BE}"/>
-              </a:ext>
-            </a:extLst>
-          </p:cNvPr>
-          <p:cNvSpPr/>
-          <p:nvPr/>
-        </p:nvSpPr>
-        <p:spPr>
-          <a:xfrm>
-            <a:off x="3562108" y="497341"/>
-            <a:ext cx="1511300" cy="3613019"/>
-          </a:xfrm>
-          <a:prstGeom prst="rect">
-            <a:avLst/>
-          </a:prstGeom>
-          <a:noFill/>
-          <a:ln w="12700">
-            <a:solidFill>
-              <a:srgbClr val="D86613"/>
-            </a:solidFill>
-            <a:prstDash val="dash"/>
-          </a:ln>
-        </p:spPr>
-        <p:style>
-          <a:lnRef idx="2">
-            <a:schemeClr val="accent1">
-              <a:shade val="50000"/>
-            </a:schemeClr>
-          </a:lnRef>
-          <a:fillRef idx="1">
-            <a:schemeClr val="accent1"/>
-          </a:fillRef>
-          <a:effectRef idx="0">
-            <a:schemeClr val="accent1"/>
-          </a:effectRef>
-          <a:fontRef idx="minor">
-            <a:schemeClr val="lt1"/>
-          </a:fontRef>
-        </p:style>
-        <p:txBody>
-          <a:bodyPr tIns="91440"/>
-          <a:lstStyle/>
-          <a:p>
-            <a:pPr algn="ctr" eaLnBrk="1" fontAlgn="auto" hangingPunct="1">
-              <a:spcBef>
-                <a:spcPts val="0"/>
-              </a:spcBef>
-              <a:spcAft>
-                <a:spcPts val="0"/>
-              </a:spcAft>
-              <a:defRPr/>
-            </a:pPr>
-            <a:endParaRPr lang="en-US" sz="1200" dirty="0">
-              <a:solidFill>
-                <a:srgbClr val="D86613"/>
-              </a:solidFill>
-              <a:latin typeface="Arial" panose="020B0604020202020204" pitchFamily="34" charset="0"/>
-              <a:cs typeface="Arial" panose="020B0604020202020204" pitchFamily="34" charset="0"/>
-            </a:endParaRPr>
-          </a:p>
-          <a:p>
-            <a:pPr algn="ctr" eaLnBrk="1" fontAlgn="auto" hangingPunct="1">
-              <a:spcBef>
-                <a:spcPts val="0"/>
-              </a:spcBef>
-              <a:spcAft>
-                <a:spcPts val="0"/>
-              </a:spcAft>
-              <a:defRPr/>
-            </a:pPr>
-            <a:endParaRPr lang="en-US" sz="1200" dirty="0">
-              <a:solidFill>
-                <a:srgbClr val="D86613"/>
-              </a:solidFill>
-              <a:latin typeface="Arial" panose="020B0604020202020204" pitchFamily="34" charset="0"/>
-              <a:cs typeface="Arial" panose="020B0604020202020204" pitchFamily="34" charset="0"/>
-            </a:endParaRPr>
-          </a:p>
-          <a:p>
-            <a:pPr algn="ctr" eaLnBrk="1" fontAlgn="auto" hangingPunct="1">
-              <a:spcBef>
-                <a:spcPts val="0"/>
-              </a:spcBef>
-              <a:spcAft>
-                <a:spcPts val="0"/>
-              </a:spcAft>
-              <a:defRPr/>
-            </a:pPr>
-            <a:r>
-              <a:rPr lang="en-US" sz="1200" dirty="0">
-                <a:solidFill>
-                  <a:srgbClr val="D86613"/>
-                </a:solidFill>
-                <a:latin typeface="Arial" panose="020B0604020202020204" pitchFamily="34" charset="0"/>
-                <a:cs typeface="Arial" panose="020B0604020202020204" pitchFamily="34" charset="0"/>
-              </a:rPr>
-              <a:t>Webserver Auto Scaling group</a:t>
-            </a:r>
-          </a:p>
-        </p:txBody>
-      </p:sp>
-      <p:pic>
-        <p:nvPicPr>
-          <p:cNvPr id="13" name="Graphic 18">
-            <a:extLst>
-              <a:ext uri="{FF2B5EF4-FFF2-40B4-BE49-F238E27FC236}">
-                <a16:creationId xmlns:a16="http://schemas.microsoft.com/office/drawing/2014/main" id="{A33BDFD9-1BB9-407A-8836-E680D9E40357}"/>
-              </a:ext>
-            </a:extLst>
-          </p:cNvPr>
-          <p:cNvPicPr>
-            <a:picLocks noChangeAspect="1" noChangeArrowheads="1"/>
-          </p:cNvPicPr>
-          <p:nvPr/>
-        </p:nvPicPr>
-        <p:blipFill>
-          <a:blip r:embed="rId5">
-            <a:extLst>
-              <a:ext uri="{28A0092B-C50C-407E-A947-70E740481C1C}">
-                <a14:useLocalDpi xmlns:a14="http://schemas.microsoft.com/office/drawing/2010/main" val="0"/>
-              </a:ext>
-            </a:extLst>
-          </a:blip>
-          <a:srcRect/>
-          <a:stretch>
-            <a:fillRect/>
-          </a:stretch>
-        </p:blipFill>
-        <p:spPr bwMode="auto">
-          <a:xfrm>
-            <a:off x="4152658" y="508762"/>
-            <a:ext cx="330200" cy="330200"/>
-          </a:xfrm>
-          <a:prstGeom prst="rect">
-            <a:avLst/>
-          </a:prstGeom>
-          <a:noFill/>
-          <a:ln>
-            <a:noFill/>
-          </a:ln>
-          <a:extLst>
-            <a:ext uri="{909E8E84-426E-40DD-AFC4-6F175D3DCCD1}">
-              <a14:hiddenFill xmlns:a14="http://schemas.microsoft.com/office/drawing/2010/main">
-                <a:solidFill>
-                  <a:srgbClr val="FFFFFF"/>
-                </a:solidFill>
-              </a14:hiddenFill>
-            </a:ext>
-            <a:ext uri="{91240B29-F687-4F45-9708-019B960494DF}">
-              <a14:hiddenLine xmlns:a14="http://schemas.microsoft.com/office/drawing/2010/main" w="9525">
-                <a:solidFill>
-                  <a:srgbClr val="000000"/>
-                </a:solidFill>
-                <a:miter lim="800000"/>
-                <a:headEnd/>
-                <a:tailEnd/>
-              </a14:hiddenLine>
-            </a:ext>
-          </a:extLst>
-        </p:spPr>
-      </p:pic>
-      <p:sp>
-        <p:nvSpPr>
-          <p:cNvPr id="14" name="Rectangle 13">
-            <a:extLst>
-              <a:ext uri="{FF2B5EF4-FFF2-40B4-BE49-F238E27FC236}">
-                <a16:creationId xmlns:a16="http://schemas.microsoft.com/office/drawing/2014/main" id="{FC94E330-8BC1-459E-8C09-3E2FFC2E0198}"/>
-              </a:ext>
-            </a:extLst>
-          </p:cNvPr>
-          <p:cNvSpPr/>
-          <p:nvPr/>
-        </p:nvSpPr>
-        <p:spPr>
-          <a:xfrm>
-            <a:off x="3547953" y="4283282"/>
-            <a:ext cx="1525455" cy="2241805"/>
-          </a:xfrm>
-          <a:prstGeom prst="rect">
-            <a:avLst/>
-          </a:prstGeom>
-          <a:noFill/>
-          <a:ln w="12700">
-            <a:solidFill>
-              <a:srgbClr val="D86613"/>
-            </a:solidFill>
-            <a:prstDash val="dash"/>
-          </a:ln>
-        </p:spPr>
-        <p:style>
-          <a:lnRef idx="2">
-            <a:schemeClr val="accent1">
-              <a:shade val="50000"/>
-            </a:schemeClr>
-          </a:lnRef>
-          <a:fillRef idx="1">
-            <a:schemeClr val="accent1"/>
-          </a:fillRef>
-          <a:effectRef idx="0">
-            <a:schemeClr val="accent1"/>
-          </a:effectRef>
-          <a:fontRef idx="minor">
-            <a:schemeClr val="lt1"/>
-          </a:fontRef>
-        </p:style>
-        <p:txBody>
-          <a:bodyPr tIns="91440"/>
-          <a:lstStyle/>
-          <a:p>
-            <a:pPr algn="ctr" eaLnBrk="1" fontAlgn="auto" hangingPunct="1">
-              <a:spcBef>
-                <a:spcPts val="0"/>
-              </a:spcBef>
-              <a:spcAft>
-                <a:spcPts val="0"/>
-              </a:spcAft>
-              <a:defRPr/>
-            </a:pPr>
-            <a:endParaRPr lang="en-US" sz="1200" dirty="0">
-              <a:solidFill>
-                <a:srgbClr val="D86613"/>
-              </a:solidFill>
-              <a:latin typeface="Arial" panose="020B0604020202020204" pitchFamily="34" charset="0"/>
-              <a:cs typeface="Arial" panose="020B0604020202020204" pitchFamily="34" charset="0"/>
-            </a:endParaRPr>
-          </a:p>
-          <a:p>
-            <a:pPr algn="ctr" eaLnBrk="1" fontAlgn="auto" hangingPunct="1">
-              <a:spcBef>
-                <a:spcPts val="0"/>
-              </a:spcBef>
-              <a:spcAft>
-                <a:spcPts val="0"/>
-              </a:spcAft>
-              <a:defRPr/>
-            </a:pPr>
-            <a:endParaRPr lang="en-US" sz="1200" dirty="0">
-              <a:solidFill>
-                <a:srgbClr val="D86613"/>
-              </a:solidFill>
-              <a:latin typeface="Arial" panose="020B0604020202020204" pitchFamily="34" charset="0"/>
-              <a:cs typeface="Arial" panose="020B0604020202020204" pitchFamily="34" charset="0"/>
-            </a:endParaRPr>
-          </a:p>
-          <a:p>
-            <a:pPr algn="ctr" eaLnBrk="1" fontAlgn="auto" hangingPunct="1">
-              <a:spcBef>
-                <a:spcPts val="0"/>
-              </a:spcBef>
-              <a:spcAft>
-                <a:spcPts val="0"/>
-              </a:spcAft>
-              <a:defRPr/>
-            </a:pPr>
-            <a:r>
-              <a:rPr lang="en-US" sz="1200" dirty="0">
-                <a:solidFill>
-                  <a:srgbClr val="D86613"/>
-                </a:solidFill>
-                <a:latin typeface="Arial" panose="020B0604020202020204" pitchFamily="34" charset="0"/>
-                <a:cs typeface="Arial" panose="020B0604020202020204" pitchFamily="34" charset="0"/>
-              </a:rPr>
-              <a:t>Database Auto Scaling group</a:t>
-            </a:r>
-          </a:p>
-        </p:txBody>
-      </p:sp>
-      <p:pic>
-        <p:nvPicPr>
-          <p:cNvPr id="15" name="Graphic 18">
-            <a:extLst>
-              <a:ext uri="{FF2B5EF4-FFF2-40B4-BE49-F238E27FC236}">
-                <a16:creationId xmlns:a16="http://schemas.microsoft.com/office/drawing/2014/main" id="{60C7A4A5-D450-45D3-82B3-785DC2EFBFE1}"/>
-              </a:ext>
-            </a:extLst>
-          </p:cNvPr>
-          <p:cNvPicPr>
-            <a:picLocks noChangeAspect="1" noChangeArrowheads="1"/>
-          </p:cNvPicPr>
-          <p:nvPr/>
-        </p:nvPicPr>
-        <p:blipFill>
-          <a:blip r:embed="rId5">
-            <a:extLst>
-              <a:ext uri="{28A0092B-C50C-407E-A947-70E740481C1C}">
-                <a14:useLocalDpi xmlns:a14="http://schemas.microsoft.com/office/drawing/2010/main" val="0"/>
-              </a:ext>
-            </a:extLst>
-          </a:blip>
-          <a:srcRect/>
-          <a:stretch>
-            <a:fillRect/>
-          </a:stretch>
-        </p:blipFill>
-        <p:spPr bwMode="auto">
-          <a:xfrm>
-            <a:off x="4145580" y="4283282"/>
-            <a:ext cx="330200" cy="330200"/>
-          </a:xfrm>
-          <a:prstGeom prst="rect">
-            <a:avLst/>
-          </a:prstGeom>
-          <a:noFill/>
-          <a:ln>
-            <a:noFill/>
-          </a:ln>
-          <a:extLst>
-            <a:ext uri="{909E8E84-426E-40DD-AFC4-6F175D3DCCD1}">
-              <a14:hiddenFill xmlns:a14="http://schemas.microsoft.com/office/drawing/2010/main">
-                <a:solidFill>
-                  <a:srgbClr val="FFFFFF"/>
-                </a:solidFill>
-              </a14:hiddenFill>
-            </a:ext>
-            <a:ext uri="{91240B29-F687-4F45-9708-019B960494DF}">
-              <a14:hiddenLine xmlns:a14="http://schemas.microsoft.com/office/drawing/2010/main" w="9525">
-                <a:solidFill>
-                  <a:srgbClr val="000000"/>
-                </a:solidFill>
-                <a:miter lim="800000"/>
-                <a:headEnd/>
-                <a:tailEnd/>
-              </a14:hiddenLine>
-            </a:ext>
-          </a:extLst>
         </p:spPr>
       </p:pic>
       <p:grpSp>
         <p:nvGrpSpPr>
-          <p:cNvPr id="16" name="Group 25">
-            <a:extLst>
-              <a:ext uri="{FF2B5EF4-FFF2-40B4-BE49-F238E27FC236}">
-                <a16:creationId xmlns:a16="http://schemas.microsoft.com/office/drawing/2014/main" id="{C83D5F7A-F6C4-4E41-8A7E-16E3837793C7}"/>
-              </a:ext>
-            </a:extLst>
-          </p:cNvPr>
-          <p:cNvGrpSpPr>
-            <a:grpSpLocks/>
-          </p:cNvGrpSpPr>
+          <p:cNvPr id="91" name="Group 90">
+            <a:extLst>
+              <a:ext uri="{FF2B5EF4-FFF2-40B4-BE49-F238E27FC236}">
+                <a16:creationId xmlns:a16="http://schemas.microsoft.com/office/drawing/2014/main" id="{93881D92-E05E-49FB-8201-E88EAD7B3C75}"/>
+              </a:ext>
+            </a:extLst>
+          </p:cNvPr>
+          <p:cNvGrpSpPr/>
           <p:nvPr/>
         </p:nvGrpSpPr>
-        <p:grpSpPr bwMode="auto">
+        <p:grpSpPr>
           <a:xfrm>
-            <a:off x="2623050" y="2119125"/>
-            <a:ext cx="1332932" cy="3613019"/>
-            <a:chOff x="2674470" y="1567527"/>
-            <a:chExt cx="1488361" cy="331243"/>
+            <a:off x="1151473" y="4539247"/>
+            <a:ext cx="6065241" cy="1001365"/>
+            <a:chOff x="1151473" y="4539247"/>
+            <a:chExt cx="6065241" cy="1001365"/>
           </a:xfrm>
         </p:grpSpPr>
         <p:sp>
           <p:nvSpPr>
-            <p:cNvPr id="17" name="Freeform 26">
+            <p:cNvPr id="33" name="TextBox 52">
               <a:extLst>
                 <a:ext uri="{FF2B5EF4-FFF2-40B4-BE49-F238E27FC236}">
-                  <a16:creationId xmlns:a16="http://schemas.microsoft.com/office/drawing/2014/main" id="{71B2B649-DB09-46C0-A584-B4DC97B2A6B0}"/>
+                  <a16:creationId xmlns:a16="http://schemas.microsoft.com/office/drawing/2014/main" id="{997B874E-6663-4305-939F-436ABD3B576D}"/>
+                </a:ext>
+              </a:extLst>
+            </p:cNvPr>
+            <p:cNvSpPr txBox="1">
+              <a:spLocks noChangeArrowheads="1"/>
+            </p:cNvSpPr>
+            <p:nvPr/>
+          </p:nvSpPr>
+          <p:spPr bwMode="auto">
+            <a:xfrm>
+              <a:off x="1179034" y="5133561"/>
+              <a:ext cx="1782583" cy="261610"/>
+            </a:xfrm>
+            <a:prstGeom prst="rect">
+              <a:avLst/>
+            </a:prstGeom>
+            <a:noFill/>
+            <a:ln>
+              <a:noFill/>
+            </a:ln>
+            <a:extLst>
+              <a:ext uri="{909E8E84-426E-40DD-AFC4-6F175D3DCCD1}">
+                <a14:hiddenFill xmlns:a14="http://schemas.microsoft.com/office/drawing/2010/main">
+                  <a:solidFill>
+                    <a:srgbClr val="FFFFFF"/>
+                  </a:solidFill>
+                </a14:hiddenFill>
+              </a:ext>
+              <a:ext uri="{91240B29-F687-4F45-9708-019B960494DF}">
+                <a14:hiddenLine xmlns:a14="http://schemas.microsoft.com/office/drawing/2010/main" w="9525">
+                  <a:solidFill>
+                    <a:srgbClr val="000000"/>
+                  </a:solidFill>
+                  <a:miter lim="800000"/>
+                  <a:headEnd/>
+                  <a:tailEnd/>
+                </a14:hiddenLine>
+              </a:ext>
+            </a:extLst>
+          </p:spPr>
+          <p:txBody>
+            <a:bodyPr wrap="square">
+              <a:spAutoFit/>
+            </a:bodyPr>
+            <a:lstStyle>
+              <a:lvl1pPr>
+                <a:defRPr>
+                  <a:solidFill>
+                    <a:schemeClr val="tx1"/>
+                  </a:solidFill>
+                  <a:latin typeface="Calibri" panose="020F0502020204030204" pitchFamily="34" charset="0"/>
+                </a:defRPr>
+              </a:lvl1pPr>
+              <a:lvl2pPr marL="742950" indent="-285750">
+                <a:defRPr>
+                  <a:solidFill>
+                    <a:schemeClr val="tx1"/>
+                  </a:solidFill>
+                  <a:latin typeface="Calibri" panose="020F0502020204030204" pitchFamily="34" charset="0"/>
+                </a:defRPr>
+              </a:lvl2pPr>
+              <a:lvl3pPr marL="1143000" indent="-228600">
+                <a:defRPr>
+                  <a:solidFill>
+                    <a:schemeClr val="tx1"/>
+                  </a:solidFill>
+                  <a:latin typeface="Calibri" panose="020F0502020204030204" pitchFamily="34" charset="0"/>
+                </a:defRPr>
+              </a:lvl3pPr>
+              <a:lvl4pPr marL="1600200" indent="-228600">
+                <a:defRPr>
+                  <a:solidFill>
+                    <a:schemeClr val="tx1"/>
+                  </a:solidFill>
+                  <a:latin typeface="Calibri" panose="020F0502020204030204" pitchFamily="34" charset="0"/>
+                </a:defRPr>
+              </a:lvl4pPr>
+              <a:lvl5pPr marL="2057400" indent="-228600">
+                <a:defRPr>
+                  <a:solidFill>
+                    <a:schemeClr val="tx1"/>
+                  </a:solidFill>
+                  <a:latin typeface="Calibri" panose="020F0502020204030204" pitchFamily="34" charset="0"/>
+                </a:defRPr>
+              </a:lvl5pPr>
+              <a:lvl6pPr marL="2514600" indent="-228600" eaLnBrk="0" fontAlgn="base" hangingPunct="0">
+                <a:spcBef>
+                  <a:spcPct val="0"/>
+                </a:spcBef>
+                <a:spcAft>
+                  <a:spcPct val="0"/>
+                </a:spcAft>
+                <a:defRPr>
+                  <a:solidFill>
+                    <a:schemeClr val="tx1"/>
+                  </a:solidFill>
+                  <a:latin typeface="Calibri" panose="020F0502020204030204" pitchFamily="34" charset="0"/>
+                </a:defRPr>
+              </a:lvl6pPr>
+              <a:lvl7pPr marL="2971800" indent="-228600" eaLnBrk="0" fontAlgn="base" hangingPunct="0">
+                <a:spcBef>
+                  <a:spcPct val="0"/>
+                </a:spcBef>
+                <a:spcAft>
+                  <a:spcPct val="0"/>
+                </a:spcAft>
+                <a:defRPr>
+                  <a:solidFill>
+                    <a:schemeClr val="tx1"/>
+                  </a:solidFill>
+                  <a:latin typeface="Calibri" panose="020F0502020204030204" pitchFamily="34" charset="0"/>
+                </a:defRPr>
+              </a:lvl7pPr>
+              <a:lvl8pPr marL="3429000" indent="-228600" eaLnBrk="0" fontAlgn="base" hangingPunct="0">
+                <a:spcBef>
+                  <a:spcPct val="0"/>
+                </a:spcBef>
+                <a:spcAft>
+                  <a:spcPct val="0"/>
+                </a:spcAft>
+                <a:defRPr>
+                  <a:solidFill>
+                    <a:schemeClr val="tx1"/>
+                  </a:solidFill>
+                  <a:latin typeface="Calibri" panose="020F0502020204030204" pitchFamily="34" charset="0"/>
+                </a:defRPr>
+              </a:lvl8pPr>
+              <a:lvl9pPr marL="3886200" indent="-228600" eaLnBrk="0" fontAlgn="base" hangingPunct="0">
+                <a:spcBef>
+                  <a:spcPct val="0"/>
+                </a:spcBef>
+                <a:spcAft>
+                  <a:spcPct val="0"/>
+                </a:spcAft>
+                <a:defRPr>
+                  <a:solidFill>
+                    <a:schemeClr val="tx1"/>
+                  </a:solidFill>
+                  <a:latin typeface="Calibri" panose="020F0502020204030204" pitchFamily="34" charset="0"/>
+                </a:defRPr>
+              </a:lvl9pPr>
+            </a:lstStyle>
+            <a:p>
+              <a:pPr algn="ctr" eaLnBrk="1" hangingPunct="1"/>
+              <a:r>
+                <a:rPr lang="en-US" altLang="en-US" sz="1100" dirty="0">
+                  <a:latin typeface="Arial" panose="020B0604020202020204" pitchFamily="34" charset="0"/>
+                  <a:ea typeface="Amazon Ember" panose="020B0603020204020204" pitchFamily="34" charset="0"/>
+                  <a:cs typeface="Arial" panose="020B0604020202020204" pitchFamily="34" charset="0"/>
+                </a:rPr>
+                <a:t>Database Web Server</a:t>
+              </a:r>
+            </a:p>
+          </p:txBody>
+        </p:sp>
+        <p:pic>
+          <p:nvPicPr>
+            <p:cNvPr id="52" name="Graphic 51">
+              <a:extLst>
+                <a:ext uri="{FF2B5EF4-FFF2-40B4-BE49-F238E27FC236}">
+                  <a16:creationId xmlns:a16="http://schemas.microsoft.com/office/drawing/2014/main" id="{4F18548C-F542-486A-A084-99458CB52C4B}"/>
+                </a:ext>
+                <a:ext uri="{C183D7F6-B498-43B3-948B-1728B52AA6E4}">
+                  <adec:decorative xmlns:adec="http://schemas.microsoft.com/office/drawing/2017/decorative" val="1"/>
+                </a:ext>
+              </a:extLst>
+            </p:cNvPr>
+            <p:cNvPicPr>
+              <a:picLocks noChangeAspect="1"/>
+            </p:cNvPicPr>
+            <p:nvPr/>
+          </p:nvPicPr>
+          <p:blipFill>
+            <a:blip r:embed="rId5">
+              <a:extLst>
+                <a:ext uri="{96DAC541-7B7A-43D3-8B79-37D633B846F1}">
+                  <asvg:svgBlip xmlns:asvg="http://schemas.microsoft.com/office/drawing/2016/SVG/main" r:embed="rId6"/>
+                </a:ext>
+              </a:extLst>
+            </a:blip>
+            <a:srcRect/>
+            <a:stretch/>
+          </p:blipFill>
+          <p:spPr>
+            <a:xfrm>
+              <a:off x="3989756" y="4539247"/>
+              <a:ext cx="381000" cy="381000"/>
+            </a:xfrm>
+            <a:prstGeom prst="rect">
+              <a:avLst/>
+            </a:prstGeom>
+          </p:spPr>
+        </p:pic>
+        <p:pic>
+          <p:nvPicPr>
+            <p:cNvPr id="53" name="Graphic 60">
+              <a:extLst>
+                <a:ext uri="{FF2B5EF4-FFF2-40B4-BE49-F238E27FC236}">
+                  <a16:creationId xmlns:a16="http://schemas.microsoft.com/office/drawing/2014/main" id="{CA608D63-EFB8-43C0-8CC9-B15632E03CBB}"/>
+                </a:ext>
+                <a:ext uri="{C183D7F6-B498-43B3-948B-1728B52AA6E4}">
+                  <adec:decorative xmlns:adec="http://schemas.microsoft.com/office/drawing/2017/decorative" val="1"/>
+                </a:ext>
+              </a:extLst>
+            </p:cNvPr>
+            <p:cNvPicPr>
+              <a:picLocks noChangeAspect="1" noChangeArrowheads="1"/>
+            </p:cNvPicPr>
+            <p:nvPr/>
+          </p:nvPicPr>
+          <p:blipFill>
+            <a:blip r:embed="rId19">
+              <a:extLst>
+                <a:ext uri="{96DAC541-7B7A-43D3-8B79-37D633B846F1}">
+                  <asvg:svgBlip xmlns:asvg="http://schemas.microsoft.com/office/drawing/2016/SVG/main" r:embed="rId20"/>
+                </a:ext>
+              </a:extLst>
+            </a:blip>
+            <a:srcRect/>
+            <a:stretch/>
+          </p:blipFill>
+          <p:spPr bwMode="auto">
+            <a:xfrm>
+              <a:off x="1790424" y="4676361"/>
+              <a:ext cx="457200" cy="457200"/>
+            </a:xfrm>
+            <a:prstGeom prst="rect">
+              <a:avLst/>
+            </a:prstGeom>
+            <a:noFill/>
+            <a:ln>
+              <a:noFill/>
+            </a:ln>
+            <a:extLst>
+              <a:ext uri="{909E8E84-426E-40DD-AFC4-6F175D3DCCD1}">
+                <a14:hiddenFill xmlns:a14="http://schemas.microsoft.com/office/drawing/2010/main">
+                  <a:solidFill>
+                    <a:srgbClr val="FFFFFF"/>
+                  </a:solidFill>
+                </a14:hiddenFill>
+              </a:ext>
+              <a:ext uri="{91240B29-F687-4F45-9708-019B960494DF}">
+                <a14:hiddenLine xmlns:a14="http://schemas.microsoft.com/office/drawing/2010/main" w="9525">
+                  <a:solidFill>
+                    <a:srgbClr val="000000"/>
+                  </a:solidFill>
+                  <a:miter lim="800000"/>
+                  <a:headEnd/>
+                  <a:tailEnd/>
+                </a14:hiddenLine>
+              </a:ext>
+            </a:extLst>
+          </p:spPr>
+        </p:pic>
+        <p:sp>
+          <p:nvSpPr>
+            <p:cNvPr id="89" name="Rectangle 88">
+              <a:extLst>
+                <a:ext uri="{FF2B5EF4-FFF2-40B4-BE49-F238E27FC236}">
+                  <a16:creationId xmlns:a16="http://schemas.microsoft.com/office/drawing/2014/main" id="{308F5411-96B3-44A0-B58F-F835A9605536}"/>
+                </a:ext>
+                <a:ext uri="{C183D7F6-B498-43B3-948B-1728B52AA6E4}">
+                  <adec:decorative xmlns:adec="http://schemas.microsoft.com/office/drawing/2017/decorative" val="1"/>
                 </a:ext>
               </a:extLst>
             </p:cNvPr>
@@ -4309,70 +6173,19 @@
             <p:nvPr/>
           </p:nvSpPr>
           <p:spPr>
-            <a:xfrm rot="10800000">
-              <a:off x="3247894" y="1567527"/>
-              <a:ext cx="914937" cy="331243"/>
+            <a:xfrm>
+              <a:off x="1151473" y="4547448"/>
+              <a:ext cx="6065241" cy="993164"/>
             </a:xfrm>
-            <a:custGeom>
+            <a:prstGeom prst="rect">
               <a:avLst/>
-              <a:gdLst>
-                <a:gd name="connsiteX0" fmla="*/ 0 w 622300"/>
-                <a:gd name="connsiteY0" fmla="*/ 0 h 1574800"/>
-                <a:gd name="connsiteX1" fmla="*/ 622300 w 622300"/>
-                <a:gd name="connsiteY1" fmla="*/ 0 h 1574800"/>
-                <a:gd name="connsiteX2" fmla="*/ 622300 w 622300"/>
-                <a:gd name="connsiteY2" fmla="*/ 1574800 h 1574800"/>
-                <a:gd name="connsiteX3" fmla="*/ 482600 w 622300"/>
-                <a:gd name="connsiteY3" fmla="*/ 1574800 h 1574800"/>
-                <a:gd name="connsiteX4" fmla="*/ 0 w 622300"/>
-                <a:gd name="connsiteY4" fmla="*/ 1574800 h 1574800"/>
-              </a:gdLst>
-              <a:ahLst/>
-              <a:cxnLst>
-                <a:cxn ang="0">
-                  <a:pos x="connsiteX0" y="connsiteY0"/>
-                </a:cxn>
-                <a:cxn ang="0">
-                  <a:pos x="connsiteX1" y="connsiteY1"/>
-                </a:cxn>
-                <a:cxn ang="0">
-                  <a:pos x="connsiteX2" y="connsiteY2"/>
-                </a:cxn>
-                <a:cxn ang="0">
-                  <a:pos x="connsiteX3" y="connsiteY3"/>
-                </a:cxn>
-                <a:cxn ang="0">
-                  <a:pos x="connsiteX4" y="connsiteY4"/>
-                </a:cxn>
-              </a:cxnLst>
-              <a:rect l="l" t="t" r="r" b="b"/>
-              <a:pathLst>
-                <a:path w="622300" h="1574800">
-                  <a:moveTo>
-                    <a:pt x="0" y="0"/>
-                  </a:moveTo>
-                  <a:lnTo>
-                    <a:pt x="622300" y="0"/>
-                  </a:lnTo>
-                  <a:lnTo>
-                    <a:pt x="622300" y="1574800"/>
-                  </a:lnTo>
-                  <a:lnTo>
-                    <a:pt x="482600" y="1574800"/>
-                  </a:lnTo>
-                  <a:lnTo>
-                    <a:pt x="0" y="1574800"/>
-                  </a:lnTo>
-                </a:path>
-              </a:pathLst>
-            </a:custGeom>
+            </a:prstGeom>
             <a:noFill/>
-            <a:ln w="12700">
+            <a:ln w="15875">
               <a:solidFill>
-                <a:schemeClr val="tx2"/>
+                <a:srgbClr val="ED7100"/>
               </a:solidFill>
-              <a:headEnd type="arrow" w="med" len="sm"/>
-              <a:tailEnd type="arrow" w="med" len="sm"/>
+              <a:prstDash val="dash"/>
             </a:ln>
           </p:spPr>
           <p:style>
@@ -4392,7 +6205,7 @@
             </a:fontRef>
           </p:style>
           <p:txBody>
-            <a:bodyPr anchor="ctr"/>
+            <a:bodyPr tIns="91440"/>
             <a:lstStyle/>
             <a:p>
               <a:pPr algn="ctr" eaLnBrk="1" fontAlgn="auto" hangingPunct="1">
@@ -4404,62 +6217,83 @@
                 </a:spcAft>
                 <a:defRPr/>
               </a:pPr>
-              <a:endParaRPr lang="en-US" dirty="0"/>
+              <a:endParaRPr lang="en-US" sz="1200" dirty="0">
+                <a:solidFill>
+                  <a:schemeClr val="tx1"/>
+                </a:solidFill>
+                <a:latin typeface="Arial" panose="020B0604020202020204" pitchFamily="34" charset="0"/>
+                <a:cs typeface="Arial" panose="020B0604020202020204" pitchFamily="34" charset="0"/>
+              </a:endParaRPr>
+            </a:p>
+            <a:p>
+              <a:pPr algn="ctr" eaLnBrk="1" fontAlgn="auto" hangingPunct="1">
+                <a:spcBef>
+                  <a:spcPts val="0"/>
+                </a:spcBef>
+                <a:spcAft>
+                  <a:spcPts val="0"/>
+                </a:spcAft>
+                <a:defRPr/>
+              </a:pPr>
+              <a:endParaRPr lang="en-US" sz="1200" dirty="0">
+                <a:solidFill>
+                  <a:schemeClr val="tx1"/>
+                </a:solidFill>
+                <a:latin typeface="Arial" panose="020B0604020202020204" pitchFamily="34" charset="0"/>
+                <a:cs typeface="Arial" panose="020B0604020202020204" pitchFamily="34" charset="0"/>
+              </a:endParaRPr>
+            </a:p>
+            <a:p>
+              <a:pPr algn="ctr" eaLnBrk="1" fontAlgn="auto" hangingPunct="1">
+                <a:spcBef>
+                  <a:spcPts val="0"/>
+                </a:spcBef>
+                <a:spcAft>
+                  <a:spcPts val="0"/>
+                </a:spcAft>
+                <a:defRPr/>
+              </a:pPr>
+              <a:r>
+                <a:rPr lang="en-US" sz="1200" dirty="0">
+                  <a:solidFill>
+                    <a:schemeClr val="tx1"/>
+                  </a:solidFill>
+                  <a:latin typeface="Arial" panose="020B0604020202020204" pitchFamily="34" charset="0"/>
+                  <a:cs typeface="Arial" panose="020B0604020202020204" pitchFamily="34" charset="0"/>
+                </a:rPr>
+                <a:t>Database Web Server</a:t>
+              </a:r>
+            </a:p>
+            <a:p>
+              <a:pPr algn="ctr" eaLnBrk="1" fontAlgn="auto" hangingPunct="1">
+                <a:spcBef>
+                  <a:spcPts val="0"/>
+                </a:spcBef>
+                <a:spcAft>
+                  <a:spcPts val="0"/>
+                </a:spcAft>
+                <a:defRPr/>
+              </a:pPr>
+              <a:r>
+                <a:rPr lang="en-US" sz="1200" dirty="0">
+                  <a:solidFill>
+                    <a:schemeClr val="tx1"/>
+                  </a:solidFill>
+                  <a:latin typeface="Arial" panose="020B0604020202020204" pitchFamily="34" charset="0"/>
+                  <a:cs typeface="Arial" panose="020B0604020202020204" pitchFamily="34" charset="0"/>
+                </a:rPr>
+                <a:t>Auto Scaling group</a:t>
+              </a:r>
             </a:p>
           </p:txBody>
         </p:sp>
-        <p:cxnSp>
-          <p:nvCxnSpPr>
-            <p:cNvPr id="18" name="Straight Arrow Connector 17">
-              <a:extLst>
-                <a:ext uri="{FF2B5EF4-FFF2-40B4-BE49-F238E27FC236}">
-                  <a16:creationId xmlns:a16="http://schemas.microsoft.com/office/drawing/2014/main" id="{2752E979-E675-4831-841E-C0892124DA55}"/>
-                </a:ext>
-              </a:extLst>
-            </p:cNvPr>
-            <p:cNvCxnSpPr>
-              <a:cxnSpLocks/>
-            </p:cNvCxnSpPr>
-            <p:nvPr/>
-          </p:nvCxnSpPr>
-          <p:spPr>
-            <a:xfrm>
-              <a:off x="2674470" y="1687617"/>
-              <a:ext cx="573422" cy="0"/>
-            </a:xfrm>
-            <a:prstGeom prst="straightConnector1">
-              <a:avLst/>
-            </a:prstGeom>
-            <a:ln w="12700">
-              <a:solidFill>
-                <a:srgbClr val="545B64"/>
-              </a:solidFill>
-              <a:headEnd type="none" w="med" len="sm"/>
-              <a:tailEnd type="none" w="med" len="sm"/>
-            </a:ln>
-          </p:spPr>
-          <p:style>
-            <a:lnRef idx="1">
-              <a:schemeClr val="accent1"/>
-            </a:lnRef>
-            <a:fillRef idx="0">
-              <a:schemeClr val="accent1"/>
-            </a:fillRef>
-            <a:effectRef idx="0">
-              <a:schemeClr val="accent1"/>
-            </a:effectRef>
-            <a:fontRef idx="minor">
-              <a:schemeClr val="tx1"/>
-            </a:fontRef>
-          </p:style>
-        </p:cxnSp>
       </p:grpSp>
       <p:sp>
         <p:nvSpPr>
-          <p:cNvPr id="22" name="Rectangle 21">
-            <a:extLst>
-              <a:ext uri="{FF2B5EF4-FFF2-40B4-BE49-F238E27FC236}">
-                <a16:creationId xmlns:a16="http://schemas.microsoft.com/office/drawing/2014/main" id="{FE44A95F-E542-4A2B-B99F-C2CCDFB2546D}"/>
+          <p:cNvPr id="96" name="Freeform 35">
+            <a:extLst>
+              <a:ext uri="{FF2B5EF4-FFF2-40B4-BE49-F238E27FC236}">
+                <a16:creationId xmlns:a16="http://schemas.microsoft.com/office/drawing/2014/main" id="{0E60370C-B84F-493D-89CE-0625F6BB32AE}"/>
               </a:ext>
             </a:extLst>
           </p:cNvPr>
@@ -4467,1380 +6301,9 @@
           <p:nvPr/>
         </p:nvSpPr>
         <p:spPr>
-          <a:xfrm>
-            <a:off x="3422291" y="1365158"/>
-            <a:ext cx="3404638" cy="1241966"/>
-          </a:xfrm>
-          <a:prstGeom prst="rect">
-            <a:avLst/>
-          </a:prstGeom>
-          <a:noFill/>
-          <a:ln w="12700">
-            <a:solidFill>
-              <a:srgbClr val="5B9CD5"/>
-            </a:solidFill>
-            <a:prstDash val="dash"/>
-          </a:ln>
-        </p:spPr>
-        <p:style>
-          <a:lnRef idx="2">
-            <a:schemeClr val="accent1">
-              <a:shade val="50000"/>
-            </a:schemeClr>
-          </a:lnRef>
-          <a:fillRef idx="1">
-            <a:schemeClr val="accent1"/>
-          </a:fillRef>
-          <a:effectRef idx="0">
-            <a:schemeClr val="accent1"/>
-          </a:effectRef>
-          <a:fontRef idx="minor">
-            <a:schemeClr val="lt1"/>
-          </a:fontRef>
-        </p:style>
-        <p:txBody>
-          <a:bodyPr tIns="91440"/>
-          <a:lstStyle/>
-          <a:p>
-            <a:pPr algn="ctr" eaLnBrk="1" fontAlgn="auto" hangingPunct="1">
-              <a:spcBef>
-                <a:spcPts val="0"/>
-              </a:spcBef>
-              <a:spcAft>
-                <a:spcPts val="0"/>
-              </a:spcAft>
-              <a:defRPr/>
-            </a:pPr>
-            <a:r>
-              <a:rPr lang="en-US" sz="1200" dirty="0">
-                <a:solidFill>
-                  <a:srgbClr val="5B9CD5"/>
-                </a:solidFill>
-                <a:latin typeface="Arial" panose="020B0604020202020204" pitchFamily="34" charset="0"/>
-                <a:cs typeface="Arial" panose="020B0604020202020204" pitchFamily="34" charset="0"/>
-              </a:rPr>
-              <a:t>Availability Zone 1</a:t>
-            </a:r>
-          </a:p>
-        </p:txBody>
-      </p:sp>
-      <p:sp>
-        <p:nvSpPr>
-          <p:cNvPr id="23" name="Rectangle 22">
-            <a:extLst>
-              <a:ext uri="{FF2B5EF4-FFF2-40B4-BE49-F238E27FC236}">
-                <a16:creationId xmlns:a16="http://schemas.microsoft.com/office/drawing/2014/main" id="{C13C5963-3CF7-45DB-A82C-DB7685B526BD}"/>
-              </a:ext>
-            </a:extLst>
-          </p:cNvPr>
-          <p:cNvSpPr/>
-          <p:nvPr/>
-        </p:nvSpPr>
-        <p:spPr>
-          <a:xfrm>
-            <a:off x="3422290" y="2686690"/>
-            <a:ext cx="3404637" cy="1241965"/>
-          </a:xfrm>
-          <a:prstGeom prst="rect">
-            <a:avLst/>
-          </a:prstGeom>
-          <a:noFill/>
-          <a:ln w="12700">
-            <a:solidFill>
-              <a:srgbClr val="5B9CD5"/>
-            </a:solidFill>
-            <a:prstDash val="dash"/>
-          </a:ln>
-        </p:spPr>
-        <p:style>
-          <a:lnRef idx="2">
-            <a:schemeClr val="accent1">
-              <a:shade val="50000"/>
-            </a:schemeClr>
-          </a:lnRef>
-          <a:fillRef idx="1">
-            <a:schemeClr val="accent1"/>
-          </a:fillRef>
-          <a:effectRef idx="0">
-            <a:schemeClr val="accent1"/>
-          </a:effectRef>
-          <a:fontRef idx="minor">
-            <a:schemeClr val="lt1"/>
-          </a:fontRef>
-        </p:style>
-        <p:txBody>
-          <a:bodyPr tIns="91440"/>
-          <a:lstStyle/>
-          <a:p>
-            <a:pPr algn="ctr" eaLnBrk="1" fontAlgn="auto" hangingPunct="1">
-              <a:spcBef>
-                <a:spcPts val="0"/>
-              </a:spcBef>
-              <a:spcAft>
-                <a:spcPts val="0"/>
-              </a:spcAft>
-              <a:defRPr/>
-            </a:pPr>
-            <a:r>
-              <a:rPr lang="en-US" sz="1200" dirty="0">
-                <a:solidFill>
-                  <a:srgbClr val="5B9CD5"/>
-                </a:solidFill>
-                <a:latin typeface="Arial" panose="020B0604020202020204" pitchFamily="34" charset="0"/>
-                <a:cs typeface="Arial" panose="020B0604020202020204" pitchFamily="34" charset="0"/>
-              </a:rPr>
-              <a:t>Availability Zone 2</a:t>
-            </a:r>
-          </a:p>
-        </p:txBody>
-      </p:sp>
-      <p:sp>
-        <p:nvSpPr>
-          <p:cNvPr id="24" name="Rectangle 23">
-            <a:extLst>
-              <a:ext uri="{FF2B5EF4-FFF2-40B4-BE49-F238E27FC236}">
-                <a16:creationId xmlns:a16="http://schemas.microsoft.com/office/drawing/2014/main" id="{36C80543-48CE-41A4-B0BE-DA32E80B3ABB}"/>
-              </a:ext>
-            </a:extLst>
-          </p:cNvPr>
-          <p:cNvSpPr/>
-          <p:nvPr/>
-        </p:nvSpPr>
-        <p:spPr>
-          <a:xfrm>
-            <a:off x="3422290" y="5152730"/>
-            <a:ext cx="3404637" cy="1219434"/>
-          </a:xfrm>
-          <a:prstGeom prst="rect">
-            <a:avLst/>
-          </a:prstGeom>
-          <a:noFill/>
-          <a:ln w="12700">
-            <a:solidFill>
-              <a:srgbClr val="5B9CD5"/>
-            </a:solidFill>
-            <a:prstDash val="dash"/>
-          </a:ln>
-        </p:spPr>
-        <p:style>
-          <a:lnRef idx="2">
-            <a:schemeClr val="accent1">
-              <a:shade val="50000"/>
-            </a:schemeClr>
-          </a:lnRef>
-          <a:fillRef idx="1">
-            <a:schemeClr val="accent1"/>
-          </a:fillRef>
-          <a:effectRef idx="0">
-            <a:schemeClr val="accent1"/>
-          </a:effectRef>
-          <a:fontRef idx="minor">
-            <a:schemeClr val="lt1"/>
-          </a:fontRef>
-        </p:style>
-        <p:txBody>
-          <a:bodyPr tIns="91440"/>
-          <a:lstStyle/>
-          <a:p>
-            <a:pPr algn="ctr" eaLnBrk="1" fontAlgn="auto" hangingPunct="1">
-              <a:spcBef>
-                <a:spcPts val="0"/>
-              </a:spcBef>
-              <a:spcAft>
-                <a:spcPts val="0"/>
-              </a:spcAft>
-              <a:defRPr/>
-            </a:pPr>
-            <a:r>
-              <a:rPr lang="en-US" sz="1200" dirty="0">
-                <a:solidFill>
-                  <a:srgbClr val="5B9CD5"/>
-                </a:solidFill>
-                <a:latin typeface="Arial" panose="020B0604020202020204" pitchFamily="34" charset="0"/>
-                <a:cs typeface="Arial" panose="020B0604020202020204" pitchFamily="34" charset="0"/>
-              </a:rPr>
-              <a:t>Availability Zone</a:t>
-            </a:r>
-          </a:p>
-        </p:txBody>
-      </p:sp>
-      <p:sp>
-        <p:nvSpPr>
-          <p:cNvPr id="25" name="TextBox 16">
-            <a:extLst>
-              <a:ext uri="{FF2B5EF4-FFF2-40B4-BE49-F238E27FC236}">
-                <a16:creationId xmlns:a16="http://schemas.microsoft.com/office/drawing/2014/main" id="{CDA22A1A-B211-4DB0-86BE-93AF1BD884CB}"/>
-              </a:ext>
-            </a:extLst>
-          </p:cNvPr>
-          <p:cNvSpPr txBox="1">
-            <a:spLocks noChangeArrowheads="1"/>
-          </p:cNvSpPr>
-          <p:nvPr/>
-        </p:nvSpPr>
-        <p:spPr bwMode="auto">
-          <a:xfrm>
-            <a:off x="5248087" y="2147249"/>
-            <a:ext cx="1511300" cy="430212"/>
-          </a:xfrm>
-          <a:prstGeom prst="rect">
-            <a:avLst/>
-          </a:prstGeom>
-          <a:noFill/>
-          <a:ln>
-            <a:noFill/>
-          </a:ln>
-          <a:extLst>
-            <a:ext uri="{909E8E84-426E-40DD-AFC4-6F175D3DCCD1}">
-              <a14:hiddenFill xmlns:a14="http://schemas.microsoft.com/office/drawing/2010/main">
-                <a:solidFill>
-                  <a:srgbClr val="FFFFFF"/>
-                </a:solidFill>
-              </a14:hiddenFill>
-            </a:ext>
-            <a:ext uri="{91240B29-F687-4F45-9708-019B960494DF}">
-              <a14:hiddenLine xmlns:a14="http://schemas.microsoft.com/office/drawing/2010/main" w="9525">
-                <a:solidFill>
-                  <a:srgbClr val="000000"/>
-                </a:solidFill>
-                <a:miter lim="800000"/>
-                <a:headEnd/>
-                <a:tailEnd/>
-              </a14:hiddenLine>
-            </a:ext>
-          </a:extLst>
-        </p:spPr>
-        <p:txBody>
-          <a:bodyPr>
-            <a:spAutoFit/>
-          </a:bodyPr>
-          <a:lstStyle>
-            <a:lvl1pPr>
-              <a:defRPr>
-                <a:solidFill>
-                  <a:schemeClr val="tx1"/>
-                </a:solidFill>
-                <a:latin typeface="Calibri" panose="020F0502020204030204" pitchFamily="34" charset="0"/>
-              </a:defRPr>
-            </a:lvl1pPr>
-            <a:lvl2pPr marL="742950" indent="-285750">
-              <a:defRPr>
-                <a:solidFill>
-                  <a:schemeClr val="tx1"/>
-                </a:solidFill>
-                <a:latin typeface="Calibri" panose="020F0502020204030204" pitchFamily="34" charset="0"/>
-              </a:defRPr>
-            </a:lvl2pPr>
-            <a:lvl3pPr marL="1143000" indent="-228600">
-              <a:defRPr>
-                <a:solidFill>
-                  <a:schemeClr val="tx1"/>
-                </a:solidFill>
-                <a:latin typeface="Calibri" panose="020F0502020204030204" pitchFamily="34" charset="0"/>
-              </a:defRPr>
-            </a:lvl3pPr>
-            <a:lvl4pPr marL="1600200" indent="-228600">
-              <a:defRPr>
-                <a:solidFill>
-                  <a:schemeClr val="tx1"/>
-                </a:solidFill>
-                <a:latin typeface="Calibri" panose="020F0502020204030204" pitchFamily="34" charset="0"/>
-              </a:defRPr>
-            </a:lvl4pPr>
-            <a:lvl5pPr marL="2057400" indent="-228600">
-              <a:defRPr>
-                <a:solidFill>
-                  <a:schemeClr val="tx1"/>
-                </a:solidFill>
-                <a:latin typeface="Calibri" panose="020F0502020204030204" pitchFamily="34" charset="0"/>
-              </a:defRPr>
-            </a:lvl5pPr>
-            <a:lvl6pPr marL="2514600" indent="-228600" eaLnBrk="0" fontAlgn="base" hangingPunct="0">
-              <a:spcBef>
-                <a:spcPct val="0"/>
-              </a:spcBef>
-              <a:spcAft>
-                <a:spcPct val="0"/>
-              </a:spcAft>
-              <a:defRPr>
-                <a:solidFill>
-                  <a:schemeClr val="tx1"/>
-                </a:solidFill>
-                <a:latin typeface="Calibri" panose="020F0502020204030204" pitchFamily="34" charset="0"/>
-              </a:defRPr>
-            </a:lvl6pPr>
-            <a:lvl7pPr marL="2971800" indent="-228600" eaLnBrk="0" fontAlgn="base" hangingPunct="0">
-              <a:spcBef>
-                <a:spcPct val="0"/>
-              </a:spcBef>
-              <a:spcAft>
-                <a:spcPct val="0"/>
-              </a:spcAft>
-              <a:defRPr>
-                <a:solidFill>
-                  <a:schemeClr val="tx1"/>
-                </a:solidFill>
-                <a:latin typeface="Calibri" panose="020F0502020204030204" pitchFamily="34" charset="0"/>
-              </a:defRPr>
-            </a:lvl7pPr>
-            <a:lvl8pPr marL="3429000" indent="-228600" eaLnBrk="0" fontAlgn="base" hangingPunct="0">
-              <a:spcBef>
-                <a:spcPct val="0"/>
-              </a:spcBef>
-              <a:spcAft>
-                <a:spcPct val="0"/>
-              </a:spcAft>
-              <a:defRPr>
-                <a:solidFill>
-                  <a:schemeClr val="tx1"/>
-                </a:solidFill>
-                <a:latin typeface="Calibri" panose="020F0502020204030204" pitchFamily="34" charset="0"/>
-              </a:defRPr>
-            </a:lvl8pPr>
-            <a:lvl9pPr marL="3886200" indent="-228600" eaLnBrk="0" fontAlgn="base" hangingPunct="0">
-              <a:spcBef>
-                <a:spcPct val="0"/>
-              </a:spcBef>
-              <a:spcAft>
-                <a:spcPct val="0"/>
-              </a:spcAft>
-              <a:defRPr>
-                <a:solidFill>
-                  <a:schemeClr val="tx1"/>
-                </a:solidFill>
-                <a:latin typeface="Calibri" panose="020F0502020204030204" pitchFamily="34" charset="0"/>
-              </a:defRPr>
-            </a:lvl9pPr>
-          </a:lstStyle>
-          <a:p>
-            <a:pPr algn="ctr" eaLnBrk="1" hangingPunct="1"/>
-            <a:r>
-              <a:rPr lang="en-US" altLang="en-US" sz="1100">
-                <a:latin typeface="Arial" panose="020B0604020202020204" pitchFamily="34" charset="0"/>
-                <a:ea typeface="Amazon Ember" panose="020B0603020204020204" pitchFamily="34" charset="0"/>
-                <a:cs typeface="Arial" panose="020B0604020202020204" pitchFamily="34" charset="0"/>
-              </a:rPr>
-              <a:t>SQL server </a:t>
-            </a:r>
-          </a:p>
-          <a:p>
-            <a:pPr algn="ctr" eaLnBrk="1" hangingPunct="1"/>
-            <a:r>
-              <a:rPr lang="en-US" altLang="en-US" sz="1100">
-                <a:latin typeface="Arial" panose="020B0604020202020204" pitchFamily="34" charset="0"/>
-                <a:ea typeface="Amazon Ember" panose="020B0603020204020204" pitchFamily="34" charset="0"/>
-                <a:cs typeface="Arial" panose="020B0604020202020204" pitchFamily="34" charset="0"/>
-              </a:rPr>
-              <a:t>instance</a:t>
-            </a:r>
-          </a:p>
-        </p:txBody>
-      </p:sp>
-      <p:pic>
-        <p:nvPicPr>
-          <p:cNvPr id="26" name="Graphic 45">
-            <a:extLst>
-              <a:ext uri="{FF2B5EF4-FFF2-40B4-BE49-F238E27FC236}">
-                <a16:creationId xmlns:a16="http://schemas.microsoft.com/office/drawing/2014/main" id="{77DC239C-6D26-408C-A44D-BC45F974A9DA}"/>
-              </a:ext>
-            </a:extLst>
-          </p:cNvPr>
-          <p:cNvPicPr>
-            <a:picLocks noChangeAspect="1" noChangeArrowheads="1"/>
-          </p:cNvPicPr>
-          <p:nvPr/>
-        </p:nvPicPr>
-        <p:blipFill>
-          <a:blip r:embed="rId6">
-            <a:extLst>
-              <a:ext uri="{28A0092B-C50C-407E-A947-70E740481C1C}">
-                <a14:useLocalDpi xmlns:a14="http://schemas.microsoft.com/office/drawing/2010/main" val="0"/>
-              </a:ext>
-            </a:extLst>
-          </a:blip>
-          <a:srcRect/>
-          <a:stretch>
-            <a:fillRect/>
-          </a:stretch>
-        </p:blipFill>
-        <p:spPr bwMode="auto">
-          <a:xfrm>
-            <a:off x="5773549" y="1678936"/>
-            <a:ext cx="457200" cy="457200"/>
-          </a:xfrm>
-          <a:prstGeom prst="rect">
-            <a:avLst/>
-          </a:prstGeom>
-          <a:noFill/>
-          <a:ln>
-            <a:noFill/>
-          </a:ln>
-          <a:extLst>
-            <a:ext uri="{909E8E84-426E-40DD-AFC4-6F175D3DCCD1}">
-              <a14:hiddenFill xmlns:a14="http://schemas.microsoft.com/office/drawing/2010/main">
-                <a:solidFill>
-                  <a:srgbClr val="FFFFFF"/>
-                </a:solidFill>
-              </a14:hiddenFill>
-            </a:ext>
-            <a:ext uri="{91240B29-F687-4F45-9708-019B960494DF}">
-              <a14:hiddenLine xmlns:a14="http://schemas.microsoft.com/office/drawing/2010/main" w="9525">
-                <a:solidFill>
-                  <a:srgbClr val="000000"/>
-                </a:solidFill>
-                <a:miter lim="800000"/>
-                <a:headEnd/>
-                <a:tailEnd/>
-              </a14:hiddenLine>
-            </a:ext>
-          </a:extLst>
-        </p:spPr>
-      </p:pic>
-      <p:sp>
-        <p:nvSpPr>
-          <p:cNvPr id="27" name="TextBox 62">
-            <a:extLst>
-              <a:ext uri="{FF2B5EF4-FFF2-40B4-BE49-F238E27FC236}">
-                <a16:creationId xmlns:a16="http://schemas.microsoft.com/office/drawing/2014/main" id="{F756ADFA-F9B3-4271-813F-10A2728FAE1C}"/>
-              </a:ext>
-            </a:extLst>
-          </p:cNvPr>
-          <p:cNvSpPr txBox="1">
-            <a:spLocks noChangeArrowheads="1"/>
-          </p:cNvSpPr>
-          <p:nvPr/>
-        </p:nvSpPr>
-        <p:spPr bwMode="auto">
-          <a:xfrm>
-            <a:off x="6130014" y="4639911"/>
-            <a:ext cx="1382713" cy="261938"/>
-          </a:xfrm>
-          <a:prstGeom prst="rect">
-            <a:avLst/>
-          </a:prstGeom>
-          <a:noFill/>
-          <a:ln>
-            <a:noFill/>
-          </a:ln>
-          <a:extLst>
-            <a:ext uri="{909E8E84-426E-40DD-AFC4-6F175D3DCCD1}">
-              <a14:hiddenFill xmlns:a14="http://schemas.microsoft.com/office/drawing/2010/main">
-                <a:solidFill>
-                  <a:srgbClr val="FFFFFF"/>
-                </a:solidFill>
-              </a14:hiddenFill>
-            </a:ext>
-            <a:ext uri="{91240B29-F687-4F45-9708-019B960494DF}">
-              <a14:hiddenLine xmlns:a14="http://schemas.microsoft.com/office/drawing/2010/main" w="9525">
-                <a:solidFill>
-                  <a:srgbClr val="000000"/>
-                </a:solidFill>
-                <a:miter lim="800000"/>
-                <a:headEnd/>
-                <a:tailEnd/>
-              </a14:hiddenLine>
-            </a:ext>
-          </a:extLst>
-        </p:spPr>
-        <p:txBody>
-          <a:bodyPr>
-            <a:spAutoFit/>
-          </a:bodyPr>
-          <a:lstStyle>
-            <a:lvl1pPr>
-              <a:defRPr>
-                <a:solidFill>
-                  <a:schemeClr val="tx1"/>
-                </a:solidFill>
-                <a:latin typeface="Calibri" panose="020F0502020204030204" pitchFamily="34" charset="0"/>
-              </a:defRPr>
-            </a:lvl1pPr>
-            <a:lvl2pPr marL="742950" indent="-285750">
-              <a:defRPr>
-                <a:solidFill>
-                  <a:schemeClr val="tx1"/>
-                </a:solidFill>
-                <a:latin typeface="Calibri" panose="020F0502020204030204" pitchFamily="34" charset="0"/>
-              </a:defRPr>
-            </a:lvl2pPr>
-            <a:lvl3pPr marL="1143000" indent="-228600">
-              <a:defRPr>
-                <a:solidFill>
-                  <a:schemeClr val="tx1"/>
-                </a:solidFill>
-                <a:latin typeface="Calibri" panose="020F0502020204030204" pitchFamily="34" charset="0"/>
-              </a:defRPr>
-            </a:lvl3pPr>
-            <a:lvl4pPr marL="1600200" indent="-228600">
-              <a:defRPr>
-                <a:solidFill>
-                  <a:schemeClr val="tx1"/>
-                </a:solidFill>
-                <a:latin typeface="Calibri" panose="020F0502020204030204" pitchFamily="34" charset="0"/>
-              </a:defRPr>
-            </a:lvl4pPr>
-            <a:lvl5pPr marL="2057400" indent="-228600">
-              <a:defRPr>
-                <a:solidFill>
-                  <a:schemeClr val="tx1"/>
-                </a:solidFill>
-                <a:latin typeface="Calibri" panose="020F0502020204030204" pitchFamily="34" charset="0"/>
-              </a:defRPr>
-            </a:lvl5pPr>
-            <a:lvl6pPr marL="2514600" indent="-228600" eaLnBrk="0" fontAlgn="base" hangingPunct="0">
-              <a:spcBef>
-                <a:spcPct val="0"/>
-              </a:spcBef>
-              <a:spcAft>
-                <a:spcPct val="0"/>
-              </a:spcAft>
-              <a:defRPr>
-                <a:solidFill>
-                  <a:schemeClr val="tx1"/>
-                </a:solidFill>
-                <a:latin typeface="Calibri" panose="020F0502020204030204" pitchFamily="34" charset="0"/>
-              </a:defRPr>
-            </a:lvl6pPr>
-            <a:lvl7pPr marL="2971800" indent="-228600" eaLnBrk="0" fontAlgn="base" hangingPunct="0">
-              <a:spcBef>
-                <a:spcPct val="0"/>
-              </a:spcBef>
-              <a:spcAft>
-                <a:spcPct val="0"/>
-              </a:spcAft>
-              <a:defRPr>
-                <a:solidFill>
-                  <a:schemeClr val="tx1"/>
-                </a:solidFill>
-                <a:latin typeface="Calibri" panose="020F0502020204030204" pitchFamily="34" charset="0"/>
-              </a:defRPr>
-            </a:lvl7pPr>
-            <a:lvl8pPr marL="3429000" indent="-228600" eaLnBrk="0" fontAlgn="base" hangingPunct="0">
-              <a:spcBef>
-                <a:spcPct val="0"/>
-              </a:spcBef>
-              <a:spcAft>
-                <a:spcPct val="0"/>
-              </a:spcAft>
-              <a:defRPr>
-                <a:solidFill>
-                  <a:schemeClr val="tx1"/>
-                </a:solidFill>
-                <a:latin typeface="Calibri" panose="020F0502020204030204" pitchFamily="34" charset="0"/>
-              </a:defRPr>
-            </a:lvl8pPr>
-            <a:lvl9pPr marL="3886200" indent="-228600" eaLnBrk="0" fontAlgn="base" hangingPunct="0">
-              <a:spcBef>
-                <a:spcPct val="0"/>
-              </a:spcBef>
-              <a:spcAft>
-                <a:spcPct val="0"/>
-              </a:spcAft>
-              <a:defRPr>
-                <a:solidFill>
-                  <a:schemeClr val="tx1"/>
-                </a:solidFill>
-                <a:latin typeface="Calibri" panose="020F0502020204030204" pitchFamily="34" charset="0"/>
-              </a:defRPr>
-            </a:lvl9pPr>
-          </a:lstStyle>
-          <a:p>
-            <a:pPr algn="ctr" eaLnBrk="1" hangingPunct="1"/>
-            <a:r>
-              <a:rPr lang="en-US" altLang="en-US" sz="1100">
-                <a:latin typeface="Arial" panose="020B0604020202020204" pitchFamily="34" charset="0"/>
-                <a:ea typeface="Amazon Ember" panose="020B0603020204020204" pitchFamily="34" charset="0"/>
-                <a:cs typeface="Arial" panose="020B0604020202020204" pitchFamily="34" charset="0"/>
-              </a:rPr>
-              <a:t>S3 Standard</a:t>
-            </a:r>
-          </a:p>
-        </p:txBody>
-      </p:sp>
-      <p:pic>
-        <p:nvPicPr>
-          <p:cNvPr id="28" name="Graphic 63">
-            <a:extLst>
-              <a:ext uri="{FF2B5EF4-FFF2-40B4-BE49-F238E27FC236}">
-                <a16:creationId xmlns:a16="http://schemas.microsoft.com/office/drawing/2014/main" id="{5FBDEFD7-8510-4C1F-B9D0-79DF8A6870D9}"/>
-              </a:ext>
-            </a:extLst>
-          </p:cNvPr>
-          <p:cNvPicPr>
-            <a:picLocks noChangeAspect="1" noChangeArrowheads="1"/>
-          </p:cNvPicPr>
-          <p:nvPr/>
-        </p:nvPicPr>
-        <p:blipFill>
-          <a:blip r:embed="rId7">
-            <a:extLst>
-              <a:ext uri="{28A0092B-C50C-407E-A947-70E740481C1C}">
-                <a14:useLocalDpi xmlns:a14="http://schemas.microsoft.com/office/drawing/2010/main" val="0"/>
-              </a:ext>
-            </a:extLst>
-          </a:blip>
-          <a:srcRect/>
-          <a:stretch>
-            <a:fillRect/>
-          </a:stretch>
-        </p:blipFill>
-        <p:spPr bwMode="auto">
-          <a:xfrm>
-            <a:off x="6598327" y="4179536"/>
-            <a:ext cx="457200" cy="457200"/>
-          </a:xfrm>
-          <a:prstGeom prst="rect">
-            <a:avLst/>
-          </a:prstGeom>
-          <a:noFill/>
-          <a:ln>
-            <a:noFill/>
-          </a:ln>
-          <a:extLst>
-            <a:ext uri="{909E8E84-426E-40DD-AFC4-6F175D3DCCD1}">
-              <a14:hiddenFill xmlns:a14="http://schemas.microsoft.com/office/drawing/2010/main">
-                <a:solidFill>
-                  <a:srgbClr val="FFFFFF"/>
-                </a:solidFill>
-              </a14:hiddenFill>
-            </a:ext>
-            <a:ext uri="{91240B29-F687-4F45-9708-019B960494DF}">
-              <a14:hiddenLine xmlns:a14="http://schemas.microsoft.com/office/drawing/2010/main" w="9525">
-                <a:solidFill>
-                  <a:srgbClr val="000000"/>
-                </a:solidFill>
-                <a:miter lim="800000"/>
-                <a:headEnd/>
-                <a:tailEnd/>
-              </a14:hiddenLine>
-            </a:ext>
-          </a:extLst>
-        </p:spPr>
-      </p:pic>
-      <p:sp>
-        <p:nvSpPr>
-          <p:cNvPr id="29" name="TextBox 53">
-            <a:extLst>
-              <a:ext uri="{FF2B5EF4-FFF2-40B4-BE49-F238E27FC236}">
-                <a16:creationId xmlns:a16="http://schemas.microsoft.com/office/drawing/2014/main" id="{50527979-3B22-4EA3-8D2A-D6574B2E84A7}"/>
-              </a:ext>
-            </a:extLst>
-          </p:cNvPr>
-          <p:cNvSpPr txBox="1">
-            <a:spLocks noChangeArrowheads="1"/>
-          </p:cNvSpPr>
-          <p:nvPr/>
-        </p:nvSpPr>
-        <p:spPr bwMode="auto">
-          <a:xfrm>
-            <a:off x="3430520" y="2200110"/>
-            <a:ext cx="1511300" cy="261937"/>
-          </a:xfrm>
-          <a:prstGeom prst="rect">
-            <a:avLst/>
-          </a:prstGeom>
-          <a:noFill/>
-          <a:ln>
-            <a:noFill/>
-          </a:ln>
-          <a:extLst>
-            <a:ext uri="{909E8E84-426E-40DD-AFC4-6F175D3DCCD1}">
-              <a14:hiddenFill xmlns:a14="http://schemas.microsoft.com/office/drawing/2010/main">
-                <a:solidFill>
-                  <a:srgbClr val="FFFFFF"/>
-                </a:solidFill>
-              </a14:hiddenFill>
-            </a:ext>
-            <a:ext uri="{91240B29-F687-4F45-9708-019B960494DF}">
-              <a14:hiddenLine xmlns:a14="http://schemas.microsoft.com/office/drawing/2010/main" w="9525">
-                <a:solidFill>
-                  <a:srgbClr val="000000"/>
-                </a:solidFill>
-                <a:miter lim="800000"/>
-                <a:headEnd/>
-                <a:tailEnd/>
-              </a14:hiddenLine>
-            </a:ext>
-          </a:extLst>
-        </p:spPr>
-        <p:txBody>
-          <a:bodyPr>
-            <a:spAutoFit/>
-          </a:bodyPr>
-          <a:lstStyle>
-            <a:lvl1pPr>
-              <a:defRPr>
-                <a:solidFill>
-                  <a:schemeClr val="tx1"/>
-                </a:solidFill>
-                <a:latin typeface="Calibri" panose="020F0502020204030204" pitchFamily="34" charset="0"/>
-              </a:defRPr>
-            </a:lvl1pPr>
-            <a:lvl2pPr marL="742950" indent="-285750">
-              <a:defRPr>
-                <a:solidFill>
-                  <a:schemeClr val="tx1"/>
-                </a:solidFill>
-                <a:latin typeface="Calibri" panose="020F0502020204030204" pitchFamily="34" charset="0"/>
-              </a:defRPr>
-            </a:lvl2pPr>
-            <a:lvl3pPr marL="1143000" indent="-228600">
-              <a:defRPr>
-                <a:solidFill>
-                  <a:schemeClr val="tx1"/>
-                </a:solidFill>
-                <a:latin typeface="Calibri" panose="020F0502020204030204" pitchFamily="34" charset="0"/>
-              </a:defRPr>
-            </a:lvl3pPr>
-            <a:lvl4pPr marL="1600200" indent="-228600">
-              <a:defRPr>
-                <a:solidFill>
-                  <a:schemeClr val="tx1"/>
-                </a:solidFill>
-                <a:latin typeface="Calibri" panose="020F0502020204030204" pitchFamily="34" charset="0"/>
-              </a:defRPr>
-            </a:lvl4pPr>
-            <a:lvl5pPr marL="2057400" indent="-228600">
-              <a:defRPr>
-                <a:solidFill>
-                  <a:schemeClr val="tx1"/>
-                </a:solidFill>
-                <a:latin typeface="Calibri" panose="020F0502020204030204" pitchFamily="34" charset="0"/>
-              </a:defRPr>
-            </a:lvl5pPr>
-            <a:lvl6pPr marL="2514600" indent="-228600" eaLnBrk="0" fontAlgn="base" hangingPunct="0">
-              <a:spcBef>
-                <a:spcPct val="0"/>
-              </a:spcBef>
-              <a:spcAft>
-                <a:spcPct val="0"/>
-              </a:spcAft>
-              <a:defRPr>
-                <a:solidFill>
-                  <a:schemeClr val="tx1"/>
-                </a:solidFill>
-                <a:latin typeface="Calibri" panose="020F0502020204030204" pitchFamily="34" charset="0"/>
-              </a:defRPr>
-            </a:lvl6pPr>
-            <a:lvl7pPr marL="2971800" indent="-228600" eaLnBrk="0" fontAlgn="base" hangingPunct="0">
-              <a:spcBef>
-                <a:spcPct val="0"/>
-              </a:spcBef>
-              <a:spcAft>
-                <a:spcPct val="0"/>
-              </a:spcAft>
-              <a:defRPr>
-                <a:solidFill>
-                  <a:schemeClr val="tx1"/>
-                </a:solidFill>
-                <a:latin typeface="Calibri" panose="020F0502020204030204" pitchFamily="34" charset="0"/>
-              </a:defRPr>
-            </a:lvl7pPr>
-            <a:lvl8pPr marL="3429000" indent="-228600" eaLnBrk="0" fontAlgn="base" hangingPunct="0">
-              <a:spcBef>
-                <a:spcPct val="0"/>
-              </a:spcBef>
-              <a:spcAft>
-                <a:spcPct val="0"/>
-              </a:spcAft>
-              <a:defRPr>
-                <a:solidFill>
-                  <a:schemeClr val="tx1"/>
-                </a:solidFill>
-                <a:latin typeface="Calibri" panose="020F0502020204030204" pitchFamily="34" charset="0"/>
-              </a:defRPr>
-            </a:lvl8pPr>
-            <a:lvl9pPr marL="3886200" indent="-228600" eaLnBrk="0" fontAlgn="base" hangingPunct="0">
-              <a:spcBef>
-                <a:spcPct val="0"/>
-              </a:spcBef>
-              <a:spcAft>
-                <a:spcPct val="0"/>
-              </a:spcAft>
-              <a:defRPr>
-                <a:solidFill>
-                  <a:schemeClr val="tx1"/>
-                </a:solidFill>
-                <a:latin typeface="Calibri" panose="020F0502020204030204" pitchFamily="34" charset="0"/>
-              </a:defRPr>
-            </a:lvl9pPr>
-          </a:lstStyle>
-          <a:p>
-            <a:pPr algn="ctr" eaLnBrk="1" hangingPunct="1"/>
-            <a:r>
-              <a:rPr lang="en-US" altLang="en-US" sz="1100" dirty="0">
-                <a:latin typeface="Arial" panose="020B0604020202020204" pitchFamily="34" charset="0"/>
-                <a:ea typeface="Amazon Ember" panose="020B0603020204020204" pitchFamily="34" charset="0"/>
-                <a:cs typeface="Arial" panose="020B0604020202020204" pitchFamily="34" charset="0"/>
-              </a:rPr>
-              <a:t>Web Servers</a:t>
-            </a:r>
-          </a:p>
-        </p:txBody>
-      </p:sp>
-      <p:pic>
-        <p:nvPicPr>
-          <p:cNvPr id="30" name="Graphic 62">
-            <a:extLst>
-              <a:ext uri="{FF2B5EF4-FFF2-40B4-BE49-F238E27FC236}">
-                <a16:creationId xmlns:a16="http://schemas.microsoft.com/office/drawing/2014/main" id="{0A93D66E-BC03-47AF-B6C9-0295307670B0}"/>
-              </a:ext>
-            </a:extLst>
-          </p:cNvPr>
-          <p:cNvPicPr>
-            <a:picLocks noChangeAspect="1" noChangeArrowheads="1"/>
-          </p:cNvPicPr>
-          <p:nvPr/>
-        </p:nvPicPr>
-        <p:blipFill>
-          <a:blip r:embed="rId8">
-            <a:extLst>
-              <a:ext uri="{28A0092B-C50C-407E-A947-70E740481C1C}">
-                <a14:useLocalDpi xmlns:a14="http://schemas.microsoft.com/office/drawing/2010/main" val="0"/>
-              </a:ext>
-            </a:extLst>
-          </a:blip>
-          <a:srcRect/>
-          <a:stretch>
-            <a:fillRect/>
-          </a:stretch>
-        </p:blipFill>
-        <p:spPr bwMode="auto">
-          <a:xfrm>
-            <a:off x="3955983" y="1795297"/>
-            <a:ext cx="457200" cy="457200"/>
-          </a:xfrm>
-          <a:prstGeom prst="rect">
-            <a:avLst/>
-          </a:prstGeom>
-          <a:noFill/>
-          <a:ln>
-            <a:noFill/>
-          </a:ln>
-          <a:extLst>
-            <a:ext uri="{909E8E84-426E-40DD-AFC4-6F175D3DCCD1}">
-              <a14:hiddenFill xmlns:a14="http://schemas.microsoft.com/office/drawing/2010/main">
-                <a:solidFill>
-                  <a:srgbClr val="FFFFFF"/>
-                </a:solidFill>
-              </a14:hiddenFill>
-            </a:ext>
-            <a:ext uri="{91240B29-F687-4F45-9708-019B960494DF}">
-              <a14:hiddenLine xmlns:a14="http://schemas.microsoft.com/office/drawing/2010/main" w="9525">
-                <a:solidFill>
-                  <a:srgbClr val="000000"/>
-                </a:solidFill>
-                <a:miter lim="800000"/>
-                <a:headEnd/>
-                <a:tailEnd/>
-              </a14:hiddenLine>
-            </a:ext>
-          </a:extLst>
-        </p:spPr>
-      </p:pic>
-      <p:sp>
-        <p:nvSpPr>
-          <p:cNvPr id="31" name="TextBox 53">
-            <a:extLst>
-              <a:ext uri="{FF2B5EF4-FFF2-40B4-BE49-F238E27FC236}">
-                <a16:creationId xmlns:a16="http://schemas.microsoft.com/office/drawing/2014/main" id="{00FA343B-4A1D-4BA8-94C1-4EB2083235AC}"/>
-              </a:ext>
-            </a:extLst>
-          </p:cNvPr>
-          <p:cNvSpPr txBox="1">
-            <a:spLocks noChangeArrowheads="1"/>
-          </p:cNvSpPr>
-          <p:nvPr/>
-        </p:nvSpPr>
-        <p:spPr bwMode="auto">
-          <a:xfrm>
-            <a:off x="3430520" y="3541850"/>
-            <a:ext cx="1511300" cy="261937"/>
-          </a:xfrm>
-          <a:prstGeom prst="rect">
-            <a:avLst/>
-          </a:prstGeom>
-          <a:noFill/>
-          <a:ln>
-            <a:noFill/>
-          </a:ln>
-          <a:extLst>
-            <a:ext uri="{909E8E84-426E-40DD-AFC4-6F175D3DCCD1}">
-              <a14:hiddenFill xmlns:a14="http://schemas.microsoft.com/office/drawing/2010/main">
-                <a:solidFill>
-                  <a:srgbClr val="FFFFFF"/>
-                </a:solidFill>
-              </a14:hiddenFill>
-            </a:ext>
-            <a:ext uri="{91240B29-F687-4F45-9708-019B960494DF}">
-              <a14:hiddenLine xmlns:a14="http://schemas.microsoft.com/office/drawing/2010/main" w="9525">
-                <a:solidFill>
-                  <a:srgbClr val="000000"/>
-                </a:solidFill>
-                <a:miter lim="800000"/>
-                <a:headEnd/>
-                <a:tailEnd/>
-              </a14:hiddenLine>
-            </a:ext>
-          </a:extLst>
-        </p:spPr>
-        <p:txBody>
-          <a:bodyPr>
-            <a:spAutoFit/>
-          </a:bodyPr>
-          <a:lstStyle>
-            <a:lvl1pPr>
-              <a:defRPr>
-                <a:solidFill>
-                  <a:schemeClr val="tx1"/>
-                </a:solidFill>
-                <a:latin typeface="Calibri" panose="020F0502020204030204" pitchFamily="34" charset="0"/>
-              </a:defRPr>
-            </a:lvl1pPr>
-            <a:lvl2pPr marL="742950" indent="-285750">
-              <a:defRPr>
-                <a:solidFill>
-                  <a:schemeClr val="tx1"/>
-                </a:solidFill>
-                <a:latin typeface="Calibri" panose="020F0502020204030204" pitchFamily="34" charset="0"/>
-              </a:defRPr>
-            </a:lvl2pPr>
-            <a:lvl3pPr marL="1143000" indent="-228600">
-              <a:defRPr>
-                <a:solidFill>
-                  <a:schemeClr val="tx1"/>
-                </a:solidFill>
-                <a:latin typeface="Calibri" panose="020F0502020204030204" pitchFamily="34" charset="0"/>
-              </a:defRPr>
-            </a:lvl3pPr>
-            <a:lvl4pPr marL="1600200" indent="-228600">
-              <a:defRPr>
-                <a:solidFill>
-                  <a:schemeClr val="tx1"/>
-                </a:solidFill>
-                <a:latin typeface="Calibri" panose="020F0502020204030204" pitchFamily="34" charset="0"/>
-              </a:defRPr>
-            </a:lvl4pPr>
-            <a:lvl5pPr marL="2057400" indent="-228600">
-              <a:defRPr>
-                <a:solidFill>
-                  <a:schemeClr val="tx1"/>
-                </a:solidFill>
-                <a:latin typeface="Calibri" panose="020F0502020204030204" pitchFamily="34" charset="0"/>
-              </a:defRPr>
-            </a:lvl5pPr>
-            <a:lvl6pPr marL="2514600" indent="-228600" eaLnBrk="0" fontAlgn="base" hangingPunct="0">
-              <a:spcBef>
-                <a:spcPct val="0"/>
-              </a:spcBef>
-              <a:spcAft>
-                <a:spcPct val="0"/>
-              </a:spcAft>
-              <a:defRPr>
-                <a:solidFill>
-                  <a:schemeClr val="tx1"/>
-                </a:solidFill>
-                <a:latin typeface="Calibri" panose="020F0502020204030204" pitchFamily="34" charset="0"/>
-              </a:defRPr>
-            </a:lvl6pPr>
-            <a:lvl7pPr marL="2971800" indent="-228600" eaLnBrk="0" fontAlgn="base" hangingPunct="0">
-              <a:spcBef>
-                <a:spcPct val="0"/>
-              </a:spcBef>
-              <a:spcAft>
-                <a:spcPct val="0"/>
-              </a:spcAft>
-              <a:defRPr>
-                <a:solidFill>
-                  <a:schemeClr val="tx1"/>
-                </a:solidFill>
-                <a:latin typeface="Calibri" panose="020F0502020204030204" pitchFamily="34" charset="0"/>
-              </a:defRPr>
-            </a:lvl7pPr>
-            <a:lvl8pPr marL="3429000" indent="-228600" eaLnBrk="0" fontAlgn="base" hangingPunct="0">
-              <a:spcBef>
-                <a:spcPct val="0"/>
-              </a:spcBef>
-              <a:spcAft>
-                <a:spcPct val="0"/>
-              </a:spcAft>
-              <a:defRPr>
-                <a:solidFill>
-                  <a:schemeClr val="tx1"/>
-                </a:solidFill>
-                <a:latin typeface="Calibri" panose="020F0502020204030204" pitchFamily="34" charset="0"/>
-              </a:defRPr>
-            </a:lvl8pPr>
-            <a:lvl9pPr marL="3886200" indent="-228600" eaLnBrk="0" fontAlgn="base" hangingPunct="0">
-              <a:spcBef>
-                <a:spcPct val="0"/>
-              </a:spcBef>
-              <a:spcAft>
-                <a:spcPct val="0"/>
-              </a:spcAft>
-              <a:defRPr>
-                <a:solidFill>
-                  <a:schemeClr val="tx1"/>
-                </a:solidFill>
-                <a:latin typeface="Calibri" panose="020F0502020204030204" pitchFamily="34" charset="0"/>
-              </a:defRPr>
-            </a:lvl9pPr>
-          </a:lstStyle>
-          <a:p>
-            <a:pPr algn="ctr" eaLnBrk="1" hangingPunct="1"/>
-            <a:r>
-              <a:rPr lang="en-US" altLang="en-US" sz="1100" dirty="0">
-                <a:latin typeface="Arial" panose="020B0604020202020204" pitchFamily="34" charset="0"/>
-                <a:ea typeface="Amazon Ember" panose="020B0603020204020204" pitchFamily="34" charset="0"/>
-                <a:cs typeface="Arial" panose="020B0604020202020204" pitchFamily="34" charset="0"/>
-              </a:rPr>
-              <a:t>Web Servers</a:t>
-            </a:r>
-          </a:p>
-        </p:txBody>
-      </p:sp>
-      <p:pic>
-        <p:nvPicPr>
-          <p:cNvPr id="32" name="Graphic 62">
-            <a:extLst>
-              <a:ext uri="{FF2B5EF4-FFF2-40B4-BE49-F238E27FC236}">
-                <a16:creationId xmlns:a16="http://schemas.microsoft.com/office/drawing/2014/main" id="{4353B4AC-DDA3-4731-8A83-1D15F7DB3BEE}"/>
-              </a:ext>
-            </a:extLst>
-          </p:cNvPr>
-          <p:cNvPicPr>
-            <a:picLocks noChangeAspect="1" noChangeArrowheads="1"/>
-          </p:cNvPicPr>
-          <p:nvPr/>
-        </p:nvPicPr>
-        <p:blipFill>
-          <a:blip r:embed="rId8">
-            <a:extLst>
-              <a:ext uri="{28A0092B-C50C-407E-A947-70E740481C1C}">
-                <a14:useLocalDpi xmlns:a14="http://schemas.microsoft.com/office/drawing/2010/main" val="0"/>
-              </a:ext>
-            </a:extLst>
-          </a:blip>
-          <a:srcRect/>
-          <a:stretch>
-            <a:fillRect/>
-          </a:stretch>
-        </p:blipFill>
-        <p:spPr bwMode="auto">
-          <a:xfrm>
-            <a:off x="3955983" y="3137037"/>
-            <a:ext cx="457200" cy="457200"/>
-          </a:xfrm>
-          <a:prstGeom prst="rect">
-            <a:avLst/>
-          </a:prstGeom>
-          <a:noFill/>
-          <a:ln>
-            <a:noFill/>
-          </a:ln>
-          <a:extLst>
-            <a:ext uri="{909E8E84-426E-40DD-AFC4-6F175D3DCCD1}">
-              <a14:hiddenFill xmlns:a14="http://schemas.microsoft.com/office/drawing/2010/main">
-                <a:solidFill>
-                  <a:srgbClr val="FFFFFF"/>
-                </a:solidFill>
-              </a14:hiddenFill>
-            </a:ext>
-            <a:ext uri="{91240B29-F687-4F45-9708-019B960494DF}">
-              <a14:hiddenLine xmlns:a14="http://schemas.microsoft.com/office/drawing/2010/main" w="9525">
-                <a:solidFill>
-                  <a:srgbClr val="000000"/>
-                </a:solidFill>
-                <a:miter lim="800000"/>
-                <a:headEnd/>
-                <a:tailEnd/>
-              </a14:hiddenLine>
-            </a:ext>
-          </a:extLst>
-        </p:spPr>
-      </p:pic>
-      <p:sp>
-        <p:nvSpPr>
-          <p:cNvPr id="33" name="TextBox 52">
-            <a:extLst>
-              <a:ext uri="{FF2B5EF4-FFF2-40B4-BE49-F238E27FC236}">
-                <a16:creationId xmlns:a16="http://schemas.microsoft.com/office/drawing/2014/main" id="{997B874E-6663-4305-939F-436ABD3B576D}"/>
-              </a:ext>
-            </a:extLst>
-          </p:cNvPr>
-          <p:cNvSpPr txBox="1">
-            <a:spLocks noChangeArrowheads="1"/>
-          </p:cNvSpPr>
-          <p:nvPr/>
-        </p:nvSpPr>
-        <p:spPr bwMode="auto">
-          <a:xfrm>
-            <a:off x="3430520" y="5885067"/>
-            <a:ext cx="1511300" cy="430887"/>
-          </a:xfrm>
-          <a:prstGeom prst="rect">
-            <a:avLst/>
-          </a:prstGeom>
-          <a:noFill/>
-          <a:ln>
-            <a:noFill/>
-          </a:ln>
-          <a:extLst>
-            <a:ext uri="{909E8E84-426E-40DD-AFC4-6F175D3DCCD1}">
-              <a14:hiddenFill xmlns:a14="http://schemas.microsoft.com/office/drawing/2010/main">
-                <a:solidFill>
-                  <a:srgbClr val="FFFFFF"/>
-                </a:solidFill>
-              </a14:hiddenFill>
-            </a:ext>
-            <a:ext uri="{91240B29-F687-4F45-9708-019B960494DF}">
-              <a14:hiddenLine xmlns:a14="http://schemas.microsoft.com/office/drawing/2010/main" w="9525">
-                <a:solidFill>
-                  <a:srgbClr val="000000"/>
-                </a:solidFill>
-                <a:miter lim="800000"/>
-                <a:headEnd/>
-                <a:tailEnd/>
-              </a14:hiddenLine>
-            </a:ext>
-          </a:extLst>
-        </p:spPr>
-        <p:txBody>
-          <a:bodyPr>
-            <a:spAutoFit/>
-          </a:bodyPr>
-          <a:lstStyle>
-            <a:lvl1pPr>
-              <a:defRPr>
-                <a:solidFill>
-                  <a:schemeClr val="tx1"/>
-                </a:solidFill>
-                <a:latin typeface="Calibri" panose="020F0502020204030204" pitchFamily="34" charset="0"/>
-              </a:defRPr>
-            </a:lvl1pPr>
-            <a:lvl2pPr marL="742950" indent="-285750">
-              <a:defRPr>
-                <a:solidFill>
-                  <a:schemeClr val="tx1"/>
-                </a:solidFill>
-                <a:latin typeface="Calibri" panose="020F0502020204030204" pitchFamily="34" charset="0"/>
-              </a:defRPr>
-            </a:lvl2pPr>
-            <a:lvl3pPr marL="1143000" indent="-228600">
-              <a:defRPr>
-                <a:solidFill>
-                  <a:schemeClr val="tx1"/>
-                </a:solidFill>
-                <a:latin typeface="Calibri" panose="020F0502020204030204" pitchFamily="34" charset="0"/>
-              </a:defRPr>
-            </a:lvl3pPr>
-            <a:lvl4pPr marL="1600200" indent="-228600">
-              <a:defRPr>
-                <a:solidFill>
-                  <a:schemeClr val="tx1"/>
-                </a:solidFill>
-                <a:latin typeface="Calibri" panose="020F0502020204030204" pitchFamily="34" charset="0"/>
-              </a:defRPr>
-            </a:lvl4pPr>
-            <a:lvl5pPr marL="2057400" indent="-228600">
-              <a:defRPr>
-                <a:solidFill>
-                  <a:schemeClr val="tx1"/>
-                </a:solidFill>
-                <a:latin typeface="Calibri" panose="020F0502020204030204" pitchFamily="34" charset="0"/>
-              </a:defRPr>
-            </a:lvl5pPr>
-            <a:lvl6pPr marL="2514600" indent="-228600" eaLnBrk="0" fontAlgn="base" hangingPunct="0">
-              <a:spcBef>
-                <a:spcPct val="0"/>
-              </a:spcBef>
-              <a:spcAft>
-                <a:spcPct val="0"/>
-              </a:spcAft>
-              <a:defRPr>
-                <a:solidFill>
-                  <a:schemeClr val="tx1"/>
-                </a:solidFill>
-                <a:latin typeface="Calibri" panose="020F0502020204030204" pitchFamily="34" charset="0"/>
-              </a:defRPr>
-            </a:lvl6pPr>
-            <a:lvl7pPr marL="2971800" indent="-228600" eaLnBrk="0" fontAlgn="base" hangingPunct="0">
-              <a:spcBef>
-                <a:spcPct val="0"/>
-              </a:spcBef>
-              <a:spcAft>
-                <a:spcPct val="0"/>
-              </a:spcAft>
-              <a:defRPr>
-                <a:solidFill>
-                  <a:schemeClr val="tx1"/>
-                </a:solidFill>
-                <a:latin typeface="Calibri" panose="020F0502020204030204" pitchFamily="34" charset="0"/>
-              </a:defRPr>
-            </a:lvl7pPr>
-            <a:lvl8pPr marL="3429000" indent="-228600" eaLnBrk="0" fontAlgn="base" hangingPunct="0">
-              <a:spcBef>
-                <a:spcPct val="0"/>
-              </a:spcBef>
-              <a:spcAft>
-                <a:spcPct val="0"/>
-              </a:spcAft>
-              <a:defRPr>
-                <a:solidFill>
-                  <a:schemeClr val="tx1"/>
-                </a:solidFill>
-                <a:latin typeface="Calibri" panose="020F0502020204030204" pitchFamily="34" charset="0"/>
-              </a:defRPr>
-            </a:lvl8pPr>
-            <a:lvl9pPr marL="3886200" indent="-228600" eaLnBrk="0" fontAlgn="base" hangingPunct="0">
-              <a:spcBef>
-                <a:spcPct val="0"/>
-              </a:spcBef>
-              <a:spcAft>
-                <a:spcPct val="0"/>
-              </a:spcAft>
-              <a:defRPr>
-                <a:solidFill>
-                  <a:schemeClr val="tx1"/>
-                </a:solidFill>
-                <a:latin typeface="Calibri" panose="020F0502020204030204" pitchFamily="34" charset="0"/>
-              </a:defRPr>
-            </a:lvl9pPr>
-          </a:lstStyle>
-          <a:p>
-            <a:pPr algn="ctr" eaLnBrk="1" hangingPunct="1"/>
-            <a:r>
-              <a:rPr lang="en-US" altLang="en-US" sz="1100" dirty="0">
-                <a:latin typeface="Arial" panose="020B0604020202020204" pitchFamily="34" charset="0"/>
-                <a:ea typeface="Amazon Ember" panose="020B0603020204020204" pitchFamily="34" charset="0"/>
-                <a:cs typeface="Arial" panose="020B0604020202020204" pitchFamily="34" charset="0"/>
-              </a:rPr>
-              <a:t>Database Web Server</a:t>
-            </a:r>
-          </a:p>
-        </p:txBody>
-      </p:sp>
-      <p:pic>
-        <p:nvPicPr>
-          <p:cNvPr id="34" name="Graphic 60">
-            <a:extLst>
-              <a:ext uri="{FF2B5EF4-FFF2-40B4-BE49-F238E27FC236}">
-                <a16:creationId xmlns:a16="http://schemas.microsoft.com/office/drawing/2014/main" id="{54213A9C-1712-4022-83E4-2B9DF2DF5294}"/>
-              </a:ext>
-            </a:extLst>
-          </p:cNvPr>
-          <p:cNvPicPr>
-            <a:picLocks noChangeAspect="1" noChangeArrowheads="1"/>
-          </p:cNvPicPr>
-          <p:nvPr/>
-        </p:nvPicPr>
-        <p:blipFill>
-          <a:blip r:embed="rId9">
-            <a:extLst>
-              <a:ext uri="{28A0092B-C50C-407E-A947-70E740481C1C}">
-                <a14:useLocalDpi xmlns:a14="http://schemas.microsoft.com/office/drawing/2010/main" val="0"/>
-              </a:ext>
-            </a:extLst>
-          </a:blip>
-          <a:srcRect/>
-          <a:stretch>
-            <a:fillRect/>
-          </a:stretch>
-        </p:blipFill>
-        <p:spPr bwMode="auto">
-          <a:xfrm>
-            <a:off x="3955983" y="5492954"/>
-            <a:ext cx="457200" cy="457200"/>
-          </a:xfrm>
-          <a:prstGeom prst="rect">
-            <a:avLst/>
-          </a:prstGeom>
-          <a:noFill/>
-          <a:ln>
-            <a:noFill/>
-          </a:ln>
-          <a:extLst>
-            <a:ext uri="{909E8E84-426E-40DD-AFC4-6F175D3DCCD1}">
-              <a14:hiddenFill xmlns:a14="http://schemas.microsoft.com/office/drawing/2010/main">
-                <a:solidFill>
-                  <a:srgbClr val="FFFFFF"/>
-                </a:solidFill>
-              </a14:hiddenFill>
-            </a:ext>
-            <a:ext uri="{91240B29-F687-4F45-9708-019B960494DF}">
-              <a14:hiddenLine xmlns:a14="http://schemas.microsoft.com/office/drawing/2010/main" w="9525">
-                <a:solidFill>
-                  <a:srgbClr val="000000"/>
-                </a:solidFill>
-                <a:miter lim="800000"/>
-                <a:headEnd/>
-                <a:tailEnd/>
-              </a14:hiddenLine>
-            </a:ext>
-          </a:extLst>
-        </p:spPr>
-      </p:pic>
-      <p:cxnSp>
-        <p:nvCxnSpPr>
-          <p:cNvPr id="35" name="Straight Arrow Connector 34">
-            <a:extLst>
-              <a:ext uri="{FF2B5EF4-FFF2-40B4-BE49-F238E27FC236}">
-                <a16:creationId xmlns:a16="http://schemas.microsoft.com/office/drawing/2014/main" id="{396789A5-F63B-4857-8011-58F7B018E810}"/>
-              </a:ext>
-            </a:extLst>
-          </p:cNvPr>
-          <p:cNvCxnSpPr>
-            <a:cxnSpLocks/>
-          </p:cNvCxnSpPr>
-          <p:nvPr/>
-        </p:nvCxnSpPr>
-        <p:spPr>
-          <a:xfrm>
-            <a:off x="3136590" y="3429000"/>
-            <a:ext cx="819392" cy="0"/>
-          </a:xfrm>
-          <a:prstGeom prst="straightConnector1">
-            <a:avLst/>
-          </a:prstGeom>
-          <a:ln w="12700">
-            <a:solidFill>
-              <a:srgbClr val="545B64"/>
-            </a:solidFill>
-            <a:headEnd type="none" w="med" len="sm"/>
-            <a:tailEnd type="arrow" w="med" len="sm"/>
-          </a:ln>
-        </p:spPr>
-        <p:style>
-          <a:lnRef idx="1">
-            <a:schemeClr val="accent1"/>
-          </a:lnRef>
-          <a:fillRef idx="0">
-            <a:schemeClr val="accent1"/>
-          </a:fillRef>
-          <a:effectRef idx="0">
-            <a:schemeClr val="accent1"/>
-          </a:effectRef>
-          <a:fontRef idx="minor">
-            <a:schemeClr val="tx1"/>
-          </a:fontRef>
-        </p:style>
-      </p:cxnSp>
-      <p:sp>
-        <p:nvSpPr>
-          <p:cNvPr id="39" name="Freeform 35">
-            <a:extLst>
-              <a:ext uri="{FF2B5EF4-FFF2-40B4-BE49-F238E27FC236}">
-                <a16:creationId xmlns:a16="http://schemas.microsoft.com/office/drawing/2014/main" id="{6A03670A-48AF-44B8-9EF1-CE488C1E5A6C}"/>
-              </a:ext>
-            </a:extLst>
-          </p:cNvPr>
-          <p:cNvSpPr/>
-          <p:nvPr/>
-        </p:nvSpPr>
-        <p:spPr>
-          <a:xfrm rot="16200000" flipH="1" flipV="1">
-            <a:off x="3670485" y="3394512"/>
-            <a:ext cx="3145400" cy="1511301"/>
+          <a:xfrm rot="10800000" flipH="1" flipV="1">
+            <a:off x="2378451" y="2948283"/>
+            <a:ext cx="311448" cy="742215"/>
           </a:xfrm>
           <a:custGeom>
             <a:avLst/>
@@ -5880,12 +6343,12 @@
             </a:pathLst>
           </a:custGeom>
           <a:noFill/>
-          <a:ln w="12700">
+          <a:ln w="15875">
             <a:solidFill>
               <a:schemeClr val="tx2"/>
             </a:solidFill>
-            <a:headEnd type="none" w="med" len="sm"/>
-            <a:tailEnd type="arrow" w="med" len="sm"/>
+            <a:headEnd type="arrow" w="med" len="sm"/>
+            <a:tailEnd type="none" w="med" len="sm"/>
           </a:ln>
         </p:spPr>
         <p:style>
@@ -5918,504 +6381,6 @@
               <a:defRPr/>
             </a:pPr>
             <a:endParaRPr lang="en-US"/>
-          </a:p>
-        </p:txBody>
-      </p:sp>
-      <p:sp>
-        <p:nvSpPr>
-          <p:cNvPr id="40" name="Freeform 35">
-            <a:extLst>
-              <a:ext uri="{FF2B5EF4-FFF2-40B4-BE49-F238E27FC236}">
-                <a16:creationId xmlns:a16="http://schemas.microsoft.com/office/drawing/2014/main" id="{578A6E0E-888E-4B25-97A5-D242F3943664}"/>
-              </a:ext>
-            </a:extLst>
-          </p:cNvPr>
-          <p:cNvSpPr/>
-          <p:nvPr/>
-        </p:nvSpPr>
-        <p:spPr>
-          <a:xfrm rot="16200000" flipH="1" flipV="1">
-            <a:off x="4738524" y="2293608"/>
-            <a:ext cx="854640" cy="1422346"/>
-          </a:xfrm>
-          <a:custGeom>
-            <a:avLst/>
-            <a:gdLst>
-              <a:gd name="connsiteX0" fmla="*/ 1371600 w 1371600"/>
-              <a:gd name="connsiteY0" fmla="*/ 711200 h 711200"/>
-              <a:gd name="connsiteX1" fmla="*/ 1371600 w 1371600"/>
-              <a:gd name="connsiteY1" fmla="*/ 0 h 711200"/>
-              <a:gd name="connsiteX2" fmla="*/ 0 w 1371600"/>
-              <a:gd name="connsiteY2" fmla="*/ 0 h 711200"/>
-            </a:gdLst>
-            <a:ahLst/>
-            <a:cxnLst>
-              <a:cxn ang="0">
-                <a:pos x="connsiteX0" y="connsiteY0"/>
-              </a:cxn>
-              <a:cxn ang="0">
-                <a:pos x="connsiteX1" y="connsiteY1"/>
-              </a:cxn>
-              <a:cxn ang="0">
-                <a:pos x="connsiteX2" y="connsiteY2"/>
-              </a:cxn>
-            </a:cxnLst>
-            <a:rect l="l" t="t" r="r" b="b"/>
-            <a:pathLst>
-              <a:path w="1371600" h="711200">
-                <a:moveTo>
-                  <a:pt x="1371600" y="711200"/>
-                </a:moveTo>
-                <a:lnTo>
-                  <a:pt x="1371600" y="0"/>
-                </a:lnTo>
-                <a:lnTo>
-                  <a:pt x="0" y="0"/>
-                </a:lnTo>
-              </a:path>
-            </a:pathLst>
-          </a:custGeom>
-          <a:noFill/>
-          <a:ln w="12700">
-            <a:solidFill>
-              <a:schemeClr val="tx2"/>
-            </a:solidFill>
-            <a:headEnd type="none" w="med" len="sm"/>
-            <a:tailEnd type="arrow" w="med" len="sm"/>
-          </a:ln>
-        </p:spPr>
-        <p:style>
-          <a:lnRef idx="2">
-            <a:schemeClr val="accent1">
-              <a:shade val="50000"/>
-            </a:schemeClr>
-          </a:lnRef>
-          <a:fillRef idx="1">
-            <a:schemeClr val="accent1"/>
-          </a:fillRef>
-          <a:effectRef idx="0">
-            <a:schemeClr val="accent1"/>
-          </a:effectRef>
-          <a:fontRef idx="minor">
-            <a:schemeClr val="lt1"/>
-          </a:fontRef>
-        </p:style>
-        <p:txBody>
-          <a:bodyPr anchor="ctr"/>
-          <a:lstStyle/>
-          <a:p>
-            <a:pPr algn="ctr" eaLnBrk="1" fontAlgn="auto" hangingPunct="1">
-              <a:spcBef>
-                <a:spcPts val="0"/>
-              </a:spcBef>
-              <a:spcAft>
-                <a:spcPts val="0"/>
-              </a:spcAft>
-              <a:defRPr/>
-            </a:pPr>
-            <a:endParaRPr lang="en-US"/>
-          </a:p>
-        </p:txBody>
-      </p:sp>
-      <p:cxnSp>
-        <p:nvCxnSpPr>
-          <p:cNvPr id="41" name="Straight Arrow Connector 40">
-            <a:extLst>
-              <a:ext uri="{FF2B5EF4-FFF2-40B4-BE49-F238E27FC236}">
-                <a16:creationId xmlns:a16="http://schemas.microsoft.com/office/drawing/2014/main" id="{602CEBEB-1B4C-4ABE-88C0-886F51B57CD6}"/>
-              </a:ext>
-            </a:extLst>
-          </p:cNvPr>
-          <p:cNvCxnSpPr>
-            <a:cxnSpLocks/>
-          </p:cNvCxnSpPr>
-          <p:nvPr/>
-        </p:nvCxnSpPr>
-        <p:spPr>
-          <a:xfrm>
-            <a:off x="4482858" y="2110132"/>
-            <a:ext cx="1126668" cy="0"/>
-          </a:xfrm>
-          <a:prstGeom prst="straightConnector1">
-            <a:avLst/>
-          </a:prstGeom>
-          <a:ln w="12700">
-            <a:solidFill>
-              <a:srgbClr val="545B64"/>
-            </a:solidFill>
-            <a:headEnd type="none" w="med" len="sm"/>
-            <a:tailEnd type="arrow" w="med" len="sm"/>
-          </a:ln>
-        </p:spPr>
-        <p:style>
-          <a:lnRef idx="1">
-            <a:schemeClr val="accent1"/>
-          </a:lnRef>
-          <a:fillRef idx="0">
-            <a:schemeClr val="accent1"/>
-          </a:fillRef>
-          <a:effectRef idx="0">
-            <a:schemeClr val="accent1"/>
-          </a:effectRef>
-          <a:fontRef idx="minor">
-            <a:schemeClr val="tx1"/>
-          </a:fontRef>
-        </p:style>
-      </p:cxnSp>
-      <p:sp>
-        <p:nvSpPr>
-          <p:cNvPr id="43" name="TextBox 12">
-            <a:extLst>
-              <a:ext uri="{FF2B5EF4-FFF2-40B4-BE49-F238E27FC236}">
-                <a16:creationId xmlns:a16="http://schemas.microsoft.com/office/drawing/2014/main" id="{1023D797-E215-493B-B75C-DB0F432FD43A}"/>
-              </a:ext>
-            </a:extLst>
-          </p:cNvPr>
-          <p:cNvSpPr txBox="1">
-            <a:spLocks noChangeArrowheads="1"/>
-          </p:cNvSpPr>
-          <p:nvPr/>
-        </p:nvSpPr>
-        <p:spPr bwMode="auto">
-          <a:xfrm>
-            <a:off x="926498" y="3666378"/>
-            <a:ext cx="1330325" cy="430887"/>
-          </a:xfrm>
-          <a:prstGeom prst="rect">
-            <a:avLst/>
-          </a:prstGeom>
-          <a:noFill/>
-          <a:ln>
-            <a:noFill/>
-          </a:ln>
-          <a:extLst>
-            <a:ext uri="{909E8E84-426E-40DD-AFC4-6F175D3DCCD1}">
-              <a14:hiddenFill xmlns:a14="http://schemas.microsoft.com/office/drawing/2010/main">
-                <a:solidFill>
-                  <a:srgbClr val="FFFFFF"/>
-                </a:solidFill>
-              </a14:hiddenFill>
-            </a:ext>
-            <a:ext uri="{91240B29-F687-4F45-9708-019B960494DF}">
-              <a14:hiddenLine xmlns:a14="http://schemas.microsoft.com/office/drawing/2010/main" w="9525">
-                <a:solidFill>
-                  <a:srgbClr val="000000"/>
-                </a:solidFill>
-                <a:miter lim="800000"/>
-                <a:headEnd/>
-                <a:tailEnd/>
-              </a14:hiddenLine>
-            </a:ext>
-          </a:extLst>
-        </p:spPr>
-        <p:txBody>
-          <a:bodyPr>
-            <a:spAutoFit/>
-          </a:bodyPr>
-          <a:lstStyle>
-            <a:lvl1pPr>
-              <a:defRPr>
-                <a:solidFill>
-                  <a:schemeClr val="tx1"/>
-                </a:solidFill>
-                <a:latin typeface="Calibri" panose="020F0502020204030204" pitchFamily="34" charset="0"/>
-              </a:defRPr>
-            </a:lvl1pPr>
-            <a:lvl2pPr marL="742950" indent="-285750">
-              <a:defRPr>
-                <a:solidFill>
-                  <a:schemeClr val="tx1"/>
-                </a:solidFill>
-                <a:latin typeface="Calibri" panose="020F0502020204030204" pitchFamily="34" charset="0"/>
-              </a:defRPr>
-            </a:lvl2pPr>
-            <a:lvl3pPr marL="1143000" indent="-228600">
-              <a:defRPr>
-                <a:solidFill>
-                  <a:schemeClr val="tx1"/>
-                </a:solidFill>
-                <a:latin typeface="Calibri" panose="020F0502020204030204" pitchFamily="34" charset="0"/>
-              </a:defRPr>
-            </a:lvl3pPr>
-            <a:lvl4pPr marL="1600200" indent="-228600">
-              <a:defRPr>
-                <a:solidFill>
-                  <a:schemeClr val="tx1"/>
-                </a:solidFill>
-                <a:latin typeface="Calibri" panose="020F0502020204030204" pitchFamily="34" charset="0"/>
-              </a:defRPr>
-            </a:lvl4pPr>
-            <a:lvl5pPr marL="2057400" indent="-228600">
-              <a:defRPr>
-                <a:solidFill>
-                  <a:schemeClr val="tx1"/>
-                </a:solidFill>
-                <a:latin typeface="Calibri" panose="020F0502020204030204" pitchFamily="34" charset="0"/>
-              </a:defRPr>
-            </a:lvl5pPr>
-            <a:lvl6pPr marL="2514600" indent="-228600" eaLnBrk="0" fontAlgn="base" hangingPunct="0">
-              <a:spcBef>
-                <a:spcPct val="0"/>
-              </a:spcBef>
-              <a:spcAft>
-                <a:spcPct val="0"/>
-              </a:spcAft>
-              <a:defRPr>
-                <a:solidFill>
-                  <a:schemeClr val="tx1"/>
-                </a:solidFill>
-                <a:latin typeface="Calibri" panose="020F0502020204030204" pitchFamily="34" charset="0"/>
-              </a:defRPr>
-            </a:lvl6pPr>
-            <a:lvl7pPr marL="2971800" indent="-228600" eaLnBrk="0" fontAlgn="base" hangingPunct="0">
-              <a:spcBef>
-                <a:spcPct val="0"/>
-              </a:spcBef>
-              <a:spcAft>
-                <a:spcPct val="0"/>
-              </a:spcAft>
-              <a:defRPr>
-                <a:solidFill>
-                  <a:schemeClr val="tx1"/>
-                </a:solidFill>
-                <a:latin typeface="Calibri" panose="020F0502020204030204" pitchFamily="34" charset="0"/>
-              </a:defRPr>
-            </a:lvl7pPr>
-            <a:lvl8pPr marL="3429000" indent="-228600" eaLnBrk="0" fontAlgn="base" hangingPunct="0">
-              <a:spcBef>
-                <a:spcPct val="0"/>
-              </a:spcBef>
-              <a:spcAft>
-                <a:spcPct val="0"/>
-              </a:spcAft>
-              <a:defRPr>
-                <a:solidFill>
-                  <a:schemeClr val="tx1"/>
-                </a:solidFill>
-                <a:latin typeface="Calibri" panose="020F0502020204030204" pitchFamily="34" charset="0"/>
-              </a:defRPr>
-            </a:lvl8pPr>
-            <a:lvl9pPr marL="3886200" indent="-228600" eaLnBrk="0" fontAlgn="base" hangingPunct="0">
-              <a:spcBef>
-                <a:spcPct val="0"/>
-              </a:spcBef>
-              <a:spcAft>
-                <a:spcPct val="0"/>
-              </a:spcAft>
-              <a:defRPr>
-                <a:solidFill>
-                  <a:schemeClr val="tx1"/>
-                </a:solidFill>
-                <a:latin typeface="Calibri" panose="020F0502020204030204" pitchFamily="34" charset="0"/>
-              </a:defRPr>
-            </a:lvl9pPr>
-          </a:lstStyle>
-          <a:p>
-            <a:pPr algn="ctr" eaLnBrk="1" hangingPunct="1"/>
-            <a:r>
-              <a:rPr lang="en-US" altLang="en-US" sz="1100" dirty="0">
-                <a:latin typeface="Arial" panose="020B0604020202020204" pitchFamily="34" charset="0"/>
-                <a:ea typeface="Amazon Ember" panose="020B0603020204020204" pitchFamily="34" charset="0"/>
-                <a:cs typeface="Arial" panose="020B0604020202020204" pitchFamily="34" charset="0"/>
-              </a:rPr>
-              <a:t>Elastic IP</a:t>
-            </a:r>
-          </a:p>
-          <a:p>
-            <a:pPr algn="ctr" eaLnBrk="1" hangingPunct="1"/>
-            <a:r>
-              <a:rPr lang="en-US" altLang="en-US" sz="1100" dirty="0">
-                <a:latin typeface="Arial" panose="020B0604020202020204" pitchFamily="34" charset="0"/>
-                <a:ea typeface="Amazon Ember" panose="020B0603020204020204" pitchFamily="34" charset="0"/>
-                <a:cs typeface="Arial" panose="020B0604020202020204" pitchFamily="34" charset="0"/>
-              </a:rPr>
-              <a:t>address</a:t>
-            </a:r>
-          </a:p>
-        </p:txBody>
-      </p:sp>
-      <p:pic>
-        <p:nvPicPr>
-          <p:cNvPr id="44" name="Graphic 42">
-            <a:extLst>
-              <a:ext uri="{FF2B5EF4-FFF2-40B4-BE49-F238E27FC236}">
-                <a16:creationId xmlns:a16="http://schemas.microsoft.com/office/drawing/2014/main" id="{78C792F8-0A8C-41C7-B35D-B684E4349F5E}"/>
-              </a:ext>
-            </a:extLst>
-          </p:cNvPr>
-          <p:cNvPicPr>
-            <a:picLocks noChangeAspect="1" noChangeArrowheads="1"/>
-          </p:cNvPicPr>
-          <p:nvPr/>
-        </p:nvPicPr>
-        <p:blipFill>
-          <a:blip r:embed="rId10">
-            <a:extLst>
-              <a:ext uri="{28A0092B-C50C-407E-A947-70E740481C1C}">
-                <a14:useLocalDpi xmlns:a14="http://schemas.microsoft.com/office/drawing/2010/main" val="0"/>
-              </a:ext>
-            </a:extLst>
-          </a:blip>
-          <a:srcRect/>
-          <a:stretch>
-            <a:fillRect/>
-          </a:stretch>
-        </p:blipFill>
-        <p:spPr bwMode="auto">
-          <a:xfrm>
-            <a:off x="1364642" y="3200400"/>
-            <a:ext cx="457200" cy="457200"/>
-          </a:xfrm>
-          <a:prstGeom prst="rect">
-            <a:avLst/>
-          </a:prstGeom>
-          <a:noFill/>
-          <a:ln>
-            <a:noFill/>
-          </a:ln>
-          <a:extLst>
-            <a:ext uri="{909E8E84-426E-40DD-AFC4-6F175D3DCCD1}">
-              <a14:hiddenFill xmlns:a14="http://schemas.microsoft.com/office/drawing/2010/main">
-                <a:solidFill>
-                  <a:srgbClr val="FFFFFF"/>
-                </a:solidFill>
-              </a14:hiddenFill>
-            </a:ext>
-            <a:ext uri="{91240B29-F687-4F45-9708-019B960494DF}">
-              <a14:hiddenLine xmlns:a14="http://schemas.microsoft.com/office/drawing/2010/main" w="9525">
-                <a:solidFill>
-                  <a:srgbClr val="000000"/>
-                </a:solidFill>
-                <a:miter lim="800000"/>
-                <a:headEnd/>
-                <a:tailEnd/>
-              </a14:hiddenLine>
-            </a:ext>
-          </a:extLst>
-        </p:spPr>
-      </p:pic>
-      <p:sp>
-        <p:nvSpPr>
-          <p:cNvPr id="45" name="Rectangle 44">
-            <a:extLst>
-              <a:ext uri="{FF2B5EF4-FFF2-40B4-BE49-F238E27FC236}">
-                <a16:creationId xmlns:a16="http://schemas.microsoft.com/office/drawing/2014/main" id="{6AD733C9-7131-4B05-B1A7-22A1618AAD8B}"/>
-              </a:ext>
-            </a:extLst>
-          </p:cNvPr>
-          <p:cNvSpPr/>
-          <p:nvPr/>
-        </p:nvSpPr>
-        <p:spPr>
-          <a:xfrm>
-            <a:off x="7929485" y="376534"/>
-            <a:ext cx="3783674" cy="4154984"/>
-          </a:xfrm>
-          <a:prstGeom prst="rect">
-            <a:avLst/>
-          </a:prstGeom>
-        </p:spPr>
-        <p:txBody>
-          <a:bodyPr wrap="square">
-            <a:spAutoFit/>
-          </a:bodyPr>
-          <a:lstStyle/>
-          <a:p>
-            <a:pPr marL="228600" indent="-228600">
-              <a:buFont typeface="+mj-lt"/>
-              <a:buAutoNum type="arabicPeriod"/>
-            </a:pPr>
-            <a:r>
-              <a:rPr lang="en-AU" sz="1100" dirty="0"/>
-              <a:t>The Internet Gateway provides access into the application.</a:t>
-            </a:r>
-          </a:p>
-          <a:p>
-            <a:pPr marL="228600" indent="-228600">
-              <a:buFont typeface="+mj-lt"/>
-              <a:buAutoNum type="arabicPeriod"/>
-            </a:pPr>
-            <a:r>
-              <a:rPr lang="en-AU" sz="1100" dirty="0"/>
-              <a:t>The</a:t>
-            </a:r>
-            <a:r>
-              <a:rPr lang="en-AU" sz="1100" baseline="0" dirty="0"/>
-              <a:t> Elastic IP is a permanent public ip address which is connected to the load balancer using an internal ip address that may vary at will</a:t>
-            </a:r>
-          </a:p>
-          <a:p>
-            <a:pPr marL="228600" indent="-228600">
-              <a:buFont typeface="+mj-lt"/>
-              <a:buAutoNum type="arabicPeriod"/>
-            </a:pPr>
-            <a:r>
-              <a:rPr lang="en-AU" sz="1100" baseline="0" dirty="0"/>
-              <a:t>The Classic Load Balancer automatically scales up to handle the volume of traffic </a:t>
-            </a:r>
-          </a:p>
-          <a:p>
-            <a:pPr marL="228600" indent="-228600">
-              <a:buFont typeface="+mj-lt"/>
-              <a:buAutoNum type="arabicPeriod"/>
-            </a:pPr>
-            <a:r>
-              <a:rPr lang="en-AU" sz="1100" baseline="0" dirty="0"/>
-              <a:t>The application is spread across 2 availability zones</a:t>
-            </a:r>
-          </a:p>
-          <a:p>
-            <a:pPr marL="228600" indent="-228600">
-              <a:buFont typeface="+mj-lt"/>
-              <a:buAutoNum type="arabicPeriod"/>
-            </a:pPr>
-            <a:r>
-              <a:rPr lang="en-AU" sz="1100" baseline="0" dirty="0"/>
-              <a:t>The Webserver Auto-Scaling Group manages the Web Server instances. The ASG Scales Out increasing the number of web servers as traffic rises and Scales In as traffic decreases.</a:t>
-            </a:r>
-          </a:p>
-          <a:p>
-            <a:pPr marL="228600" indent="-228600">
-              <a:buFont typeface="+mj-lt"/>
-              <a:buAutoNum type="arabicPeriod"/>
-            </a:pPr>
-            <a:r>
-              <a:rPr lang="en-AU" sz="1100" baseline="0" dirty="0"/>
-              <a:t>The webservers connect to a SQL Server instance</a:t>
-            </a:r>
-          </a:p>
-          <a:p>
-            <a:pPr marL="228600" indent="-228600">
-              <a:buFont typeface="+mj-lt"/>
-              <a:buAutoNum type="arabicPeriod"/>
-            </a:pPr>
-            <a:r>
-              <a:rPr lang="en-AU" sz="1100" dirty="0"/>
-              <a:t>When a webserver is created by the ASG it i</a:t>
-            </a:r>
-            <a:r>
-              <a:rPr lang="en-AU" sz="1100" baseline="0" dirty="0"/>
-              <a:t>nstalls the LANSA MSI which has been uploaded to S3 by the customer</a:t>
-            </a:r>
-          </a:p>
-          <a:p>
-            <a:pPr marL="228600" indent="-228600">
-              <a:buFont typeface="+mj-lt"/>
-              <a:buAutoNum type="arabicPeriod"/>
-            </a:pPr>
-            <a:r>
-              <a:rPr lang="en-AU" sz="1100" dirty="0"/>
-              <a:t>The Database Auto Scaling Group web server is identical to the other web servers, except that it is the one instance that is responsible for maintaining the database structure in the database server. It is the instance which creates the tables when the application is installed. And upgrades the tables when the application is upgraded. The Database ASG is set to only have 1 instance running at a time. It is important that only 1 instance modifies </a:t>
-            </a:r>
-            <a:r>
-              <a:rPr lang="en-AU" sz="1100"/>
-              <a:t>the database </a:t>
-            </a:r>
-            <a:r>
-              <a:rPr lang="en-AU" sz="1100" dirty="0"/>
-              <a:t>structure.</a:t>
-            </a:r>
-            <a:endParaRPr lang="en-AU" sz="1100" baseline="0" dirty="0"/>
           </a:p>
         </p:txBody>
       </p:sp>
